--- a/exports/pptx/lessons/middle-module-08-yoga/day-01-hook.pptx
+++ b/exports/pptx/lessons/middle-module-08-yoga/day-01-hook.pptx
@@ -19,9 +19,13 @@
     <p:sldId id="267" r:id="rId13"/>
     <p:sldId id="268" r:id="rId14"/>
     <p:sldId id="269" r:id="rId15"/>
+    <p:sldId id="270" r:id="rId16"/>
+    <p:sldId id="271" r:id="rId17"/>
+    <p:sldId id="272" r:id="rId18"/>
+    <p:sldId id="273" r:id="rId19"/>
   </p:sldIdLst>
   <p:notesMasterIdLst>
-    <p:notesMasterId r:id="rId16"/>
+    <p:notesMasterId r:id="rId20"/>
   </p:notesMasterIdLst>
   <p:sldSz cx="9144000" cy="5143500"/>
   <p:notesSz cx="5143500" cy="9144000"/>
@@ -979,6 +983,358 @@
             <a:fld id="{F7021451-1387-4CA6-816F-3879F97B5CBC}" type="slidenum">
               <a:rPr lang="en-US"/>
               <a:t>14</a:t>
+            </a:fld>
+            <a:endParaRPr lang="en-US"/>
+          </a:p>
+        </p:txBody>
+      </p:sp>
+    </p:spTree>
+    <p:extLst>
+      <p:ext uri="{BB962C8B-B14F-4D97-AF65-F5344CB8AC3E}">
+        <p14:creationId xmlns:p14="http://schemas.microsoft.com/office/powerpoint/2010/main" val="1024086991"/>
+      </p:ext>
+    </p:extLst>
+  </p:cSld>
+  <p:clrMapOvr>
+    <a:masterClrMapping/>
+  </p:clrMapOvr>
+</p:notes>
+</file>
+
+<file path=ppt/notesSlides/notesSlide15.xml><?xml version="1.0" encoding="utf-8"?>
+<p:notes xmlns:a="http://schemas.openxmlformats.org/drawingml/2006/main" xmlns:r="http://schemas.openxmlformats.org/officeDocument/2006/relationships" xmlns:p="http://schemas.openxmlformats.org/presentationml/2006/main">
+  <p:cSld>
+    <p:spTree>
+      <p:nvGrpSpPr>
+        <p:cNvPr id="1" name=""/>
+        <p:cNvGrpSpPr/>
+        <p:nvPr/>
+      </p:nvGrpSpPr>
+      <p:grpSpPr>
+        <a:xfrm>
+          <a:off x="0" y="0"/>
+          <a:ext cx="0" cy="0"/>
+          <a:chOff x="0" y="0"/>
+          <a:chExt cx="0" cy="0"/>
+        </a:xfrm>
+      </p:grpSpPr>
+      <p:sp>
+        <p:nvSpPr>
+          <p:cNvPr id="2" name="Slide Image Placeholder 1"/>
+          <p:cNvSpPr>
+            <a:spLocks noGrp="1" noRot="1" noChangeAspect="1"/>
+          </p:cNvSpPr>
+          <p:nvPr>
+            <p:ph type="sldImg"/>
+          </p:nvPr>
+        </p:nvSpPr>
+        <p:spPr/>
+      </p:sp>
+      <p:sp>
+        <p:nvSpPr>
+          <p:cNvPr id="3" name="Notes Placeholder 2"/>
+          <p:cNvSpPr>
+            <a:spLocks noGrp="1"/>
+          </p:cNvSpPr>
+          <p:nvPr>
+            <p:ph type="body" idx="1"/>
+          </p:nvPr>
+        </p:nvSpPr>
+        <p:spPr/>
+        <p:txBody>
+          <a:bodyPr/>
+          <a:lstStyle/>
+          <a:p>
+            <a:r>
+              <a:rPr lang="en-US" dirty="0"/>
+              <a:t/>
+            </a:r>
+            <a:endParaRPr lang="en-US" dirty="0"/>
+          </a:p>
+        </p:txBody>
+      </p:sp>
+      <p:sp>
+        <p:nvSpPr>
+          <p:cNvPr id="4" name="Slide Number Placeholder 3"/>
+          <p:cNvSpPr>
+            <a:spLocks noGrp="1"/>
+          </p:cNvSpPr>
+          <p:nvPr>
+            <p:ph type="sldNum" sz="quarter" idx="10"/>
+          </p:nvPr>
+        </p:nvSpPr>
+        <p:spPr/>
+        <p:txBody>
+          <a:bodyPr/>
+          <a:lstStyle/>
+          <a:p>
+            <a:fld id="{F7021451-1387-4CA6-816F-3879F97B5CBC}" type="slidenum">
+              <a:rPr lang="en-US"/>
+              <a:t>15</a:t>
+            </a:fld>
+            <a:endParaRPr lang="en-US"/>
+          </a:p>
+        </p:txBody>
+      </p:sp>
+    </p:spTree>
+    <p:extLst>
+      <p:ext uri="{BB962C8B-B14F-4D97-AF65-F5344CB8AC3E}">
+        <p14:creationId xmlns:p14="http://schemas.microsoft.com/office/powerpoint/2010/main" val="1024086991"/>
+      </p:ext>
+    </p:extLst>
+  </p:cSld>
+  <p:clrMapOvr>
+    <a:masterClrMapping/>
+  </p:clrMapOvr>
+</p:notes>
+</file>
+
+<file path=ppt/notesSlides/notesSlide16.xml><?xml version="1.0" encoding="utf-8"?>
+<p:notes xmlns:a="http://schemas.openxmlformats.org/drawingml/2006/main" xmlns:r="http://schemas.openxmlformats.org/officeDocument/2006/relationships" xmlns:p="http://schemas.openxmlformats.org/presentationml/2006/main">
+  <p:cSld>
+    <p:spTree>
+      <p:nvGrpSpPr>
+        <p:cNvPr id="1" name=""/>
+        <p:cNvGrpSpPr/>
+        <p:nvPr/>
+      </p:nvGrpSpPr>
+      <p:grpSpPr>
+        <a:xfrm>
+          <a:off x="0" y="0"/>
+          <a:ext cx="0" cy="0"/>
+          <a:chOff x="0" y="0"/>
+          <a:chExt cx="0" cy="0"/>
+        </a:xfrm>
+      </p:grpSpPr>
+      <p:sp>
+        <p:nvSpPr>
+          <p:cNvPr id="2" name="Slide Image Placeholder 1"/>
+          <p:cNvSpPr>
+            <a:spLocks noGrp="1" noRot="1" noChangeAspect="1"/>
+          </p:cNvSpPr>
+          <p:nvPr>
+            <p:ph type="sldImg"/>
+          </p:nvPr>
+        </p:nvSpPr>
+        <p:spPr/>
+      </p:sp>
+      <p:sp>
+        <p:nvSpPr>
+          <p:cNvPr id="3" name="Notes Placeholder 2"/>
+          <p:cNvSpPr>
+            <a:spLocks noGrp="1"/>
+          </p:cNvSpPr>
+          <p:nvPr>
+            <p:ph type="body" idx="1"/>
+          </p:nvPr>
+        </p:nvSpPr>
+        <p:spPr/>
+        <p:txBody>
+          <a:bodyPr/>
+          <a:lstStyle/>
+          <a:p>
+            <a:r>
+              <a:rPr lang="en-US" dirty="0"/>
+              <a:t/>
+            </a:r>
+            <a:endParaRPr lang="en-US" dirty="0"/>
+          </a:p>
+        </p:txBody>
+      </p:sp>
+      <p:sp>
+        <p:nvSpPr>
+          <p:cNvPr id="4" name="Slide Number Placeholder 3"/>
+          <p:cNvSpPr>
+            <a:spLocks noGrp="1"/>
+          </p:cNvSpPr>
+          <p:nvPr>
+            <p:ph type="sldNum" sz="quarter" idx="10"/>
+          </p:nvPr>
+        </p:nvSpPr>
+        <p:spPr/>
+        <p:txBody>
+          <a:bodyPr/>
+          <a:lstStyle/>
+          <a:p>
+            <a:fld id="{F7021451-1387-4CA6-816F-3879F97B5CBC}" type="slidenum">
+              <a:rPr lang="en-US"/>
+              <a:t>16</a:t>
+            </a:fld>
+            <a:endParaRPr lang="en-US"/>
+          </a:p>
+        </p:txBody>
+      </p:sp>
+    </p:spTree>
+    <p:extLst>
+      <p:ext uri="{BB962C8B-B14F-4D97-AF65-F5344CB8AC3E}">
+        <p14:creationId xmlns:p14="http://schemas.microsoft.com/office/powerpoint/2010/main" val="1024086991"/>
+      </p:ext>
+    </p:extLst>
+  </p:cSld>
+  <p:clrMapOvr>
+    <a:masterClrMapping/>
+  </p:clrMapOvr>
+</p:notes>
+</file>
+
+<file path=ppt/notesSlides/notesSlide17.xml><?xml version="1.0" encoding="utf-8"?>
+<p:notes xmlns:a="http://schemas.openxmlformats.org/drawingml/2006/main" xmlns:r="http://schemas.openxmlformats.org/officeDocument/2006/relationships" xmlns:p="http://schemas.openxmlformats.org/presentationml/2006/main">
+  <p:cSld>
+    <p:spTree>
+      <p:nvGrpSpPr>
+        <p:cNvPr id="1" name=""/>
+        <p:cNvGrpSpPr/>
+        <p:nvPr/>
+      </p:nvGrpSpPr>
+      <p:grpSpPr>
+        <a:xfrm>
+          <a:off x="0" y="0"/>
+          <a:ext cx="0" cy="0"/>
+          <a:chOff x="0" y="0"/>
+          <a:chExt cx="0" cy="0"/>
+        </a:xfrm>
+      </p:grpSpPr>
+      <p:sp>
+        <p:nvSpPr>
+          <p:cNvPr id="2" name="Slide Image Placeholder 1"/>
+          <p:cNvSpPr>
+            <a:spLocks noGrp="1" noRot="1" noChangeAspect="1"/>
+          </p:cNvSpPr>
+          <p:nvPr>
+            <p:ph type="sldImg"/>
+          </p:nvPr>
+        </p:nvSpPr>
+        <p:spPr/>
+      </p:sp>
+      <p:sp>
+        <p:nvSpPr>
+          <p:cNvPr id="3" name="Notes Placeholder 2"/>
+          <p:cNvSpPr>
+            <a:spLocks noGrp="1"/>
+          </p:cNvSpPr>
+          <p:nvPr>
+            <p:ph type="body" idx="1"/>
+          </p:nvPr>
+        </p:nvSpPr>
+        <p:spPr/>
+        <p:txBody>
+          <a:bodyPr/>
+          <a:lstStyle/>
+          <a:p>
+            <a:r>
+              <a:rPr lang="en-US" dirty="0"/>
+              <a:t/>
+            </a:r>
+            <a:endParaRPr lang="en-US" dirty="0"/>
+          </a:p>
+        </p:txBody>
+      </p:sp>
+      <p:sp>
+        <p:nvSpPr>
+          <p:cNvPr id="4" name="Slide Number Placeholder 3"/>
+          <p:cNvSpPr>
+            <a:spLocks noGrp="1"/>
+          </p:cNvSpPr>
+          <p:nvPr>
+            <p:ph type="sldNum" sz="quarter" idx="10"/>
+          </p:nvPr>
+        </p:nvSpPr>
+        <p:spPr/>
+        <p:txBody>
+          <a:bodyPr/>
+          <a:lstStyle/>
+          <a:p>
+            <a:fld id="{F7021451-1387-4CA6-816F-3879F97B5CBC}" type="slidenum">
+              <a:rPr lang="en-US"/>
+              <a:t>17</a:t>
+            </a:fld>
+            <a:endParaRPr lang="en-US"/>
+          </a:p>
+        </p:txBody>
+      </p:sp>
+    </p:spTree>
+    <p:extLst>
+      <p:ext uri="{BB962C8B-B14F-4D97-AF65-F5344CB8AC3E}">
+        <p14:creationId xmlns:p14="http://schemas.microsoft.com/office/powerpoint/2010/main" val="1024086991"/>
+      </p:ext>
+    </p:extLst>
+  </p:cSld>
+  <p:clrMapOvr>
+    <a:masterClrMapping/>
+  </p:clrMapOvr>
+</p:notes>
+</file>
+
+<file path=ppt/notesSlides/notesSlide18.xml><?xml version="1.0" encoding="utf-8"?>
+<p:notes xmlns:a="http://schemas.openxmlformats.org/drawingml/2006/main" xmlns:r="http://schemas.openxmlformats.org/officeDocument/2006/relationships" xmlns:p="http://schemas.openxmlformats.org/presentationml/2006/main">
+  <p:cSld>
+    <p:spTree>
+      <p:nvGrpSpPr>
+        <p:cNvPr id="1" name=""/>
+        <p:cNvGrpSpPr/>
+        <p:nvPr/>
+      </p:nvGrpSpPr>
+      <p:grpSpPr>
+        <a:xfrm>
+          <a:off x="0" y="0"/>
+          <a:ext cx="0" cy="0"/>
+          <a:chOff x="0" y="0"/>
+          <a:chExt cx="0" cy="0"/>
+        </a:xfrm>
+      </p:grpSpPr>
+      <p:sp>
+        <p:nvSpPr>
+          <p:cNvPr id="2" name="Slide Image Placeholder 1"/>
+          <p:cNvSpPr>
+            <a:spLocks noGrp="1" noRot="1" noChangeAspect="1"/>
+          </p:cNvSpPr>
+          <p:nvPr>
+            <p:ph type="sldImg"/>
+          </p:nvPr>
+        </p:nvSpPr>
+        <p:spPr/>
+      </p:sp>
+      <p:sp>
+        <p:nvSpPr>
+          <p:cNvPr id="3" name="Notes Placeholder 2"/>
+          <p:cNvSpPr>
+            <a:spLocks noGrp="1"/>
+          </p:cNvSpPr>
+          <p:nvPr>
+            <p:ph type="body" idx="1"/>
+          </p:nvPr>
+        </p:nvSpPr>
+        <p:spPr/>
+        <p:txBody>
+          <a:bodyPr/>
+          <a:lstStyle/>
+          <a:p>
+            <a:r>
+              <a:rPr lang="en-US" dirty="0"/>
+              <a:t/>
+            </a:r>
+            <a:endParaRPr lang="en-US" dirty="0"/>
+          </a:p>
+        </p:txBody>
+      </p:sp>
+      <p:sp>
+        <p:nvSpPr>
+          <p:cNvPr id="4" name="Slide Number Placeholder 3"/>
+          <p:cNvSpPr>
+            <a:spLocks noGrp="1"/>
+          </p:cNvSpPr>
+          <p:nvPr>
+            <p:ph type="sldNum" sz="quarter" idx="10"/>
+          </p:nvPr>
+        </p:nvSpPr>
+        <p:spPr/>
+        <p:txBody>
+          <a:bodyPr/>
+          <a:lstStyle/>
+          <a:p>
+            <a:fld id="{F7021451-1387-4CA6-816F-3879F97B5CBC}" type="slidenum">
+              <a:rPr lang="en-US"/>
+              <a:t>18</a:t>
             </a:fld>
             <a:endParaRPr lang="en-US"/>
           </a:p>
@@ -2278,194 +2634,6 @@
         </p:nvSpPr>
         <p:spPr>
           <a:xfrm>
-            <a:off x="406301" y="1223963"/>
-            <a:ext cx="8498026" cy="274290"/>
-          </a:xfrm>
-          <a:prstGeom prst="rect">
-            <a:avLst/>
-          </a:prstGeom>
-          <a:noFill/>
-          <a:ln/>
-        </p:spPr>
-        <p:txBody>
-          <a:bodyPr wrap="square" lIns="0" tIns="0" rIns="0" bIns="0" rtlCol="0" anchor="t"/>
-          <a:lstStyle/>
-          <a:p>
-            <a:pPr algn="l" indent="0" marL="0">
-              <a:lnSpc>
-                <a:spcPts val="2160"/>
-              </a:lnSpc>
-              <a:spcBef>
-                <a:spcPts val="600"/>
-              </a:spcBef>
-              <a:spcAft>
-                <a:spcPts val="800"/>
-              </a:spcAft>
-              <a:buNone/>
-            </a:pPr>
-            <a:r>
-              <a:rPr lang="en-US" sz="1800" b="1" dirty="0">
-                <a:solidFill>
-                  <a:srgbClr val="FE4447"/>
-                </a:solidFill>
-                <a:latin typeface="Georgia" pitchFamily="34" charset="0"/>
-                <a:ea typeface="Georgia" pitchFamily="34" charset="-122"/>
-                <a:cs typeface="Georgia" pitchFamily="34" charset="-120"/>
-              </a:rPr>
-              <a:t>Learning objective</a:t>
-            </a:r>
-            <a:endParaRPr lang="en-US" sz="1800" dirty="0"/>
-          </a:p>
-        </p:txBody>
-      </p:sp>
-      <p:sp>
-        <p:nvSpPr>
-          <p:cNvPr id="6" name="Text 4"/>
-          <p:cNvSpPr/>
-          <p:nvPr/>
-        </p:nvSpPr>
-        <p:spPr>
-          <a:xfrm>
-            <a:off x="406301" y="1637854"/>
-            <a:ext cx="8498026" cy="426541"/>
-          </a:xfrm>
-          <a:prstGeom prst="rect">
-            <a:avLst/>
-          </a:prstGeom>
-          <a:noFill/>
-          <a:ln/>
-        </p:spPr>
-        <p:txBody>
-          <a:bodyPr wrap="square" lIns="0" tIns="0" rIns="0" bIns="0" rtlCol="0" anchor="t"/>
-          <a:lstStyle/>
-          <a:p>
-            <a:pPr algn="l" indent="0" marL="0">
-              <a:lnSpc>
-                <a:spcPts val="1680"/>
-              </a:lnSpc>
-              <a:spcBef>
-                <a:spcPts val="300"/>
-              </a:spcBef>
-              <a:spcAft>
-                <a:spcPts val="300"/>
-              </a:spcAft>
-              <a:buNone/>
-            </a:pPr>
-            <a:r>
-              <a:rPr lang="en-US" sz="1200" dirty="0">
-                <a:solidFill>
-                  <a:srgbClr val="1C2833"/>
-                </a:solidFill>
-                <a:latin typeface="Arial" pitchFamily="34" charset="0"/>
-                <a:ea typeface="Arial" pitchFamily="34" charset="-122"/>
-                <a:cs typeface="Arial" pitchFamily="34" charset="-120"/>
-              </a:rPr>
-              <a:t>By the end of this lesson, students will state at least two definitions of </a:t>
-            </a:r>
-            <a:pPr algn="l" indent="0" marL="0">
-              <a:lnSpc>
-                <a:spcPts val="1680"/>
-              </a:lnSpc>
-              <a:spcBef>
-                <a:spcPts val="300"/>
-              </a:spcBef>
-              <a:spcAft>
-                <a:spcPts val="300"/>
-              </a:spcAft>
-              <a:buNone/>
-            </a:pPr>
-            <a:r>
-              <a:rPr lang="en-US" sz="1200" i="1" dirty="0">
-                <a:solidFill>
-                  <a:srgbClr val="1C2833"/>
-                </a:solidFill>
-                <a:latin typeface="Arial" pitchFamily="34" charset="0"/>
-                <a:ea typeface="Arial" pitchFamily="34" charset="-122"/>
-                <a:cs typeface="Arial" pitchFamily="34" charset="-120"/>
-              </a:rPr>
-              <a:t>yoga</a:t>
-            </a:r>
-            <a:pPr algn="l" indent="0" marL="0">
-              <a:lnSpc>
-                <a:spcPts val="1680"/>
-              </a:lnSpc>
-              <a:spcBef>
-                <a:spcPts val="300"/>
-              </a:spcBef>
-              <a:spcAft>
-                <a:spcPts val="300"/>
-              </a:spcAft>
-              <a:buNone/>
-            </a:pPr>
-            <a:r>
-              <a:rPr lang="en-US" sz="1200" dirty="0">
-                <a:solidFill>
-                  <a:srgbClr val="1C2833"/>
-                </a:solidFill>
-                <a:latin typeface="Arial" pitchFamily="34" charset="0"/>
-                <a:ea typeface="Arial" pitchFamily="34" charset="-122"/>
-                <a:cs typeface="Arial" pitchFamily="34" charset="-120"/>
-              </a:rPr>
-              <a:t> (one from Patañjali, one from the Bhagavad-gītā), perform </a:t>
-            </a:r>
-            <a:pPr algn="l" indent="0" marL="0">
-              <a:lnSpc>
-                <a:spcPts val="1680"/>
-              </a:lnSpc>
-              <a:spcBef>
-                <a:spcPts val="300"/>
-              </a:spcBef>
-              <a:spcAft>
-                <a:spcPts val="300"/>
-              </a:spcAft>
-              <a:buNone/>
-            </a:pPr>
-            <a:r>
-              <a:rPr lang="en-US" sz="1200" i="1" dirty="0">
-                <a:solidFill>
-                  <a:srgbClr val="1C2833"/>
-                </a:solidFill>
-                <a:latin typeface="Arial" pitchFamily="34" charset="0"/>
-                <a:ea typeface="Arial" pitchFamily="34" charset="-122"/>
-                <a:cs typeface="Arial" pitchFamily="34" charset="-120"/>
-              </a:rPr>
-              <a:t>tāḍāsana</a:t>
-            </a:r>
-            <a:pPr algn="l" indent="0" marL="0">
-              <a:lnSpc>
-                <a:spcPts val="1680"/>
-              </a:lnSpc>
-              <a:spcBef>
-                <a:spcPts val="300"/>
-              </a:spcBef>
-              <a:spcAft>
-                <a:spcPts val="300"/>
-              </a:spcAft>
-              <a:buNone/>
-            </a:pPr>
-            <a:r>
-              <a:rPr lang="en-US" sz="1200" dirty="0">
-                <a:solidFill>
-                  <a:srgbClr val="1C2833"/>
-                </a:solidFill>
-                <a:latin typeface="Arial" pitchFamily="34" charset="0"/>
-                <a:ea typeface="Arial" pitchFamily="34" charset="-122"/>
-                <a:cs typeface="Arial" pitchFamily="34" charset="-120"/>
-              </a:rPr>
-              <a:t> with safe alignment, and complete a 60-second seated-breath observation.</a:t>
-            </a:r>
-            <a:endParaRPr lang="en-US" sz="1200" dirty="0"/>
-          </a:p>
-        </p:txBody>
-      </p:sp>
-      <p:sp>
-        <p:nvSpPr>
-          <p:cNvPr id="7" name="Text 5"/>
-          <p:cNvSpPr/>
-          <p:nvPr/>
-        </p:nvSpPr>
-        <p:spPr>
-          <a:xfrm>
             <a:off x="406301" y="4434929"/>
             <a:ext cx="8498026" cy="213271"/>
           </a:xfrm>
@@ -2610,7 +2778,7 @@
                 <a:ea typeface="Georgia" pitchFamily="34" charset="-122"/>
                 <a:cs typeface="Georgia" pitchFamily="34" charset="-120"/>
               </a:rPr>
-              <a:t>Student-facing content</a:t>
+              <a:t>Core (15 min) — What is yoga? (cont.)</a:t>
             </a:r>
             <a:endParaRPr lang="en-US" sz="1800" dirty="0"/>
           </a:p>
@@ -2624,61 +2792,8 @@
         </p:nvSpPr>
         <p:spPr>
           <a:xfrm>
-            <a:off x="406301" y="883593"/>
-            <a:ext cx="8331398" cy="2188369"/>
-          </a:xfrm>
-          <a:prstGeom prst="rect">
-            <a:avLst/>
-          </a:prstGeom>
-          <a:solidFill>
-            <a:srgbClr val="F4F8F9"/>
-          </a:solidFill>
-          <a:ln/>
-        </p:spPr>
-        <p:txBody>
-          <a:bodyPr wrap="square" rtlCol="0" anchor="ctr"/>
-          <a:lstStyle/>
-          <a:p>
-            <a:pPr indent="0" marL="0">
-              <a:buNone/>
-            </a:pPr>
-            <a:endParaRPr lang="en-US" dirty="0"/>
-          </a:p>
-        </p:txBody>
-      </p:sp>
-      <p:sp>
-        <p:nvSpPr>
-          <p:cNvPr id="5" name="Shape 3"/>
-          <p:cNvSpPr/>
-          <p:nvPr/>
-        </p:nvSpPr>
-        <p:spPr>
-          <a:xfrm>
-            <a:off x="434876" y="883593"/>
-            <a:ext cx="0" cy="2188369"/>
-          </a:xfrm>
-          <a:prstGeom prst="line">
-            <a:avLst/>
-          </a:prstGeom>
-          <a:noFill/>
-          <a:ln w="57150">
-            <a:solidFill>
-              <a:srgbClr val="FE4447"/>
-            </a:solidFill>
-            <a:prstDash val="solid"/>
-          </a:ln>
-        </p:spPr>
-      </p:sp>
-      <p:sp>
-        <p:nvSpPr>
-          <p:cNvPr id="6" name="Text 4"/>
-          <p:cNvSpPr/>
-          <p:nvPr/>
-        </p:nvSpPr>
-        <p:spPr>
-          <a:xfrm>
-            <a:off x="692051" y="1074093"/>
-            <a:ext cx="7973389" cy="230981"/>
+            <a:off x="634901" y="883593"/>
+            <a:ext cx="8102798" cy="487561"/>
           </a:xfrm>
           <a:prstGeom prst="rect">
             <a:avLst/>
@@ -2690,552 +2805,174 @@
           <a:bodyPr wrap="square" lIns="0" tIns="0" rIns="0" bIns="0" rtlCol="0" anchor="t"/>
           <a:lstStyle/>
           <a:p>
-            <a:pPr algn="l" indent="0" marL="0">
-              <a:lnSpc>
-                <a:spcPts val="1820"/>
-              </a:lnSpc>
-              <a:spcBef>
-                <a:spcPts val="300"/>
-              </a:spcBef>
-              <a:spcAft>
-                <a:spcPts val="300"/>
-              </a:spcAft>
-              <a:buNone/>
-            </a:pPr>
-            <a:r>
-              <a:rPr lang="en-US" sz="1300" b="1" i="1" dirty="0">
-                <a:solidFill>
-                  <a:srgbClr val="1C2833"/>
-                </a:solidFill>
-                <a:latin typeface="Georgia" pitchFamily="34" charset="0"/>
-                <a:ea typeface="Georgia" pitchFamily="34" charset="-122"/>
-                <a:cs typeface="Georgia" pitchFamily="34" charset="-120"/>
-              </a:rPr>
-              <a:t>Day 1 — What is Yoga?</a:t>
-            </a:r>
-            <a:endParaRPr lang="en-US" sz="1300" dirty="0"/>
-          </a:p>
-        </p:txBody>
-      </p:sp>
-      <p:sp>
-        <p:nvSpPr>
-          <p:cNvPr id="7" name="Text 5"/>
-          <p:cNvSpPr/>
-          <p:nvPr/>
-        </p:nvSpPr>
-        <p:spPr>
-          <a:xfrm>
-            <a:off x="692051" y="1343174"/>
-            <a:ext cx="7973389" cy="230981"/>
-          </a:xfrm>
-          <a:prstGeom prst="rect">
-            <a:avLst/>
-          </a:prstGeom>
-          <a:noFill/>
-          <a:ln/>
-        </p:spPr>
-        <p:txBody>
-          <a:bodyPr wrap="square" lIns="0" tIns="0" rIns="0" bIns="0" rtlCol="0" anchor="t"/>
-          <a:lstStyle/>
-          <a:p>
-            <a:pPr algn="l" indent="0" marL="0">
-              <a:lnSpc>
-                <a:spcPts val="1820"/>
-              </a:lnSpc>
-              <a:spcBef>
-                <a:spcPts val="300"/>
-              </a:spcBef>
-              <a:spcAft>
-                <a:spcPts val="300"/>
-              </a:spcAft>
-              <a:buNone/>
-            </a:pPr>
-            <a:r>
-              <a:rPr lang="en-US" sz="1300" i="1" dirty="0">
-                <a:solidFill>
-                  <a:srgbClr val="1C2833"/>
-                </a:solidFill>
-                <a:latin typeface="Georgia" pitchFamily="34" charset="0"/>
-                <a:ea typeface="Georgia" pitchFamily="34" charset="-122"/>
-                <a:cs typeface="Georgia" pitchFamily="34" charset="-120"/>
-              </a:rPr>
-              <a:t>Yoga</a:t>
-            </a:r>
-            <a:pPr algn="l" indent="0" marL="0">
-              <a:lnSpc>
-                <a:spcPts val="1820"/>
-              </a:lnSpc>
-              <a:spcBef>
-                <a:spcPts val="300"/>
-              </a:spcBef>
-              <a:spcAft>
-                <a:spcPts val="300"/>
-              </a:spcAft>
-              <a:buNone/>
-            </a:pPr>
-            <a:r>
-              <a:rPr lang="en-US" sz="1300" dirty="0">
-                <a:solidFill>
-                  <a:srgbClr val="1C2833"/>
-                </a:solidFill>
-                <a:latin typeface="Georgia" pitchFamily="34" charset="0"/>
-                <a:ea typeface="Georgia" pitchFamily="34" charset="-122"/>
-                <a:cs typeface="Georgia" pitchFamily="34" charset="-120"/>
-              </a:rPr>
-              <a:t> (Sanskrit: </a:t>
-            </a:r>
-            <a:pPr algn="l" indent="0" marL="0">
-              <a:lnSpc>
-                <a:spcPts val="1820"/>
-              </a:lnSpc>
-              <a:spcBef>
-                <a:spcPts val="300"/>
-              </a:spcBef>
-              <a:spcAft>
-                <a:spcPts val="300"/>
-              </a:spcAft>
-              <a:buNone/>
-            </a:pPr>
-            <a:r>
-              <a:rPr lang="en-US" sz="1300" i="1" dirty="0">
-                <a:solidFill>
-                  <a:srgbClr val="1C2833"/>
-                </a:solidFill>
-                <a:latin typeface="Georgia" pitchFamily="34" charset="0"/>
-                <a:ea typeface="Georgia" pitchFamily="34" charset="-122"/>
-                <a:cs typeface="Georgia" pitchFamily="34" charset="-120"/>
-              </a:rPr>
-              <a:t>yuj</a:t>
-            </a:r>
-            <a:pPr algn="l" indent="0" marL="0">
-              <a:lnSpc>
-                <a:spcPts val="1820"/>
-              </a:lnSpc>
-              <a:spcBef>
-                <a:spcPts val="300"/>
-              </a:spcBef>
-              <a:spcAft>
-                <a:spcPts val="300"/>
-              </a:spcAft>
-              <a:buNone/>
-            </a:pPr>
-            <a:r>
-              <a:rPr lang="en-US" sz="1300" dirty="0">
-                <a:solidFill>
-                  <a:srgbClr val="1C2833"/>
-                </a:solidFill>
-                <a:latin typeface="Georgia" pitchFamily="34" charset="0"/>
-                <a:ea typeface="Georgia" pitchFamily="34" charset="-122"/>
-                <a:cs typeface="Georgia" pitchFamily="34" charset="-120"/>
-              </a:rPr>
-              <a:t> = "to yoke") is the joining of body, breath, and attention.</a:t>
-            </a:r>
-            <a:endParaRPr lang="en-US" sz="1300" dirty="0"/>
-          </a:p>
-        </p:txBody>
-      </p:sp>
-      <p:sp>
-        <p:nvSpPr>
-          <p:cNvPr id="8" name="Text 6"/>
-          <p:cNvSpPr/>
-          <p:nvPr/>
-        </p:nvSpPr>
-        <p:spPr>
-          <a:xfrm>
-            <a:off x="692051" y="1612255"/>
-            <a:ext cx="7973389" cy="230981"/>
-          </a:xfrm>
-          <a:prstGeom prst="rect">
-            <a:avLst/>
-          </a:prstGeom>
-          <a:noFill/>
-          <a:ln/>
-        </p:spPr>
-        <p:txBody>
-          <a:bodyPr wrap="square" lIns="0" tIns="0" rIns="0" bIns="0" rtlCol="0" anchor="t"/>
-          <a:lstStyle/>
-          <a:p>
-            <a:pPr algn="l" indent="0" marL="0">
-              <a:lnSpc>
-                <a:spcPts val="1820"/>
-              </a:lnSpc>
-              <a:spcBef>
-                <a:spcPts val="300"/>
-              </a:spcBef>
-              <a:spcAft>
-                <a:spcPts val="300"/>
-              </a:spcAft>
-              <a:buNone/>
-            </a:pPr>
-            <a:r>
-              <a:rPr lang="en-US" sz="1300" i="1" dirty="0">
-                <a:solidFill>
-                  <a:srgbClr val="1C2833"/>
-                </a:solidFill>
-                <a:latin typeface="Georgia" pitchFamily="34" charset="0"/>
-                <a:ea typeface="Georgia" pitchFamily="34" charset="-122"/>
-                <a:cs typeface="Georgia" pitchFamily="34" charset="-120"/>
-              </a:rPr>
-              <a:t>Two foundational definitions:</a:t>
-            </a:r>
-            <a:endParaRPr lang="en-US" sz="1300" dirty="0"/>
-          </a:p>
-        </p:txBody>
-      </p:sp>
-      <p:sp>
-        <p:nvSpPr>
-          <p:cNvPr id="9" name="Text 7"/>
-          <p:cNvSpPr/>
-          <p:nvPr/>
-        </p:nvSpPr>
-        <p:spPr>
-          <a:xfrm>
-            <a:off x="692051" y="1881336"/>
-            <a:ext cx="7973389" cy="230981"/>
-          </a:xfrm>
-          <a:prstGeom prst="rect">
-            <a:avLst/>
-          </a:prstGeom>
-          <a:noFill/>
-          <a:ln/>
-        </p:spPr>
-        <p:txBody>
-          <a:bodyPr wrap="square" lIns="0" tIns="0" rIns="0" bIns="0" rtlCol="0" anchor="t"/>
-          <a:lstStyle/>
-          <a:p>
-            <a:pPr algn="l" indent="0" marL="0">
-              <a:lnSpc>
-                <a:spcPts val="1820"/>
-              </a:lnSpc>
-              <a:spcBef>
-                <a:spcPts val="300"/>
-              </a:spcBef>
-              <a:spcAft>
-                <a:spcPts val="300"/>
-              </a:spcAft>
-              <a:buNone/>
-            </a:pPr>
-            <a:r>
-              <a:rPr lang="en-US" sz="1300" dirty="0">
-                <a:solidFill>
-                  <a:srgbClr val="1C2833"/>
-                </a:solidFill>
-                <a:latin typeface="Georgia" pitchFamily="34" charset="0"/>
-                <a:ea typeface="Georgia" pitchFamily="34" charset="-122"/>
-                <a:cs typeface="Georgia" pitchFamily="34" charset="-120"/>
-              </a:rPr>
-              <a:t>1. </a:t>
-            </a:r>
-            <a:pPr algn="l" indent="0" marL="0">
-              <a:lnSpc>
-                <a:spcPts val="1820"/>
-              </a:lnSpc>
-              <a:spcBef>
-                <a:spcPts val="300"/>
-              </a:spcBef>
-              <a:spcAft>
-                <a:spcPts val="300"/>
-              </a:spcAft>
-              <a:buNone/>
-            </a:pPr>
-            <a:r>
-              <a:rPr lang="en-US" sz="1300" b="1" i="1" dirty="0">
-                <a:solidFill>
-                  <a:srgbClr val="1C2833"/>
-                </a:solidFill>
-                <a:latin typeface="Georgia" pitchFamily="34" charset="0"/>
-                <a:ea typeface="Georgia" pitchFamily="34" charset="-122"/>
-                <a:cs typeface="Georgia" pitchFamily="34" charset="-120"/>
-              </a:rPr>
-              <a:t>Patañjali:</a:t>
-            </a:r>
-            <a:pPr algn="l" indent="0" marL="0">
-              <a:lnSpc>
-                <a:spcPts val="1820"/>
-              </a:lnSpc>
-              <a:spcBef>
-                <a:spcPts val="300"/>
-              </a:spcBef>
-              <a:spcAft>
-                <a:spcPts val="300"/>
-              </a:spcAft>
-              <a:buNone/>
-            </a:pPr>
-            <a:r>
-              <a:rPr lang="en-US" sz="1300" dirty="0">
-                <a:solidFill>
-                  <a:srgbClr val="1C2833"/>
-                </a:solidFill>
-                <a:latin typeface="Georgia" pitchFamily="34" charset="0"/>
-                <a:ea typeface="Georgia" pitchFamily="34" charset="-122"/>
-                <a:cs typeface="Georgia" pitchFamily="34" charset="-120"/>
-              </a:rPr>
-              <a:t> </a:t>
-            </a:r>
-            <a:pPr algn="l" indent="0" marL="0">
-              <a:lnSpc>
-                <a:spcPts val="1820"/>
-              </a:lnSpc>
-              <a:spcBef>
-                <a:spcPts val="300"/>
-              </a:spcBef>
-              <a:spcAft>
-                <a:spcPts val="300"/>
-              </a:spcAft>
-              <a:buNone/>
-            </a:pPr>
-            <a:r>
-              <a:rPr lang="en-US" sz="1300" i="1" dirty="0">
-                <a:solidFill>
-                  <a:srgbClr val="1C2833"/>
-                </a:solidFill>
-                <a:latin typeface="Georgia" pitchFamily="34" charset="0"/>
-                <a:ea typeface="Georgia" pitchFamily="34" charset="-122"/>
-                <a:cs typeface="Georgia" pitchFamily="34" charset="-120"/>
-              </a:rPr>
-              <a:t>yoga = settling the fluctuations of the mind.</a:t>
-            </a:r>
-            <a:pPr algn="l" indent="0" marL="0">
-              <a:lnSpc>
-                <a:spcPts val="1820"/>
-              </a:lnSpc>
-              <a:spcBef>
-                <a:spcPts val="300"/>
-              </a:spcBef>
-              <a:spcAft>
-                <a:spcPts val="300"/>
-              </a:spcAft>
-              <a:buNone/>
-            </a:pPr>
-            <a:r>
-              <a:rPr lang="en-US" sz="1300" dirty="0">
-                <a:solidFill>
-                  <a:srgbClr val="1C2833"/>
-                </a:solidFill>
-                <a:latin typeface="Georgia" pitchFamily="34" charset="0"/>
-                <a:ea typeface="Georgia" pitchFamily="34" charset="-122"/>
-                <a:cs typeface="Georgia" pitchFamily="34" charset="-120"/>
-              </a:rPr>
-              <a:t> 2. </a:t>
-            </a:r>
-            <a:pPr algn="l" indent="0" marL="0">
-              <a:lnSpc>
-                <a:spcPts val="1820"/>
-              </a:lnSpc>
-              <a:spcBef>
-                <a:spcPts val="300"/>
-              </a:spcBef>
-              <a:spcAft>
-                <a:spcPts val="300"/>
-              </a:spcAft>
-              <a:buNone/>
-            </a:pPr>
-            <a:r>
-              <a:rPr lang="en-US" sz="1300" b="1" i="1" dirty="0">
-                <a:solidFill>
-                  <a:srgbClr val="1C2833"/>
-                </a:solidFill>
-                <a:latin typeface="Georgia" pitchFamily="34" charset="0"/>
-                <a:ea typeface="Georgia" pitchFamily="34" charset="-122"/>
-                <a:cs typeface="Georgia" pitchFamily="34" charset="-120"/>
-              </a:rPr>
-              <a:t>Bhagavad-gītā:</a:t>
-            </a:r>
-            <a:pPr algn="l" indent="0" marL="0">
-              <a:lnSpc>
-                <a:spcPts val="1820"/>
-              </a:lnSpc>
-              <a:spcBef>
-                <a:spcPts val="300"/>
-              </a:spcBef>
-              <a:spcAft>
-                <a:spcPts val="300"/>
-              </a:spcAft>
-              <a:buNone/>
-            </a:pPr>
-            <a:r>
-              <a:rPr lang="en-US" sz="1300" dirty="0">
-                <a:solidFill>
-                  <a:srgbClr val="1C2833"/>
-                </a:solidFill>
-                <a:latin typeface="Georgia" pitchFamily="34" charset="0"/>
-                <a:ea typeface="Georgia" pitchFamily="34" charset="-122"/>
-                <a:cs typeface="Georgia" pitchFamily="34" charset="-120"/>
-              </a:rPr>
-              <a:t> </a:t>
-            </a:r>
-            <a:pPr algn="l" indent="0" marL="0">
-              <a:lnSpc>
-                <a:spcPts val="1820"/>
-              </a:lnSpc>
-              <a:spcBef>
-                <a:spcPts val="300"/>
-              </a:spcBef>
-              <a:spcAft>
-                <a:spcPts val="300"/>
-              </a:spcAft>
-              <a:buNone/>
-            </a:pPr>
-            <a:r>
-              <a:rPr lang="en-US" sz="1300" i="1" dirty="0">
-                <a:solidFill>
-                  <a:srgbClr val="1C2833"/>
-                </a:solidFill>
-                <a:latin typeface="Georgia" pitchFamily="34" charset="0"/>
-                <a:ea typeface="Georgia" pitchFamily="34" charset="-122"/>
-                <a:cs typeface="Georgia" pitchFamily="34" charset="-120"/>
-              </a:rPr>
-              <a:t>yoga = skill in action.</a:t>
-            </a:r>
-            <a:endParaRPr lang="en-US" sz="1300" dirty="0"/>
-          </a:p>
-        </p:txBody>
-      </p:sp>
-      <p:sp>
-        <p:nvSpPr>
-          <p:cNvPr id="10" name="Text 8"/>
-          <p:cNvSpPr/>
-          <p:nvPr/>
-        </p:nvSpPr>
-        <p:spPr>
-          <a:xfrm>
-            <a:off x="692051" y="2150418"/>
-            <a:ext cx="7973389" cy="230981"/>
-          </a:xfrm>
-          <a:prstGeom prst="rect">
-            <a:avLst/>
-          </a:prstGeom>
-          <a:noFill/>
-          <a:ln/>
-        </p:spPr>
-        <p:txBody>
-          <a:bodyPr wrap="square" lIns="0" tIns="0" rIns="0" bIns="0" rtlCol="0" anchor="t"/>
-          <a:lstStyle/>
-          <a:p>
-            <a:pPr algn="l" indent="0" marL="0">
-              <a:lnSpc>
-                <a:spcPts val="1820"/>
-              </a:lnSpc>
-              <a:spcBef>
-                <a:spcPts val="300"/>
-              </a:spcBef>
-              <a:spcAft>
-                <a:spcPts val="300"/>
-              </a:spcAft>
-              <a:buNone/>
-            </a:pPr>
-            <a:r>
-              <a:rPr lang="en-US" sz="1300" dirty="0">
-                <a:solidFill>
-                  <a:srgbClr val="1C2833"/>
-                </a:solidFill>
-                <a:latin typeface="Georgia" pitchFamily="34" charset="0"/>
-                <a:ea typeface="Georgia" pitchFamily="34" charset="-122"/>
-                <a:cs typeface="Georgia" pitchFamily="34" charset="-120"/>
-              </a:rPr>
-              <a:t>Today's posture: </a:t>
-            </a:r>
-            <a:pPr algn="l" indent="0" marL="0">
-              <a:lnSpc>
-                <a:spcPts val="1820"/>
-              </a:lnSpc>
-              <a:spcBef>
-                <a:spcPts val="300"/>
-              </a:spcBef>
-              <a:spcAft>
-                <a:spcPts val="300"/>
-              </a:spcAft>
-              <a:buNone/>
-            </a:pPr>
-            <a:r>
-              <a:rPr lang="en-US" sz="1300" b="1" i="1" dirty="0">
-                <a:solidFill>
-                  <a:srgbClr val="1C2833"/>
-                </a:solidFill>
-                <a:latin typeface="Georgia" pitchFamily="34" charset="0"/>
-                <a:ea typeface="Georgia" pitchFamily="34" charset="-122"/>
-                <a:cs typeface="Georgia" pitchFamily="34" charset="-120"/>
-              </a:rPr>
-              <a:t>tāḍāsana</a:t>
-            </a:r>
-            <a:pPr algn="l" indent="0" marL="0">
-              <a:lnSpc>
-                <a:spcPts val="1820"/>
-              </a:lnSpc>
-              <a:spcBef>
-                <a:spcPts val="300"/>
-              </a:spcBef>
-              <a:spcAft>
-                <a:spcPts val="300"/>
-              </a:spcAft>
-              <a:buNone/>
-            </a:pPr>
-            <a:r>
-              <a:rPr lang="en-US" sz="1300" dirty="0">
-                <a:solidFill>
-                  <a:srgbClr val="1C2833"/>
-                </a:solidFill>
-                <a:latin typeface="Georgia" pitchFamily="34" charset="0"/>
-                <a:ea typeface="Georgia" pitchFamily="34" charset="-122"/>
-                <a:cs typeface="Georgia" pitchFamily="34" charset="-120"/>
-              </a:rPr>
-              <a:t> (mountain).</a:t>
-            </a:r>
-            <a:endParaRPr lang="en-US" sz="1300" dirty="0"/>
-          </a:p>
-        </p:txBody>
-      </p:sp>
-      <p:sp>
-        <p:nvSpPr>
-          <p:cNvPr id="11" name="Text 9"/>
-          <p:cNvSpPr/>
-          <p:nvPr/>
-        </p:nvSpPr>
-        <p:spPr>
-          <a:xfrm>
-            <a:off x="692051" y="2419499"/>
-            <a:ext cx="7973389" cy="461963"/>
-          </a:xfrm>
-          <a:prstGeom prst="rect">
-            <a:avLst/>
-          </a:prstGeom>
-          <a:noFill/>
-          <a:ln/>
-        </p:spPr>
-        <p:txBody>
-          <a:bodyPr wrap="square" lIns="0" tIns="0" rIns="0" bIns="0" rtlCol="0" anchor="t"/>
-          <a:lstStyle/>
-          <a:p>
-            <a:pPr algn="l" indent="0" marL="0">
-              <a:lnSpc>
-                <a:spcPts val="1820"/>
-              </a:lnSpc>
-              <a:spcBef>
-                <a:spcPts val="300"/>
-              </a:spcBef>
-              <a:spcAft>
-                <a:spcPts val="300"/>
-              </a:spcAft>
-              <a:buNone/>
-            </a:pPr>
-            <a:r>
-              <a:rPr lang="en-US" sz="1300" i="1" dirty="0">
-                <a:solidFill>
-                  <a:srgbClr val="1C2833"/>
-                </a:solidFill>
-                <a:latin typeface="Georgia" pitchFamily="34" charset="0"/>
-                <a:ea typeface="Georgia" pitchFamily="34" charset="-122"/>
-                <a:cs typeface="Georgia" pitchFamily="34" charset="-120"/>
-              </a:rPr>
-              <a:t>1. Stand at the top of your mat. 2. Feet hip-width apart, firm contact with the ground. 3. Lengthen up through the crown of your head. 4. Breathe naturally for 30 seconds. Release.</a:t>
-            </a:r>
-            <a:endParaRPr lang="en-US" sz="1300" dirty="0"/>
-          </a:p>
-        </p:txBody>
-      </p:sp>
-      <p:sp>
-        <p:nvSpPr>
-          <p:cNvPr id="12" name="Text 10"/>
+            <a:pPr algn="l" marL="342900" indent="-342900">
+              <a:lnSpc>
+                <a:spcPts val="1620"/>
+              </a:lnSpc>
+              <a:spcAft>
+                <a:spcPts val="300"/>
+              </a:spcAft>
+              <a:buSzPct val="100000"/>
+              <a:buChar char="•"/>
+            </a:pPr>
+            <a:r>
+              <a:rPr lang="en-US" sz="1200" b="1" dirty="0">
+                <a:solidFill>
+                  <a:srgbClr val="1C2833"/>
+                </a:solidFill>
+                <a:latin typeface="Arial" pitchFamily="34" charset="0"/>
+                <a:ea typeface="Arial" pitchFamily="34" charset="-122"/>
+                <a:cs typeface="Arial" pitchFamily="34" charset="-120"/>
+              </a:rPr>
+              <a:t>What we'll do in this module</a:t>
+            </a:r>
+            <a:pPr algn="l" indent="0" marL="0">
+              <a:lnSpc>
+                <a:spcPts val="1620"/>
+              </a:lnSpc>
+              <a:spcAft>
+                <a:spcPts val="300"/>
+              </a:spcAft>
+              <a:buNone/>
+            </a:pPr>
+            <a:r>
+              <a:rPr lang="en-US" sz="1200" dirty="0">
+                <a:solidFill>
+                  <a:srgbClr val="1C2833"/>
+                </a:solidFill>
+                <a:latin typeface="Arial" pitchFamily="34" charset="0"/>
+                <a:ea typeface="Arial" pitchFamily="34" charset="-122"/>
+                <a:cs typeface="Arial" pitchFamily="34" charset="-120"/>
+              </a:rPr>
+              <a:t> — work mainly with two of the </a:t>
+            </a:r>
+            <a:pPr algn="l" indent="0" marL="0">
+              <a:lnSpc>
+                <a:spcPts val="1620"/>
+              </a:lnSpc>
+              <a:spcAft>
+                <a:spcPts val="300"/>
+              </a:spcAft>
+              <a:buNone/>
+            </a:pPr>
+            <a:r>
+              <a:rPr lang="en-US" sz="1200" i="1" dirty="0">
+                <a:solidFill>
+                  <a:srgbClr val="1C2833"/>
+                </a:solidFill>
+                <a:latin typeface="Arial" pitchFamily="34" charset="0"/>
+                <a:ea typeface="Arial" pitchFamily="34" charset="-122"/>
+                <a:cs typeface="Arial" pitchFamily="34" charset="-120"/>
+              </a:rPr>
+              <a:t>eight limbs</a:t>
+            </a:r>
+            <a:pPr algn="l" indent="0" marL="0">
+              <a:lnSpc>
+                <a:spcPts val="1620"/>
+              </a:lnSpc>
+              <a:spcAft>
+                <a:spcPts val="300"/>
+              </a:spcAft>
+              <a:buNone/>
+            </a:pPr>
+            <a:r>
+              <a:rPr lang="en-US" sz="1200" dirty="0">
+                <a:solidFill>
+                  <a:srgbClr val="1C2833"/>
+                </a:solidFill>
+                <a:latin typeface="Arial" pitchFamily="34" charset="0"/>
+                <a:ea typeface="Arial" pitchFamily="34" charset="-122"/>
+                <a:cs typeface="Arial" pitchFamily="34" charset="-120"/>
+              </a:rPr>
+              <a:t> of yoga: </a:t>
+            </a:r>
+            <a:pPr algn="l" indent="0" marL="0">
+              <a:lnSpc>
+                <a:spcPts val="1620"/>
+              </a:lnSpc>
+              <a:spcAft>
+                <a:spcPts val="300"/>
+              </a:spcAft>
+              <a:buNone/>
+            </a:pPr>
+            <a:r>
+              <a:rPr lang="en-US" sz="1200" i="1" dirty="0">
+                <a:solidFill>
+                  <a:srgbClr val="1C2833"/>
+                </a:solidFill>
+                <a:latin typeface="Arial" pitchFamily="34" charset="0"/>
+                <a:ea typeface="Arial" pitchFamily="34" charset="-122"/>
+                <a:cs typeface="Arial" pitchFamily="34" charset="-120"/>
+              </a:rPr>
+              <a:t>āsana</a:t>
+            </a:r>
+            <a:pPr algn="l" indent="0" marL="0">
+              <a:lnSpc>
+                <a:spcPts val="1620"/>
+              </a:lnSpc>
+              <a:spcAft>
+                <a:spcPts val="300"/>
+              </a:spcAft>
+              <a:buNone/>
+            </a:pPr>
+            <a:r>
+              <a:rPr lang="en-US" sz="1200" dirty="0">
+                <a:solidFill>
+                  <a:srgbClr val="1C2833"/>
+                </a:solidFill>
+                <a:latin typeface="Arial" pitchFamily="34" charset="0"/>
+                <a:ea typeface="Arial" pitchFamily="34" charset="-122"/>
+                <a:cs typeface="Arial" pitchFamily="34" charset="-120"/>
+              </a:rPr>
+              <a:t> (posture) and </a:t>
+            </a:r>
+            <a:pPr algn="l" indent="0" marL="0">
+              <a:lnSpc>
+                <a:spcPts val="1620"/>
+              </a:lnSpc>
+              <a:spcAft>
+                <a:spcPts val="300"/>
+              </a:spcAft>
+              <a:buNone/>
+            </a:pPr>
+            <a:r>
+              <a:rPr lang="en-US" sz="1200" i="1" dirty="0">
+                <a:solidFill>
+                  <a:srgbClr val="1C2833"/>
+                </a:solidFill>
+                <a:latin typeface="Arial" pitchFamily="34" charset="0"/>
+                <a:ea typeface="Arial" pitchFamily="34" charset="-122"/>
+                <a:cs typeface="Arial" pitchFamily="34" charset="-120"/>
+              </a:rPr>
+              <a:t>prāṇāyāma</a:t>
+            </a:r>
+            <a:pPr algn="l" indent="0" marL="0">
+              <a:lnSpc>
+                <a:spcPts val="1620"/>
+              </a:lnSpc>
+              <a:spcAft>
+                <a:spcPts val="300"/>
+              </a:spcAft>
+              <a:buNone/>
+            </a:pPr>
+            <a:r>
+              <a:rPr lang="en-US" sz="1200" dirty="0">
+                <a:solidFill>
+                  <a:srgbClr val="1C2833"/>
+                </a:solidFill>
+                <a:latin typeface="Arial" pitchFamily="34" charset="0"/>
+                <a:ea typeface="Arial" pitchFamily="34" charset="-122"/>
+                <a:cs typeface="Arial" pitchFamily="34" charset="-120"/>
+              </a:rPr>
+              <a:t> (breath). The other six limbs are introduced briefly on Day 2.</a:t>
+            </a:r>
+            <a:endParaRPr lang="en-US" sz="1200" dirty="0"/>
+          </a:p>
+        </p:txBody>
+      </p:sp>
+      <p:sp>
+        <p:nvSpPr>
+          <p:cNvPr id="5" name="Text 3"/>
           <p:cNvSpPr/>
           <p:nvPr/>
         </p:nvSpPr>
@@ -3385,7 +3122,7 @@
                 <a:ea typeface="Georgia" pitchFamily="34" charset="-122"/>
                 <a:cs typeface="Georgia" pitchFamily="34" charset="-120"/>
               </a:rPr>
-              <a:t>Homework</a:t>
+              <a:t>Practice (15 min) — Tāḍāsana</a:t>
             </a:r>
             <a:endParaRPr lang="en-US" sz="1800" dirty="0"/>
           </a:p>
@@ -3399,8 +3136,8 @@
         </p:nvSpPr>
         <p:spPr>
           <a:xfrm>
-            <a:off x="406301" y="870942"/>
-            <a:ext cx="8498026" cy="426541"/>
+            <a:off x="634901" y="883593"/>
+            <a:ext cx="8102798" cy="1706463"/>
           </a:xfrm>
           <a:prstGeom prst="rect">
             <a:avLst/>
@@ -3412,17 +3149,15 @@
           <a:bodyPr wrap="square" lIns="0" tIns="0" rIns="0" bIns="0" rtlCol="0" anchor="t"/>
           <a:lstStyle/>
           <a:p>
-            <a:pPr algn="l" indent="0" marL="0">
-              <a:lnSpc>
-                <a:spcPts val="1680"/>
-              </a:lnSpc>
-              <a:spcBef>
-                <a:spcPts val="300"/>
-              </a:spcBef>
-              <a:spcAft>
-                <a:spcPts val="300"/>
-              </a:spcAft>
-              <a:buNone/>
+            <a:pPr algn="l" marL="342900" indent="-342900">
+              <a:lnSpc>
+                <a:spcPts val="1620"/>
+              </a:lnSpc>
+              <a:spcAft>
+                <a:spcPts val="300"/>
+              </a:spcAft>
+              <a:buSzPct val="100000"/>
+              <a:buChar char="•"/>
             </a:pPr>
             <a:r>
               <a:rPr lang="en-US" sz="1200" dirty="0">
@@ -3433,19 +3168,20 @@
                 <a:ea typeface="Arial" pitchFamily="34" charset="-122"/>
                 <a:cs typeface="Arial" pitchFamily="34" charset="-120"/>
               </a:rPr>
-              <a:t>– Practice </a:t>
-            </a:r>
-            <a:pPr algn="l" indent="0" marL="0">
-              <a:lnSpc>
-                <a:spcPts val="1680"/>
-              </a:lnSpc>
-              <a:spcBef>
-                <a:spcPts val="300"/>
-              </a:spcBef>
-              <a:spcAft>
-                <a:spcPts val="300"/>
-              </a:spcAft>
-              <a:buNone/>
+              <a:t>Stand at the top of your mat. Feet hip-width apart.</a:t>
+            </a:r>
+            <a:endParaRPr lang="en-US" sz="1200" dirty="0"/>
+          </a:p>
+          <a:p>
+            <a:pPr algn="l" marL="342900" indent="-342900">
+              <a:lnSpc>
+                <a:spcPts val="1620"/>
+              </a:lnSpc>
+              <a:spcAft>
+                <a:spcPts val="300"/>
+              </a:spcAft>
+              <a:buSzPct val="100000"/>
+              <a:buChar char="•"/>
             </a:pPr>
             <a:r>
               <a:rPr lang="en-US" sz="1200" i="1" dirty="0">
@@ -3456,19 +3192,20 @@
                 <a:ea typeface="Arial" pitchFamily="34" charset="-122"/>
                 <a:cs typeface="Arial" pitchFamily="34" charset="-120"/>
               </a:rPr>
-              <a:t>tāḍāsana</a:t>
-            </a:r>
-            <a:pPr algn="l" indent="0" marL="0">
-              <a:lnSpc>
-                <a:spcPts val="1680"/>
-              </a:lnSpc>
-              <a:spcBef>
-                <a:spcPts val="300"/>
-              </a:spcBef>
-              <a:spcAft>
-                <a:spcPts val="300"/>
-              </a:spcAft>
-              <a:buNone/>
+              <a:t>"Press your big toes, little toes, and heels firmly into the mat. Lift your knee caps without locking your knees. Lengthen up through the crown of your head as if a string is gently pulling you upward."</a:t>
+            </a:r>
+            <a:endParaRPr lang="en-US" sz="1200" dirty="0"/>
+          </a:p>
+          <a:p>
+            <a:pPr algn="l" marL="342900" indent="-342900">
+              <a:lnSpc>
+                <a:spcPts val="1620"/>
+              </a:lnSpc>
+              <a:spcAft>
+                <a:spcPts val="300"/>
+              </a:spcAft>
+              <a:buSzPct val="100000"/>
+              <a:buChar char="•"/>
             </a:pPr>
             <a:r>
               <a:rPr lang="en-US" sz="1200" dirty="0">
@@ -3479,7 +3216,99 @@
                 <a:ea typeface="Arial" pitchFamily="34" charset="-122"/>
                 <a:cs typeface="Arial" pitchFamily="34" charset="-120"/>
               </a:rPr>
-              <a:t> for 60 seconds tomorrow morning before brushing your teeth. Notice how your body feels. – Bring comfortable clothing tomorrow.</a:t>
+              <a:t>Arms relaxed at the sides.</a:t>
+            </a:r>
+            <a:endParaRPr lang="en-US" sz="1200" dirty="0"/>
+          </a:p>
+          <a:p>
+            <a:pPr algn="l" marL="342900" indent="-342900">
+              <a:lnSpc>
+                <a:spcPts val="1620"/>
+              </a:lnSpc>
+              <a:spcAft>
+                <a:spcPts val="300"/>
+              </a:spcAft>
+              <a:buSzPct val="100000"/>
+              <a:buChar char="•"/>
+            </a:pPr>
+            <a:r>
+              <a:rPr lang="en-US" sz="1200" dirty="0">
+                <a:solidFill>
+                  <a:srgbClr val="1C2833"/>
+                </a:solidFill>
+                <a:latin typeface="Arial" pitchFamily="34" charset="0"/>
+                <a:ea typeface="Arial" pitchFamily="34" charset="-122"/>
+                <a:cs typeface="Arial" pitchFamily="34" charset="-120"/>
+              </a:rPr>
+              <a:t>Hold for 30 seconds. Breathe naturally.</a:t>
+            </a:r>
+            <a:endParaRPr lang="en-US" sz="1200" dirty="0"/>
+          </a:p>
+          <a:p>
+            <a:pPr algn="l" marL="342900" indent="-342900">
+              <a:lnSpc>
+                <a:spcPts val="1620"/>
+              </a:lnSpc>
+              <a:spcAft>
+                <a:spcPts val="300"/>
+              </a:spcAft>
+              <a:buSzPct val="100000"/>
+              <a:buChar char="•"/>
+            </a:pPr>
+            <a:r>
+              <a:rPr lang="en-US" sz="1200" dirty="0">
+                <a:solidFill>
+                  <a:srgbClr val="1C2833"/>
+                </a:solidFill>
+                <a:latin typeface="Arial" pitchFamily="34" charset="0"/>
+                <a:ea typeface="Arial" pitchFamily="34" charset="-122"/>
+                <a:cs typeface="Arial" pitchFamily="34" charset="-120"/>
+              </a:rPr>
+              <a:t>Release. Sit. Notice: </a:t>
+            </a:r>
+            <a:pPr algn="l" indent="0" marL="0">
+              <a:lnSpc>
+                <a:spcPts val="1620"/>
+              </a:lnSpc>
+              <a:spcAft>
+                <a:spcPts val="300"/>
+              </a:spcAft>
+              <a:buNone/>
+            </a:pPr>
+            <a:r>
+              <a:rPr lang="en-US" sz="1200" i="1" dirty="0">
+                <a:solidFill>
+                  <a:srgbClr val="1C2833"/>
+                </a:solidFill>
+                <a:latin typeface="Arial" pitchFamily="34" charset="0"/>
+                <a:ea typeface="Arial" pitchFamily="34" charset="-122"/>
+                <a:cs typeface="Arial" pitchFamily="34" charset="-120"/>
+              </a:rPr>
+              <a:t>"Did anything feel different after that pose?"</a:t>
+            </a:r>
+            <a:endParaRPr lang="en-US" sz="1200" dirty="0"/>
+          </a:p>
+          <a:p>
+            <a:pPr algn="l" marL="342900" indent="-342900">
+              <a:lnSpc>
+                <a:spcPts val="1620"/>
+              </a:lnSpc>
+              <a:spcAft>
+                <a:spcPts val="300"/>
+              </a:spcAft>
+              <a:buSzPct val="100000"/>
+              <a:buChar char="•"/>
+            </a:pPr>
+            <a:r>
+              <a:rPr lang="en-US" sz="1200" dirty="0">
+                <a:solidFill>
+                  <a:srgbClr val="1C2833"/>
+                </a:solidFill>
+                <a:latin typeface="Arial" pitchFamily="34" charset="0"/>
+                <a:ea typeface="Arial" pitchFamily="34" charset="-122"/>
+                <a:cs typeface="Arial" pitchFamily="34" charset="-120"/>
+              </a:rPr>
+              <a:t>Repeat twice more. Each hold a little longer.</a:t>
             </a:r>
             <a:endParaRPr lang="en-US" sz="1200" dirty="0"/>
           </a:p>
@@ -3637,7 +3466,7 @@
                 <a:ea typeface="Georgia" pitchFamily="34" charset="-122"/>
                 <a:cs typeface="Georgia" pitchFamily="34" charset="-120"/>
               </a:rPr>
-              <a:t>Differentiation</a:t>
+              <a:t>Seated breath observation (5 min)</a:t>
             </a:r>
             <a:endParaRPr lang="en-US" sz="1800" dirty="0"/>
           </a:p>
@@ -3652,7 +3481,7 @@
         <p:spPr>
           <a:xfrm>
             <a:off x="634901" y="883593"/>
-            <a:ext cx="8102798" cy="525661"/>
+            <a:ext cx="8102798" cy="1218902"/>
           </a:xfrm>
           <a:prstGeom prst="rect">
             <a:avLst/>
@@ -3675,26 +3504,6 @@
               <a:buChar char="•"/>
             </a:pPr>
             <a:r>
-              <a:rPr lang="en-US" sz="1200" b="1" dirty="0">
-                <a:solidFill>
-                  <a:srgbClr val="1C2833"/>
-                </a:solidFill>
-                <a:latin typeface="Arial" pitchFamily="34" charset="0"/>
-                <a:ea typeface="Arial" pitchFamily="34" charset="-122"/>
-                <a:cs typeface="Arial" pitchFamily="34" charset="-120"/>
-              </a:rPr>
-              <a:t>Tier up:</a:t>
-            </a:r>
-            <a:pPr algn="l" indent="0" marL="0">
-              <a:lnSpc>
-                <a:spcPts val="1620"/>
-              </a:lnSpc>
-              <a:spcAft>
-                <a:spcPts val="300"/>
-              </a:spcAft>
-              <a:buNone/>
-            </a:pPr>
-            <a:r>
               <a:rPr lang="en-US" sz="1200" dirty="0">
                 <a:solidFill>
                   <a:srgbClr val="1C2833"/>
@@ -3703,7 +3512,7 @@
                 <a:ea typeface="Arial" pitchFamily="34" charset="-122"/>
                 <a:cs typeface="Arial" pitchFamily="34" charset="-120"/>
               </a:rPr>
-              <a:t> Hold tāḍāsana for 90 sec; count your breaths during the hold.</a:t>
+              <a:t>Sit back in sukhāsana.</a:t>
             </a:r>
             <a:endParaRPr lang="en-US" sz="1200" dirty="0"/>
           </a:p>
@@ -3719,6 +3528,30 @@
               <a:buChar char="•"/>
             </a:pPr>
             <a:r>
+              <a:rPr lang="en-US" sz="1200" dirty="0">
+                <a:solidFill>
+                  <a:srgbClr val="1C2833"/>
+                </a:solidFill>
+                <a:latin typeface="Arial" pitchFamily="34" charset="0"/>
+                <a:ea typeface="Arial" pitchFamily="34" charset="-122"/>
+                <a:cs typeface="Arial" pitchFamily="34" charset="-120"/>
+              </a:rPr>
+              <a:t>Eyes closed.</a:t>
+            </a:r>
+            <a:endParaRPr lang="en-US" sz="1200" dirty="0"/>
+          </a:p>
+          <a:p>
+            <a:pPr algn="l" marL="342900" indent="-342900">
+              <a:lnSpc>
+                <a:spcPts val="1620"/>
+              </a:lnSpc>
+              <a:spcAft>
+                <a:spcPts val="300"/>
+              </a:spcAft>
+              <a:buSzPct val="100000"/>
+              <a:buChar char="•"/>
+            </a:pPr>
+            <a:r>
               <a:rPr lang="en-US" sz="1200" b="1" dirty="0">
                 <a:solidFill>
                   <a:srgbClr val="1C2833"/>
@@ -3727,7 +3560,7 @@
                 <a:ea typeface="Arial" pitchFamily="34" charset="-122"/>
                 <a:cs typeface="Arial" pitchFamily="34" charset="-120"/>
               </a:rPr>
-              <a:t>Tier down:</a:t>
+              <a:t>Just observe your breath for 60 seconds.</a:t>
             </a:r>
             <a:pPr algn="l" indent="0" marL="0">
               <a:lnSpc>
@@ -3747,7 +3580,71 @@
                 <a:ea typeface="Arial" pitchFamily="34" charset="-122"/>
                 <a:cs typeface="Arial" pitchFamily="34" charset="-120"/>
               </a:rPr>
-              <a:t> Hold for 15 sec if 30 feels long; rest in between.</a:t>
+              <a:t> Don't try to change it. Just notice.</a:t>
+            </a:r>
+            <a:endParaRPr lang="en-US" sz="1200" dirty="0"/>
+          </a:p>
+          <a:p>
+            <a:pPr algn="l" marL="342900" indent="-342900">
+              <a:lnSpc>
+                <a:spcPts val="1620"/>
+              </a:lnSpc>
+              <a:spcAft>
+                <a:spcPts val="300"/>
+              </a:spcAft>
+              <a:buSzPct val="100000"/>
+              <a:buChar char="•"/>
+            </a:pPr>
+            <a:r>
+              <a:rPr lang="en-US" sz="1200" dirty="0">
+                <a:solidFill>
+                  <a:srgbClr val="1C2833"/>
+                </a:solidFill>
+                <a:latin typeface="Arial" pitchFamily="34" charset="0"/>
+                <a:ea typeface="Arial" pitchFamily="34" charset="-122"/>
+                <a:cs typeface="Arial" pitchFamily="34" charset="-120"/>
+              </a:rPr>
+              <a:t>After 60 sec: </a:t>
+            </a:r>
+            <a:pPr algn="l" indent="0" marL="0">
+              <a:lnSpc>
+                <a:spcPts val="1620"/>
+              </a:lnSpc>
+              <a:spcAft>
+                <a:spcPts val="300"/>
+              </a:spcAft>
+              <a:buNone/>
+            </a:pPr>
+            <a:r>
+              <a:rPr lang="en-US" sz="1200" i="1" dirty="0">
+                <a:solidFill>
+                  <a:srgbClr val="1C2833"/>
+                </a:solidFill>
+                <a:latin typeface="Arial" pitchFamily="34" charset="0"/>
+                <a:ea typeface="Arial" pitchFamily="34" charset="-122"/>
+                <a:cs typeface="Arial" pitchFamily="34" charset="-120"/>
+              </a:rPr>
+              <a:t>"How many breaths did you count? Was your mind quiet, busy, somewhere else?"</a:t>
+            </a:r>
+            <a:pPr algn="l" indent="0" marL="0">
+              <a:lnSpc>
+                <a:spcPts val="1620"/>
+              </a:lnSpc>
+              <a:spcAft>
+                <a:spcPts val="300"/>
+              </a:spcAft>
+              <a:buNone/>
+            </a:pPr>
+            <a:r>
+              <a:rPr lang="en-US" sz="1200" dirty="0">
+                <a:solidFill>
+                  <a:srgbClr val="1C2833"/>
+                </a:solidFill>
+                <a:latin typeface="Arial" pitchFamily="34" charset="0"/>
+                <a:ea typeface="Arial" pitchFamily="34" charset="-122"/>
+                <a:cs typeface="Arial" pitchFamily="34" charset="-120"/>
+              </a:rPr>
+              <a:t> — quick share, 2 students.</a:t>
             </a:r>
             <a:endParaRPr lang="en-US" sz="1200" dirty="0"/>
           </a:p>
@@ -3905,7 +3802,7 @@
                 <a:ea typeface="Georgia" pitchFamily="34" charset="-122"/>
                 <a:cs typeface="Georgia" pitchFamily="34" charset="-120"/>
               </a:rPr>
-              <a:t>Teacher notes</a:t>
+              <a:t>Wrap-up (5 min)</a:t>
             </a:r>
             <a:endParaRPr lang="en-US" sz="1800" dirty="0"/>
           </a:p>
@@ -3919,8 +3816,8 @@
         </p:nvSpPr>
         <p:spPr>
           <a:xfrm>
-            <a:off x="406301" y="870942"/>
-            <a:ext cx="8498026" cy="853083"/>
+            <a:off x="634901" y="883593"/>
+            <a:ext cx="8102798" cy="1257002"/>
           </a:xfrm>
           <a:prstGeom prst="rect">
             <a:avLst/>
@@ -3932,17 +3829,15 @@
           <a:bodyPr wrap="square" lIns="0" tIns="0" rIns="0" bIns="0" rtlCol="0" anchor="t"/>
           <a:lstStyle/>
           <a:p>
-            <a:pPr algn="l" indent="0" marL="0">
-              <a:lnSpc>
-                <a:spcPts val="1680"/>
-              </a:lnSpc>
-              <a:spcBef>
-                <a:spcPts val="300"/>
-              </a:spcBef>
-              <a:spcAft>
-                <a:spcPts val="300"/>
-              </a:spcAft>
-              <a:buNone/>
+            <a:pPr algn="l" marL="342900" indent="-342900">
+              <a:lnSpc>
+                <a:spcPts val="1620"/>
+              </a:lnSpc>
+              <a:spcAft>
+                <a:spcPts val="300"/>
+              </a:spcAft>
+              <a:buSzPct val="100000"/>
+              <a:buChar char="•"/>
             </a:pPr>
             <a:r>
               <a:rPr lang="en-US" sz="1200" dirty="0">
@@ -3953,7 +3848,223 @@
                 <a:ea typeface="Arial" pitchFamily="34" charset="-122"/>
                 <a:cs typeface="Arial" pitchFamily="34" charset="-120"/>
               </a:rPr>
-              <a:t>– This is the most important "framing" day of the module. Students who learn the two definitions can hold the philosophical frame for the rest of the module. – Some students will resist closing their eyes during settle. Don't force it — "eyes lowered to the mat" is acceptable. – Watch for students who hyperextend knees during tāḍāsana — common in young dancers. Cue "soft knees, lift knee caps."</a:t>
+              <a:t>Three-question recap (chorus):</a:t>
+            </a:r>
+            <a:endParaRPr lang="en-US" sz="1200" dirty="0"/>
+          </a:p>
+          <a:p>
+            <a:pPr algn="l" marL="342900" indent="-342900">
+              <a:lnSpc>
+                <a:spcPts val="1620"/>
+              </a:lnSpc>
+              <a:spcAft>
+                <a:spcPts val="300"/>
+              </a:spcAft>
+              <a:buSzPct val="100000"/>
+              <a:buChar char="•"/>
+            </a:pPr>
+            <a:r>
+              <a:rPr lang="en-US" sz="1200" dirty="0">
+                <a:solidFill>
+                  <a:srgbClr val="1C2833"/>
+                </a:solidFill>
+                <a:latin typeface="Arial" pitchFamily="34" charset="0"/>
+                <a:ea typeface="Arial" pitchFamily="34" charset="-122"/>
+                <a:cs typeface="Arial" pitchFamily="34" charset="-120"/>
+              </a:rPr>
+              <a:t>Who was Patañjali? </a:t>
+            </a:r>
+            <a:pPr algn="l" indent="0" marL="0">
+              <a:lnSpc>
+                <a:spcPts val="1620"/>
+              </a:lnSpc>
+              <a:spcAft>
+                <a:spcPts val="300"/>
+              </a:spcAft>
+              <a:buNone/>
+            </a:pPr>
+            <a:r>
+              <a:rPr lang="en-US" sz="1200" i="1" dirty="0">
+                <a:solidFill>
+                  <a:srgbClr val="1C2833"/>
+                </a:solidFill>
+                <a:latin typeface="Arial" pitchFamily="34" charset="0"/>
+                <a:ea typeface="Arial" pitchFamily="34" charset="-122"/>
+                <a:cs typeface="Arial" pitchFamily="34" charset="-120"/>
+              </a:rPr>
+              <a:t>(The systematiser of yoga's eight limbs.)</a:t>
+            </a:r>
+            <a:endParaRPr lang="en-US" sz="1200" dirty="0"/>
+          </a:p>
+          <a:p>
+            <a:pPr algn="l" marL="342900" indent="-342900">
+              <a:lnSpc>
+                <a:spcPts val="1620"/>
+              </a:lnSpc>
+              <a:spcAft>
+                <a:spcPts val="300"/>
+              </a:spcAft>
+              <a:buSzPct val="100000"/>
+              <a:buChar char="•"/>
+            </a:pPr>
+            <a:r>
+              <a:rPr lang="en-US" sz="1200" dirty="0">
+                <a:solidFill>
+                  <a:srgbClr val="1C2833"/>
+                </a:solidFill>
+                <a:latin typeface="Arial" pitchFamily="34" charset="0"/>
+                <a:ea typeface="Arial" pitchFamily="34" charset="-122"/>
+                <a:cs typeface="Arial" pitchFamily="34" charset="-120"/>
+              </a:rPr>
+              <a:t>What is yoga? </a:t>
+            </a:r>
+            <a:pPr algn="l" indent="0" marL="0">
+              <a:lnSpc>
+                <a:spcPts val="1620"/>
+              </a:lnSpc>
+              <a:spcAft>
+                <a:spcPts val="300"/>
+              </a:spcAft>
+              <a:buNone/>
+            </a:pPr>
+            <a:r>
+              <a:rPr lang="en-US" sz="1200" i="1" dirty="0">
+                <a:solidFill>
+                  <a:srgbClr val="1C2833"/>
+                </a:solidFill>
+                <a:latin typeface="Arial" pitchFamily="34" charset="0"/>
+                <a:ea typeface="Arial" pitchFamily="34" charset="-122"/>
+                <a:cs typeface="Arial" pitchFamily="34" charset="-120"/>
+              </a:rPr>
+              <a:t>("Settling the fluctuations of the mind." OR "Skill in action.")</a:t>
+            </a:r>
+            <a:endParaRPr lang="en-US" sz="1200" dirty="0"/>
+          </a:p>
+          <a:p>
+            <a:pPr algn="l" marL="342900" indent="-342900">
+              <a:lnSpc>
+                <a:spcPts val="1620"/>
+              </a:lnSpc>
+              <a:spcAft>
+                <a:spcPts val="300"/>
+              </a:spcAft>
+              <a:buSzPct val="100000"/>
+              <a:buChar char="•"/>
+            </a:pPr>
+            <a:r>
+              <a:rPr lang="en-US" sz="1200" dirty="0">
+                <a:solidFill>
+                  <a:srgbClr val="1C2833"/>
+                </a:solidFill>
+                <a:latin typeface="Arial" pitchFamily="34" charset="0"/>
+                <a:ea typeface="Arial" pitchFamily="34" charset="-122"/>
+                <a:cs typeface="Arial" pitchFamily="34" charset="-120"/>
+              </a:rPr>
+              <a:t>What is </a:t>
+            </a:r>
+            <a:pPr algn="l" indent="0" marL="0">
+              <a:lnSpc>
+                <a:spcPts val="1620"/>
+              </a:lnSpc>
+              <a:spcAft>
+                <a:spcPts val="300"/>
+              </a:spcAft>
+              <a:buNone/>
+            </a:pPr>
+            <a:r>
+              <a:rPr lang="en-US" sz="1200" i="1" dirty="0">
+                <a:solidFill>
+                  <a:srgbClr val="1C2833"/>
+                </a:solidFill>
+                <a:latin typeface="Arial" pitchFamily="34" charset="0"/>
+                <a:ea typeface="Arial" pitchFamily="34" charset="-122"/>
+                <a:cs typeface="Arial" pitchFamily="34" charset="-120"/>
+              </a:rPr>
+              <a:t>tāḍāsana</a:t>
+            </a:r>
+            <a:pPr algn="l" indent="0" marL="0">
+              <a:lnSpc>
+                <a:spcPts val="1620"/>
+              </a:lnSpc>
+              <a:spcAft>
+                <a:spcPts val="300"/>
+              </a:spcAft>
+              <a:buNone/>
+            </a:pPr>
+            <a:r>
+              <a:rPr lang="en-US" sz="1200" dirty="0">
+                <a:solidFill>
+                  <a:srgbClr val="1C2833"/>
+                </a:solidFill>
+                <a:latin typeface="Arial" pitchFamily="34" charset="0"/>
+                <a:ea typeface="Arial" pitchFamily="34" charset="-122"/>
+                <a:cs typeface="Arial" pitchFamily="34" charset="-120"/>
+              </a:rPr>
+              <a:t>? </a:t>
+            </a:r>
+            <a:pPr algn="l" indent="0" marL="0">
+              <a:lnSpc>
+                <a:spcPts val="1620"/>
+              </a:lnSpc>
+              <a:spcAft>
+                <a:spcPts val="300"/>
+              </a:spcAft>
+              <a:buNone/>
+            </a:pPr>
+            <a:r>
+              <a:rPr lang="en-US" sz="1200" i="1" dirty="0">
+                <a:solidFill>
+                  <a:srgbClr val="1C2833"/>
+                </a:solidFill>
+                <a:latin typeface="Arial" pitchFamily="34" charset="0"/>
+                <a:ea typeface="Arial" pitchFamily="34" charset="-122"/>
+                <a:cs typeface="Arial" pitchFamily="34" charset="-120"/>
+              </a:rPr>
+              <a:t>(Mountain posture.)</a:t>
+            </a:r>
+            <a:endParaRPr lang="en-US" sz="1200" dirty="0"/>
+          </a:p>
+          <a:p>
+            <a:pPr algn="l" marL="342900" indent="-342900">
+              <a:lnSpc>
+                <a:spcPts val="1620"/>
+              </a:lnSpc>
+              <a:spcAft>
+                <a:spcPts val="300"/>
+              </a:spcAft>
+              <a:buSzPct val="100000"/>
+              <a:buChar char="•"/>
+            </a:pPr>
+            <a:r>
+              <a:rPr lang="en-US" sz="1200" dirty="0">
+                <a:solidFill>
+                  <a:srgbClr val="1C2833"/>
+                </a:solidFill>
+                <a:latin typeface="Arial" pitchFamily="34" charset="0"/>
+                <a:ea typeface="Arial" pitchFamily="34" charset="-122"/>
+                <a:cs typeface="Arial" pitchFamily="34" charset="-120"/>
+              </a:rPr>
+              <a:t>Preview Day 2: </a:t>
+            </a:r>
+            <a:pPr algn="l" indent="0" marL="0">
+              <a:lnSpc>
+                <a:spcPts val="1620"/>
+              </a:lnSpc>
+              <a:spcAft>
+                <a:spcPts val="300"/>
+              </a:spcAft>
+              <a:buNone/>
+            </a:pPr>
+            <a:r>
+              <a:rPr lang="en-US" sz="1200" i="1" dirty="0">
+                <a:solidFill>
+                  <a:srgbClr val="1C2833"/>
+                </a:solidFill>
+                <a:latin typeface="Arial" pitchFamily="34" charset="0"/>
+                <a:ea typeface="Arial" pitchFamily="34" charset="-122"/>
+                <a:cs typeface="Arial" pitchFamily="34" charset="-120"/>
+              </a:rPr>
+              <a:t>"Tomorrow — the eight limbs. We'll see why posture and breath are only TWO of them."</a:t>
             </a:r>
             <a:endParaRPr lang="en-US" sz="1200" dirty="0"/>
           </a:p>
@@ -4111,7 +4222,7 @@
                 <a:ea typeface="Georgia" pitchFamily="34" charset="-122"/>
                 <a:cs typeface="Georgia" pitchFamily="34" charset="-120"/>
               </a:rPr>
-              <a:t>Citation(s) used in this lesson</a:t>
+              <a:t>Student-facing content</a:t>
             </a:r>
             <a:endParaRPr lang="en-US" sz="1800" dirty="0"/>
           </a:p>
@@ -4125,8 +4236,61 @@
         </p:nvSpPr>
         <p:spPr>
           <a:xfrm>
-            <a:off x="406301" y="870942"/>
-            <a:ext cx="8498026" cy="436066"/>
+            <a:off x="406301" y="883593"/>
+            <a:ext cx="8331398" cy="3033713"/>
+          </a:xfrm>
+          <a:prstGeom prst="rect">
+            <a:avLst/>
+          </a:prstGeom>
+          <a:solidFill>
+            <a:srgbClr val="F4F8F9"/>
+          </a:solidFill>
+          <a:ln/>
+        </p:spPr>
+        <p:txBody>
+          <a:bodyPr wrap="square" rtlCol="0" anchor="ctr"/>
+          <a:lstStyle/>
+          <a:p>
+            <a:pPr indent="0" marL="0">
+              <a:buNone/>
+            </a:pPr>
+            <a:endParaRPr lang="en-US" dirty="0"/>
+          </a:p>
+        </p:txBody>
+      </p:sp>
+      <p:sp>
+        <p:nvSpPr>
+          <p:cNvPr id="5" name="Shape 3"/>
+          <p:cNvSpPr/>
+          <p:nvPr/>
+        </p:nvSpPr>
+        <p:spPr>
+          <a:xfrm>
+            <a:off x="434876" y="883593"/>
+            <a:ext cx="0" cy="3033713"/>
+          </a:xfrm>
+          <a:prstGeom prst="line">
+            <a:avLst/>
+          </a:prstGeom>
+          <a:noFill/>
+          <a:ln w="57150">
+            <a:solidFill>
+              <a:srgbClr val="FE4447"/>
+            </a:solidFill>
+            <a:prstDash val="solid"/>
+          </a:ln>
+        </p:spPr>
+      </p:sp>
+      <p:sp>
+        <p:nvSpPr>
+          <p:cNvPr id="6" name="Text 4"/>
+          <p:cNvSpPr/>
+          <p:nvPr/>
+        </p:nvSpPr>
+        <p:spPr>
+          <a:xfrm>
+            <a:off x="692051" y="1074093"/>
+            <a:ext cx="7973389" cy="230981"/>
           </a:xfrm>
           <a:prstGeom prst="rect">
             <a:avLst/>
@@ -4140,6 +4304,693 @@
           <a:p>
             <a:pPr algn="l" indent="0" marL="0">
               <a:lnSpc>
+                <a:spcPts val="1820"/>
+              </a:lnSpc>
+              <a:spcBef>
+                <a:spcPts val="300"/>
+              </a:spcBef>
+              <a:spcAft>
+                <a:spcPts val="300"/>
+              </a:spcAft>
+              <a:buNone/>
+            </a:pPr>
+            <a:r>
+              <a:rPr lang="en-US" sz="1300" b="1" i="1" dirty="0">
+                <a:solidFill>
+                  <a:srgbClr val="1C2833"/>
+                </a:solidFill>
+                <a:latin typeface="Georgia" pitchFamily="34" charset="0"/>
+                <a:ea typeface="Georgia" pitchFamily="34" charset="-122"/>
+                <a:cs typeface="Georgia" pitchFamily="34" charset="-120"/>
+              </a:rPr>
+              <a:t>Day 1 — What is Yoga?</a:t>
+            </a:r>
+            <a:endParaRPr lang="en-US" sz="1300" dirty="0"/>
+          </a:p>
+        </p:txBody>
+      </p:sp>
+      <p:sp>
+        <p:nvSpPr>
+          <p:cNvPr id="7" name="Text 5"/>
+          <p:cNvSpPr/>
+          <p:nvPr/>
+        </p:nvSpPr>
+        <p:spPr>
+          <a:xfrm>
+            <a:off x="692051" y="1343174"/>
+            <a:ext cx="7973389" cy="230981"/>
+          </a:xfrm>
+          <a:prstGeom prst="rect">
+            <a:avLst/>
+          </a:prstGeom>
+          <a:noFill/>
+          <a:ln/>
+        </p:spPr>
+        <p:txBody>
+          <a:bodyPr wrap="square" lIns="0" tIns="0" rIns="0" bIns="0" rtlCol="0" anchor="t"/>
+          <a:lstStyle/>
+          <a:p>
+            <a:pPr algn="l" indent="0" marL="0">
+              <a:lnSpc>
+                <a:spcPts val="1820"/>
+              </a:lnSpc>
+              <a:spcBef>
+                <a:spcPts val="300"/>
+              </a:spcBef>
+              <a:spcAft>
+                <a:spcPts val="300"/>
+              </a:spcAft>
+              <a:buNone/>
+            </a:pPr>
+            <a:r>
+              <a:rPr lang="en-US" sz="1300" i="1" dirty="0">
+                <a:solidFill>
+                  <a:srgbClr val="1C2833"/>
+                </a:solidFill>
+                <a:latin typeface="Georgia" pitchFamily="34" charset="0"/>
+                <a:ea typeface="Georgia" pitchFamily="34" charset="-122"/>
+                <a:cs typeface="Georgia" pitchFamily="34" charset="-120"/>
+              </a:rPr>
+              <a:t>Yoga</a:t>
+            </a:r>
+            <a:pPr algn="l" indent="0" marL="0">
+              <a:lnSpc>
+                <a:spcPts val="1820"/>
+              </a:lnSpc>
+              <a:spcBef>
+                <a:spcPts val="300"/>
+              </a:spcBef>
+              <a:spcAft>
+                <a:spcPts val="300"/>
+              </a:spcAft>
+              <a:buNone/>
+            </a:pPr>
+            <a:r>
+              <a:rPr lang="en-US" sz="1300" dirty="0">
+                <a:solidFill>
+                  <a:srgbClr val="1C2833"/>
+                </a:solidFill>
+                <a:latin typeface="Georgia" pitchFamily="34" charset="0"/>
+                <a:ea typeface="Georgia" pitchFamily="34" charset="-122"/>
+                <a:cs typeface="Georgia" pitchFamily="34" charset="-120"/>
+              </a:rPr>
+              <a:t> (Sanskrit: </a:t>
+            </a:r>
+            <a:pPr algn="l" indent="0" marL="0">
+              <a:lnSpc>
+                <a:spcPts val="1820"/>
+              </a:lnSpc>
+              <a:spcBef>
+                <a:spcPts val="300"/>
+              </a:spcBef>
+              <a:spcAft>
+                <a:spcPts val="300"/>
+              </a:spcAft>
+              <a:buNone/>
+            </a:pPr>
+            <a:r>
+              <a:rPr lang="en-US" sz="1300" i="1" dirty="0">
+                <a:solidFill>
+                  <a:srgbClr val="1C2833"/>
+                </a:solidFill>
+                <a:latin typeface="Georgia" pitchFamily="34" charset="0"/>
+                <a:ea typeface="Georgia" pitchFamily="34" charset="-122"/>
+                <a:cs typeface="Georgia" pitchFamily="34" charset="-120"/>
+              </a:rPr>
+              <a:t>yuj</a:t>
+            </a:r>
+            <a:pPr algn="l" indent="0" marL="0">
+              <a:lnSpc>
+                <a:spcPts val="1820"/>
+              </a:lnSpc>
+              <a:spcBef>
+                <a:spcPts val="300"/>
+              </a:spcBef>
+              <a:spcAft>
+                <a:spcPts val="300"/>
+              </a:spcAft>
+              <a:buNone/>
+            </a:pPr>
+            <a:r>
+              <a:rPr lang="en-US" sz="1300" dirty="0">
+                <a:solidFill>
+                  <a:srgbClr val="1C2833"/>
+                </a:solidFill>
+                <a:latin typeface="Georgia" pitchFamily="34" charset="0"/>
+                <a:ea typeface="Georgia" pitchFamily="34" charset="-122"/>
+                <a:cs typeface="Georgia" pitchFamily="34" charset="-120"/>
+              </a:rPr>
+              <a:t> = "to yoke") is the joining of body, breath, and attention.</a:t>
+            </a:r>
+            <a:endParaRPr lang="en-US" sz="1300" dirty="0"/>
+          </a:p>
+        </p:txBody>
+      </p:sp>
+      <p:sp>
+        <p:nvSpPr>
+          <p:cNvPr id="8" name="Text 6"/>
+          <p:cNvSpPr/>
+          <p:nvPr/>
+        </p:nvSpPr>
+        <p:spPr>
+          <a:xfrm>
+            <a:off x="692051" y="1612255"/>
+            <a:ext cx="7973389" cy="230981"/>
+          </a:xfrm>
+          <a:prstGeom prst="rect">
+            <a:avLst/>
+          </a:prstGeom>
+          <a:noFill/>
+          <a:ln/>
+        </p:spPr>
+        <p:txBody>
+          <a:bodyPr wrap="square" lIns="0" tIns="0" rIns="0" bIns="0" rtlCol="0" anchor="t"/>
+          <a:lstStyle/>
+          <a:p>
+            <a:pPr algn="l" indent="0" marL="0">
+              <a:lnSpc>
+                <a:spcPts val="1820"/>
+              </a:lnSpc>
+              <a:spcBef>
+                <a:spcPts val="300"/>
+              </a:spcBef>
+              <a:spcAft>
+                <a:spcPts val="300"/>
+              </a:spcAft>
+              <a:buNone/>
+            </a:pPr>
+            <a:r>
+              <a:rPr lang="en-US" sz="1300" i="1" dirty="0">
+                <a:solidFill>
+                  <a:srgbClr val="1C2833"/>
+                </a:solidFill>
+                <a:latin typeface="Georgia" pitchFamily="34" charset="0"/>
+                <a:ea typeface="Georgia" pitchFamily="34" charset="-122"/>
+                <a:cs typeface="Georgia" pitchFamily="34" charset="-120"/>
+              </a:rPr>
+              <a:t>Two foundational definitions:</a:t>
+            </a:r>
+            <a:endParaRPr lang="en-US" sz="1300" dirty="0"/>
+          </a:p>
+        </p:txBody>
+      </p:sp>
+      <p:sp>
+        <p:nvSpPr>
+          <p:cNvPr id="9" name="Text 7"/>
+          <p:cNvSpPr/>
+          <p:nvPr/>
+        </p:nvSpPr>
+        <p:spPr>
+          <a:xfrm>
+            <a:off x="692051" y="1881336"/>
+            <a:ext cx="7973389" cy="230981"/>
+          </a:xfrm>
+          <a:prstGeom prst="rect">
+            <a:avLst/>
+          </a:prstGeom>
+          <a:noFill/>
+          <a:ln/>
+        </p:spPr>
+        <p:txBody>
+          <a:bodyPr wrap="square" lIns="0" tIns="0" rIns="0" bIns="0" rtlCol="0" anchor="t"/>
+          <a:lstStyle/>
+          <a:p>
+            <a:pPr algn="l" indent="0" marL="0">
+              <a:lnSpc>
+                <a:spcPts val="1820"/>
+              </a:lnSpc>
+              <a:spcBef>
+                <a:spcPts val="300"/>
+              </a:spcBef>
+              <a:spcAft>
+                <a:spcPts val="300"/>
+              </a:spcAft>
+              <a:buNone/>
+            </a:pPr>
+            <a:r>
+              <a:rPr lang="en-US" sz="1300" b="1" i="1" dirty="0">
+                <a:solidFill>
+                  <a:srgbClr val="1C2833"/>
+                </a:solidFill>
+                <a:latin typeface="Georgia" pitchFamily="34" charset="0"/>
+                <a:ea typeface="Georgia" pitchFamily="34" charset="-122"/>
+                <a:cs typeface="Georgia" pitchFamily="34" charset="-120"/>
+              </a:rPr>
+              <a:t>Patañjali:</a:t>
+            </a:r>
+            <a:pPr algn="l" indent="0" marL="0">
+              <a:lnSpc>
+                <a:spcPts val="1820"/>
+              </a:lnSpc>
+              <a:spcBef>
+                <a:spcPts val="300"/>
+              </a:spcBef>
+              <a:spcAft>
+                <a:spcPts val="300"/>
+              </a:spcAft>
+              <a:buNone/>
+            </a:pPr>
+            <a:r>
+              <a:rPr lang="en-US" sz="1300" dirty="0">
+                <a:solidFill>
+                  <a:srgbClr val="1C2833"/>
+                </a:solidFill>
+                <a:latin typeface="Georgia" pitchFamily="34" charset="0"/>
+                <a:ea typeface="Georgia" pitchFamily="34" charset="-122"/>
+                <a:cs typeface="Georgia" pitchFamily="34" charset="-120"/>
+              </a:rPr>
+              <a:t> </a:t>
+            </a:r>
+            <a:pPr algn="l" indent="0" marL="0">
+              <a:lnSpc>
+                <a:spcPts val="1820"/>
+              </a:lnSpc>
+              <a:spcBef>
+                <a:spcPts val="300"/>
+              </a:spcBef>
+              <a:spcAft>
+                <a:spcPts val="300"/>
+              </a:spcAft>
+              <a:buNone/>
+            </a:pPr>
+            <a:r>
+              <a:rPr lang="en-US" sz="1300" i="1" dirty="0">
+                <a:solidFill>
+                  <a:srgbClr val="1C2833"/>
+                </a:solidFill>
+                <a:latin typeface="Georgia" pitchFamily="34" charset="0"/>
+                <a:ea typeface="Georgia" pitchFamily="34" charset="-122"/>
+                <a:cs typeface="Georgia" pitchFamily="34" charset="-120"/>
+              </a:rPr>
+              <a:t>yoga = settling the fluctuations of the mind.</a:t>
+            </a:r>
+            <a:endParaRPr lang="en-US" sz="1300" dirty="0"/>
+          </a:p>
+        </p:txBody>
+      </p:sp>
+      <p:sp>
+        <p:nvSpPr>
+          <p:cNvPr id="10" name="Text 8"/>
+          <p:cNvSpPr/>
+          <p:nvPr/>
+        </p:nvSpPr>
+        <p:spPr>
+          <a:xfrm>
+            <a:off x="692051" y="2150418"/>
+            <a:ext cx="7973389" cy="230981"/>
+          </a:xfrm>
+          <a:prstGeom prst="rect">
+            <a:avLst/>
+          </a:prstGeom>
+          <a:noFill/>
+          <a:ln/>
+        </p:spPr>
+        <p:txBody>
+          <a:bodyPr wrap="square" lIns="0" tIns="0" rIns="0" bIns="0" rtlCol="0" anchor="t"/>
+          <a:lstStyle/>
+          <a:p>
+            <a:pPr algn="l" indent="0" marL="0">
+              <a:lnSpc>
+                <a:spcPts val="1820"/>
+              </a:lnSpc>
+              <a:spcBef>
+                <a:spcPts val="300"/>
+              </a:spcBef>
+              <a:spcAft>
+                <a:spcPts val="300"/>
+              </a:spcAft>
+              <a:buNone/>
+            </a:pPr>
+            <a:r>
+              <a:rPr lang="en-US" sz="1300" b="1" i="1" dirty="0">
+                <a:solidFill>
+                  <a:srgbClr val="1C2833"/>
+                </a:solidFill>
+                <a:latin typeface="Georgia" pitchFamily="34" charset="0"/>
+                <a:ea typeface="Georgia" pitchFamily="34" charset="-122"/>
+                <a:cs typeface="Georgia" pitchFamily="34" charset="-120"/>
+              </a:rPr>
+              <a:t>Bhagavad-gītā:</a:t>
+            </a:r>
+            <a:pPr algn="l" indent="0" marL="0">
+              <a:lnSpc>
+                <a:spcPts val="1820"/>
+              </a:lnSpc>
+              <a:spcBef>
+                <a:spcPts val="300"/>
+              </a:spcBef>
+              <a:spcAft>
+                <a:spcPts val="300"/>
+              </a:spcAft>
+              <a:buNone/>
+            </a:pPr>
+            <a:r>
+              <a:rPr lang="en-US" sz="1300" dirty="0">
+                <a:solidFill>
+                  <a:srgbClr val="1C2833"/>
+                </a:solidFill>
+                <a:latin typeface="Georgia" pitchFamily="34" charset="0"/>
+                <a:ea typeface="Georgia" pitchFamily="34" charset="-122"/>
+                <a:cs typeface="Georgia" pitchFamily="34" charset="-120"/>
+              </a:rPr>
+              <a:t> </a:t>
+            </a:r>
+            <a:pPr algn="l" indent="0" marL="0">
+              <a:lnSpc>
+                <a:spcPts val="1820"/>
+              </a:lnSpc>
+              <a:spcBef>
+                <a:spcPts val="300"/>
+              </a:spcBef>
+              <a:spcAft>
+                <a:spcPts val="300"/>
+              </a:spcAft>
+              <a:buNone/>
+            </a:pPr>
+            <a:r>
+              <a:rPr lang="en-US" sz="1300" i="1" dirty="0">
+                <a:solidFill>
+                  <a:srgbClr val="1C2833"/>
+                </a:solidFill>
+                <a:latin typeface="Georgia" pitchFamily="34" charset="0"/>
+                <a:ea typeface="Georgia" pitchFamily="34" charset="-122"/>
+                <a:cs typeface="Georgia" pitchFamily="34" charset="-120"/>
+              </a:rPr>
+              <a:t>yoga = skill in action.</a:t>
+            </a:r>
+            <a:endParaRPr lang="en-US" sz="1300" dirty="0"/>
+          </a:p>
+        </p:txBody>
+      </p:sp>
+      <p:sp>
+        <p:nvSpPr>
+          <p:cNvPr id="11" name="Text 9"/>
+          <p:cNvSpPr/>
+          <p:nvPr/>
+        </p:nvSpPr>
+        <p:spPr>
+          <a:xfrm>
+            <a:off x="692051" y="2419499"/>
+            <a:ext cx="7973389" cy="230981"/>
+          </a:xfrm>
+          <a:prstGeom prst="rect">
+            <a:avLst/>
+          </a:prstGeom>
+          <a:noFill/>
+          <a:ln/>
+        </p:spPr>
+        <p:txBody>
+          <a:bodyPr wrap="square" lIns="0" tIns="0" rIns="0" bIns="0" rtlCol="0" anchor="t"/>
+          <a:lstStyle/>
+          <a:p>
+            <a:pPr algn="l" indent="0" marL="0">
+              <a:lnSpc>
+                <a:spcPts val="1820"/>
+              </a:lnSpc>
+              <a:spcBef>
+                <a:spcPts val="300"/>
+              </a:spcBef>
+              <a:spcAft>
+                <a:spcPts val="300"/>
+              </a:spcAft>
+              <a:buNone/>
+            </a:pPr>
+            <a:r>
+              <a:rPr lang="en-US" sz="1300" dirty="0">
+                <a:solidFill>
+                  <a:srgbClr val="1C2833"/>
+                </a:solidFill>
+                <a:latin typeface="Georgia" pitchFamily="34" charset="0"/>
+                <a:ea typeface="Georgia" pitchFamily="34" charset="-122"/>
+                <a:cs typeface="Georgia" pitchFamily="34" charset="-120"/>
+              </a:rPr>
+              <a:t>Today's posture: </a:t>
+            </a:r>
+            <a:pPr algn="l" indent="0" marL="0">
+              <a:lnSpc>
+                <a:spcPts val="1820"/>
+              </a:lnSpc>
+              <a:spcBef>
+                <a:spcPts val="300"/>
+              </a:spcBef>
+              <a:spcAft>
+                <a:spcPts val="300"/>
+              </a:spcAft>
+              <a:buNone/>
+            </a:pPr>
+            <a:r>
+              <a:rPr lang="en-US" sz="1300" b="1" i="1" dirty="0">
+                <a:solidFill>
+                  <a:srgbClr val="1C2833"/>
+                </a:solidFill>
+                <a:latin typeface="Georgia" pitchFamily="34" charset="0"/>
+                <a:ea typeface="Georgia" pitchFamily="34" charset="-122"/>
+                <a:cs typeface="Georgia" pitchFamily="34" charset="-120"/>
+              </a:rPr>
+              <a:t>tāḍāsana</a:t>
+            </a:r>
+            <a:pPr algn="l" indent="0" marL="0">
+              <a:lnSpc>
+                <a:spcPts val="1820"/>
+              </a:lnSpc>
+              <a:spcBef>
+                <a:spcPts val="300"/>
+              </a:spcBef>
+              <a:spcAft>
+                <a:spcPts val="300"/>
+              </a:spcAft>
+              <a:buNone/>
+            </a:pPr>
+            <a:r>
+              <a:rPr lang="en-US" sz="1300" dirty="0">
+                <a:solidFill>
+                  <a:srgbClr val="1C2833"/>
+                </a:solidFill>
+                <a:latin typeface="Georgia" pitchFamily="34" charset="0"/>
+                <a:ea typeface="Georgia" pitchFamily="34" charset="-122"/>
+                <a:cs typeface="Georgia" pitchFamily="34" charset="-120"/>
+              </a:rPr>
+              <a:t> (mountain).</a:t>
+            </a:r>
+            <a:endParaRPr lang="en-US" sz="1300" dirty="0"/>
+          </a:p>
+        </p:txBody>
+      </p:sp>
+      <p:sp>
+        <p:nvSpPr>
+          <p:cNvPr id="12" name="Text 10"/>
+          <p:cNvSpPr/>
+          <p:nvPr/>
+        </p:nvSpPr>
+        <p:spPr>
+          <a:xfrm>
+            <a:off x="692051" y="2688580"/>
+            <a:ext cx="7973389" cy="230981"/>
+          </a:xfrm>
+          <a:prstGeom prst="rect">
+            <a:avLst/>
+          </a:prstGeom>
+          <a:noFill/>
+          <a:ln/>
+        </p:spPr>
+        <p:txBody>
+          <a:bodyPr wrap="square" lIns="0" tIns="0" rIns="0" bIns="0" rtlCol="0" anchor="t"/>
+          <a:lstStyle/>
+          <a:p>
+            <a:pPr algn="l" indent="0" marL="0">
+              <a:lnSpc>
+                <a:spcPts val="1820"/>
+              </a:lnSpc>
+              <a:spcBef>
+                <a:spcPts val="300"/>
+              </a:spcBef>
+              <a:spcAft>
+                <a:spcPts val="300"/>
+              </a:spcAft>
+              <a:buNone/>
+            </a:pPr>
+            <a:r>
+              <a:rPr lang="en-US" sz="1300" i="1" dirty="0">
+                <a:solidFill>
+                  <a:srgbClr val="1C2833"/>
+                </a:solidFill>
+                <a:latin typeface="Georgia" pitchFamily="34" charset="0"/>
+                <a:ea typeface="Georgia" pitchFamily="34" charset="-122"/>
+                <a:cs typeface="Georgia" pitchFamily="34" charset="-120"/>
+              </a:rPr>
+              <a:t>Stand at the top of your mat.</a:t>
+            </a:r>
+            <a:endParaRPr lang="en-US" sz="1300" dirty="0"/>
+          </a:p>
+        </p:txBody>
+      </p:sp>
+      <p:sp>
+        <p:nvSpPr>
+          <p:cNvPr id="13" name="Text 11"/>
+          <p:cNvSpPr/>
+          <p:nvPr/>
+        </p:nvSpPr>
+        <p:spPr>
+          <a:xfrm>
+            <a:off x="692051" y="2957661"/>
+            <a:ext cx="7973389" cy="230981"/>
+          </a:xfrm>
+          <a:prstGeom prst="rect">
+            <a:avLst/>
+          </a:prstGeom>
+          <a:noFill/>
+          <a:ln/>
+        </p:spPr>
+        <p:txBody>
+          <a:bodyPr wrap="square" lIns="0" tIns="0" rIns="0" bIns="0" rtlCol="0" anchor="t"/>
+          <a:lstStyle/>
+          <a:p>
+            <a:pPr algn="l" indent="0" marL="0">
+              <a:lnSpc>
+                <a:spcPts val="1820"/>
+              </a:lnSpc>
+              <a:spcBef>
+                <a:spcPts val="300"/>
+              </a:spcBef>
+              <a:spcAft>
+                <a:spcPts val="300"/>
+              </a:spcAft>
+              <a:buNone/>
+            </a:pPr>
+            <a:r>
+              <a:rPr lang="en-US" sz="1300" i="1" dirty="0">
+                <a:solidFill>
+                  <a:srgbClr val="1C2833"/>
+                </a:solidFill>
+                <a:latin typeface="Georgia" pitchFamily="34" charset="0"/>
+                <a:ea typeface="Georgia" pitchFamily="34" charset="-122"/>
+                <a:cs typeface="Georgia" pitchFamily="34" charset="-120"/>
+              </a:rPr>
+              <a:t>Feet hip-width apart, firm contact with the ground.</a:t>
+            </a:r>
+            <a:endParaRPr lang="en-US" sz="1300" dirty="0"/>
+          </a:p>
+        </p:txBody>
+      </p:sp>
+      <p:sp>
+        <p:nvSpPr>
+          <p:cNvPr id="14" name="Text 12"/>
+          <p:cNvSpPr/>
+          <p:nvPr/>
+        </p:nvSpPr>
+        <p:spPr>
+          <a:xfrm>
+            <a:off x="692051" y="3226743"/>
+            <a:ext cx="7973389" cy="230981"/>
+          </a:xfrm>
+          <a:prstGeom prst="rect">
+            <a:avLst/>
+          </a:prstGeom>
+          <a:noFill/>
+          <a:ln/>
+        </p:spPr>
+        <p:txBody>
+          <a:bodyPr wrap="square" lIns="0" tIns="0" rIns="0" bIns="0" rtlCol="0" anchor="t"/>
+          <a:lstStyle/>
+          <a:p>
+            <a:pPr algn="l" indent="0" marL="0">
+              <a:lnSpc>
+                <a:spcPts val="1820"/>
+              </a:lnSpc>
+              <a:spcBef>
+                <a:spcPts val="300"/>
+              </a:spcBef>
+              <a:spcAft>
+                <a:spcPts val="300"/>
+              </a:spcAft>
+              <a:buNone/>
+            </a:pPr>
+            <a:r>
+              <a:rPr lang="en-US" sz="1300" i="1" dirty="0">
+                <a:solidFill>
+                  <a:srgbClr val="1C2833"/>
+                </a:solidFill>
+                <a:latin typeface="Georgia" pitchFamily="34" charset="0"/>
+                <a:ea typeface="Georgia" pitchFamily="34" charset="-122"/>
+                <a:cs typeface="Georgia" pitchFamily="34" charset="-120"/>
+              </a:rPr>
+              <a:t>Lengthen up through the crown of your head.</a:t>
+            </a:r>
+            <a:endParaRPr lang="en-US" sz="1300" dirty="0"/>
+          </a:p>
+        </p:txBody>
+      </p:sp>
+      <p:sp>
+        <p:nvSpPr>
+          <p:cNvPr id="15" name="Text 13"/>
+          <p:cNvSpPr/>
+          <p:nvPr/>
+        </p:nvSpPr>
+        <p:spPr>
+          <a:xfrm>
+            <a:off x="692051" y="3495824"/>
+            <a:ext cx="7973389" cy="230981"/>
+          </a:xfrm>
+          <a:prstGeom prst="rect">
+            <a:avLst/>
+          </a:prstGeom>
+          <a:noFill/>
+          <a:ln/>
+        </p:spPr>
+        <p:txBody>
+          <a:bodyPr wrap="square" lIns="0" tIns="0" rIns="0" bIns="0" rtlCol="0" anchor="t"/>
+          <a:lstStyle/>
+          <a:p>
+            <a:pPr algn="l" indent="0" marL="0">
+              <a:lnSpc>
+                <a:spcPts val="1820"/>
+              </a:lnSpc>
+              <a:spcBef>
+                <a:spcPts val="300"/>
+              </a:spcBef>
+              <a:spcAft>
+                <a:spcPts val="300"/>
+              </a:spcAft>
+              <a:buNone/>
+            </a:pPr>
+            <a:r>
+              <a:rPr lang="en-US" sz="1300" i="1" dirty="0">
+                <a:solidFill>
+                  <a:srgbClr val="1C2833"/>
+                </a:solidFill>
+                <a:latin typeface="Georgia" pitchFamily="34" charset="0"/>
+                <a:ea typeface="Georgia" pitchFamily="34" charset="-122"/>
+                <a:cs typeface="Georgia" pitchFamily="34" charset="-120"/>
+              </a:rPr>
+              <a:t>Breathe naturally for 30 seconds. Release.</a:t>
+            </a:r>
+            <a:endParaRPr lang="en-US" sz="1300" dirty="0"/>
+          </a:p>
+        </p:txBody>
+      </p:sp>
+      <p:sp>
+        <p:nvSpPr>
+          <p:cNvPr id="16" name="Text 14"/>
+          <p:cNvSpPr/>
+          <p:nvPr/>
+        </p:nvSpPr>
+        <p:spPr>
+          <a:xfrm>
+            <a:off x="406301" y="4434929"/>
+            <a:ext cx="8498026" cy="213271"/>
+          </a:xfrm>
+          <a:prstGeom prst="rect">
+            <a:avLst/>
+          </a:prstGeom>
+          <a:noFill/>
+          <a:ln/>
+        </p:spPr>
+        <p:txBody>
+          <a:bodyPr wrap="square" lIns="0" tIns="0" rIns="0" bIns="0" rtlCol="0" anchor="t"/>
+          <a:lstStyle/>
+          <a:p>
+            <a:pPr algn="l" indent="0" marL="0">
+              <a:lnSpc>
                 <a:spcPts val="1680"/>
               </a:lnSpc>
               <a:spcBef>
@@ -4159,19 +5010,152 @@
                 <a:ea typeface="Arial" pitchFamily="34" charset="-122"/>
                 <a:cs typeface="Arial" pitchFamily="34" charset="-120"/>
               </a:rPr>
-              <a:t>– Patañjali's Yoga Sūtras 1.2 — referenced in cached chunk; preserved as a known traditional source (not from RAG, but standard). – Bhagavad-gītā 2.50 — </a:t>
-            </a:r>
-            <a:pPr algn="l" indent="0" marL="0">
-              <a:lnSpc>
-                <a:spcPts val="1680"/>
+              <a:t>Middle ·  · IKS Curriculum</a:t>
+            </a:r>
+            <a:endParaRPr lang="en-US" sz="1200" dirty="0"/>
+          </a:p>
+        </p:txBody>
+      </p:sp>
+    </p:spTree>
+  </p:cSld>
+  <p:clrMapOvr>
+    <a:masterClrMapping/>
+  </p:clrMapOvr>
+</p:sld>
+</file>
+
+<file path=ppt/slides/slide15.xml><?xml version="1.0" encoding="utf-8"?>
+<p:sld xmlns:a="http://schemas.openxmlformats.org/drawingml/2006/main" xmlns:r="http://schemas.openxmlformats.org/officeDocument/2006/relationships" xmlns:p="http://schemas.openxmlformats.org/presentationml/2006/main">
+  <p:cSld name="Slide 15">
+    <p:bg>
+      <p:bgPr>
+        <a:solidFill>
+          <a:srgbClr val="FFFFFF"/>
+        </a:solidFill>
+      </p:bgPr>
+    </p:bg>
+    <p:spTree>
+      <p:nvGrpSpPr>
+        <p:cNvPr id="1" name=""/>
+        <p:cNvGrpSpPr/>
+        <p:nvPr/>
+      </p:nvGrpSpPr>
+      <p:grpSpPr>
+        <a:xfrm>
+          <a:off x="0" y="0"/>
+          <a:ext cx="0" cy="0"/>
+          <a:chOff x="0" y="0"/>
+          <a:chExt cx="0" cy="0"/>
+        </a:xfrm>
+      </p:grpSpPr>
+      <p:sp>
+        <p:nvSpPr>
+          <p:cNvPr id="2" name="Text 0"/>
+          <p:cNvSpPr/>
+          <p:nvPr/>
+        </p:nvSpPr>
+        <p:spPr>
+          <a:xfrm>
+            <a:off x="0" y="0"/>
+            <a:ext cx="9144000" cy="101501"/>
+          </a:xfrm>
+          <a:prstGeom prst="rect">
+            <a:avLst/>
+          </a:prstGeom>
+          <a:solidFill>
+            <a:srgbClr val="277884"/>
+          </a:solidFill>
+          <a:ln/>
+        </p:spPr>
+        <p:txBody>
+          <a:bodyPr wrap="square" rtlCol="0" anchor="ctr"/>
+          <a:lstStyle/>
+          <a:p>
+            <a:pPr indent="0" marL="0">
+              <a:buNone/>
+            </a:pPr>
+            <a:endParaRPr lang="en-US" dirty="0"/>
+          </a:p>
+        </p:txBody>
+      </p:sp>
+      <p:sp>
+        <p:nvSpPr>
+          <p:cNvPr id="3" name="Text 1"/>
+          <p:cNvSpPr/>
+          <p:nvPr/>
+        </p:nvSpPr>
+        <p:spPr>
+          <a:xfrm>
+            <a:off x="406301" y="457051"/>
+            <a:ext cx="8498026" cy="274290"/>
+          </a:xfrm>
+          <a:prstGeom prst="rect">
+            <a:avLst/>
+          </a:prstGeom>
+          <a:noFill/>
+          <a:ln/>
+        </p:spPr>
+        <p:txBody>
+          <a:bodyPr wrap="square" lIns="0" tIns="0" rIns="0" bIns="0" rtlCol="0" anchor="t"/>
+          <a:lstStyle/>
+          <a:p>
+            <a:pPr algn="l" indent="0" marL="0">
+              <a:lnSpc>
+                <a:spcPts val="2160"/>
               </a:lnSpc>
               <a:spcBef>
-                <a:spcPts val="300"/>
+                <a:spcPts val="600"/>
               </a:spcBef>
               <a:spcAft>
-                <a:spcPts val="300"/>
-              </a:spcAft>
-              <a:buNone/>
+                <a:spcPts val="800"/>
+              </a:spcAft>
+              <a:buNone/>
+            </a:pPr>
+            <a:r>
+              <a:rPr lang="en-US" sz="1800" b="1" dirty="0">
+                <a:solidFill>
+                  <a:srgbClr val="FE4447"/>
+                </a:solidFill>
+                <a:latin typeface="Georgia" pitchFamily="34" charset="0"/>
+                <a:ea typeface="Georgia" pitchFamily="34" charset="-122"/>
+                <a:cs typeface="Georgia" pitchFamily="34" charset="-120"/>
+              </a:rPr>
+              <a:t>Homework</a:t>
+            </a:r>
+            <a:endParaRPr lang="en-US" sz="1800" dirty="0"/>
+          </a:p>
+        </p:txBody>
+      </p:sp>
+      <p:sp>
+        <p:nvSpPr>
+          <p:cNvPr id="4" name="Text 2"/>
+          <p:cNvSpPr/>
+          <p:nvPr/>
+        </p:nvSpPr>
+        <p:spPr>
+          <a:xfrm>
+            <a:off x="634901" y="883593"/>
+            <a:ext cx="8102798" cy="525661"/>
+          </a:xfrm>
+          <a:prstGeom prst="rect">
+            <a:avLst/>
+          </a:prstGeom>
+          <a:noFill/>
+          <a:ln/>
+        </p:spPr>
+        <p:txBody>
+          <a:bodyPr wrap="square" lIns="0" tIns="0" rIns="0" bIns="0" rtlCol="0" anchor="t"/>
+          <a:lstStyle/>
+          <a:p>
+            <a:pPr algn="l" marL="342900" indent="-342900">
+              <a:lnSpc>
+                <a:spcPts val="1620"/>
+              </a:lnSpc>
+              <a:spcAft>
+                <a:spcPts val="300"/>
+              </a:spcAft>
+              <a:buSzPct val="100000"/>
+              <a:buChar char="•"/>
             </a:pPr>
             <a:r>
               <a:rPr lang="en-US" sz="1200" dirty="0">
@@ -4182,15 +5166,32 @@
                 <a:ea typeface="Arial" pitchFamily="34" charset="-122"/>
                 <a:cs typeface="Arial" pitchFamily="34" charset="-120"/>
               </a:rPr>
-              <a:t>day-01-hook.json</a:t>
-            </a:r>
-            <a:pPr algn="l" indent="0" marL="0">
-              <a:lnSpc>
-                <a:spcPts val="1680"/>
-              </a:lnSpc>
-              <a:spcBef>
-                <a:spcPts val="300"/>
-              </a:spcBef>
+              <a:t>Practice </a:t>
+            </a:r>
+            <a:pPr algn="l" indent="0" marL="0">
+              <a:lnSpc>
+                <a:spcPts val="1620"/>
+              </a:lnSpc>
+              <a:spcAft>
+                <a:spcPts val="300"/>
+              </a:spcAft>
+              <a:buNone/>
+            </a:pPr>
+            <a:r>
+              <a:rPr lang="en-US" sz="1200" i="1" dirty="0">
+                <a:solidFill>
+                  <a:srgbClr val="1C2833"/>
+                </a:solidFill>
+                <a:latin typeface="Arial" pitchFamily="34" charset="0"/>
+                <a:ea typeface="Arial" pitchFamily="34" charset="-122"/>
+                <a:cs typeface="Arial" pitchFamily="34" charset="-120"/>
+              </a:rPr>
+              <a:t>tāḍāsana</a:t>
+            </a:r>
+            <a:pPr algn="l" indent="0" marL="0">
+              <a:lnSpc>
+                <a:spcPts val="1620"/>
+              </a:lnSpc>
               <a:spcAft>
                 <a:spcPts val="300"/>
               </a:spcAft>
@@ -4205,7 +5206,31 @@
                 <a:ea typeface="Arial" pitchFamily="34" charset="-122"/>
                 <a:cs typeface="Arial" pitchFamily="34" charset="-120"/>
               </a:rPr>
-              <a:t> chunks reference BG repeatedly.</a:t>
+              <a:t> for 60 seconds tomorrow morning before brushing your teeth. Notice how your body feels.</a:t>
+            </a:r>
+            <a:endParaRPr lang="en-US" sz="1200" dirty="0"/>
+          </a:p>
+          <a:p>
+            <a:pPr algn="l" marL="342900" indent="-342900">
+              <a:lnSpc>
+                <a:spcPts val="1620"/>
+              </a:lnSpc>
+              <a:spcAft>
+                <a:spcPts val="300"/>
+              </a:spcAft>
+              <a:buSzPct val="100000"/>
+              <a:buChar char="•"/>
+            </a:pPr>
+            <a:r>
+              <a:rPr lang="en-US" sz="1200" dirty="0">
+                <a:solidFill>
+                  <a:srgbClr val="1C2833"/>
+                </a:solidFill>
+                <a:latin typeface="Arial" pitchFamily="34" charset="0"/>
+                <a:ea typeface="Arial" pitchFamily="34" charset="-122"/>
+                <a:cs typeface="Arial" pitchFamily="34" charset="-120"/>
+              </a:rPr>
+              <a:t>Bring comfortable clothing tomorrow.</a:t>
             </a:r>
             <a:endParaRPr lang="en-US" sz="1200" dirty="0"/>
           </a:p>
@@ -4219,8 +5244,8 @@
         </p:nvSpPr>
         <p:spPr>
           <a:xfrm>
-            <a:off x="634901" y="1395859"/>
-            <a:ext cx="8102798" cy="300930"/>
+            <a:off x="406301" y="4434929"/>
+            <a:ext cx="8498026" cy="213271"/>
           </a:xfrm>
           <a:prstGeom prst="rect">
             <a:avLst/>
@@ -4232,6 +5257,164 @@
           <a:bodyPr wrap="square" lIns="0" tIns="0" rIns="0" bIns="0" rtlCol="0" anchor="t"/>
           <a:lstStyle/>
           <a:p>
+            <a:pPr algn="l" indent="0" marL="0">
+              <a:lnSpc>
+                <a:spcPts val="1680"/>
+              </a:lnSpc>
+              <a:spcBef>
+                <a:spcPts val="300"/>
+              </a:spcBef>
+              <a:spcAft>
+                <a:spcPts val="300"/>
+              </a:spcAft>
+              <a:buNone/>
+            </a:pPr>
+            <a:r>
+              <a:rPr lang="en-US" sz="1200" dirty="0">
+                <a:solidFill>
+                  <a:srgbClr val="1C2833"/>
+                </a:solidFill>
+                <a:latin typeface="Arial" pitchFamily="34" charset="0"/>
+                <a:ea typeface="Arial" pitchFamily="34" charset="-122"/>
+                <a:cs typeface="Arial" pitchFamily="34" charset="-120"/>
+              </a:rPr>
+              <a:t>Middle ·  · IKS Curriculum</a:t>
+            </a:r>
+            <a:endParaRPr lang="en-US" sz="1200" dirty="0"/>
+          </a:p>
+        </p:txBody>
+      </p:sp>
+    </p:spTree>
+  </p:cSld>
+  <p:clrMapOvr>
+    <a:masterClrMapping/>
+  </p:clrMapOvr>
+</p:sld>
+</file>
+
+<file path=ppt/slides/slide16.xml><?xml version="1.0" encoding="utf-8"?>
+<p:sld xmlns:a="http://schemas.openxmlformats.org/drawingml/2006/main" xmlns:r="http://schemas.openxmlformats.org/officeDocument/2006/relationships" xmlns:p="http://schemas.openxmlformats.org/presentationml/2006/main">
+  <p:cSld name="Slide 16">
+    <p:bg>
+      <p:bgPr>
+        <a:solidFill>
+          <a:srgbClr val="FFFFFF"/>
+        </a:solidFill>
+      </p:bgPr>
+    </p:bg>
+    <p:spTree>
+      <p:nvGrpSpPr>
+        <p:cNvPr id="1" name=""/>
+        <p:cNvGrpSpPr/>
+        <p:nvPr/>
+      </p:nvGrpSpPr>
+      <p:grpSpPr>
+        <a:xfrm>
+          <a:off x="0" y="0"/>
+          <a:ext cx="0" cy="0"/>
+          <a:chOff x="0" y="0"/>
+          <a:chExt cx="0" cy="0"/>
+        </a:xfrm>
+      </p:grpSpPr>
+      <p:sp>
+        <p:nvSpPr>
+          <p:cNvPr id="2" name="Text 0"/>
+          <p:cNvSpPr/>
+          <p:nvPr/>
+        </p:nvSpPr>
+        <p:spPr>
+          <a:xfrm>
+            <a:off x="0" y="0"/>
+            <a:ext cx="9144000" cy="101501"/>
+          </a:xfrm>
+          <a:prstGeom prst="rect">
+            <a:avLst/>
+          </a:prstGeom>
+          <a:solidFill>
+            <a:srgbClr val="277884"/>
+          </a:solidFill>
+          <a:ln/>
+        </p:spPr>
+        <p:txBody>
+          <a:bodyPr wrap="square" rtlCol="0" anchor="ctr"/>
+          <a:lstStyle/>
+          <a:p>
+            <a:pPr indent="0" marL="0">
+              <a:buNone/>
+            </a:pPr>
+            <a:endParaRPr lang="en-US" dirty="0"/>
+          </a:p>
+        </p:txBody>
+      </p:sp>
+      <p:sp>
+        <p:nvSpPr>
+          <p:cNvPr id="3" name="Text 1"/>
+          <p:cNvSpPr/>
+          <p:nvPr/>
+        </p:nvSpPr>
+        <p:spPr>
+          <a:xfrm>
+            <a:off x="406301" y="457051"/>
+            <a:ext cx="8498026" cy="274290"/>
+          </a:xfrm>
+          <a:prstGeom prst="rect">
+            <a:avLst/>
+          </a:prstGeom>
+          <a:noFill/>
+          <a:ln/>
+        </p:spPr>
+        <p:txBody>
+          <a:bodyPr wrap="square" lIns="0" tIns="0" rIns="0" bIns="0" rtlCol="0" anchor="t"/>
+          <a:lstStyle/>
+          <a:p>
+            <a:pPr algn="l" indent="0" marL="0">
+              <a:lnSpc>
+                <a:spcPts val="2160"/>
+              </a:lnSpc>
+              <a:spcBef>
+                <a:spcPts val="600"/>
+              </a:spcBef>
+              <a:spcAft>
+                <a:spcPts val="800"/>
+              </a:spcAft>
+              <a:buNone/>
+            </a:pPr>
+            <a:r>
+              <a:rPr lang="en-US" sz="1800" b="1" dirty="0">
+                <a:solidFill>
+                  <a:srgbClr val="FE4447"/>
+                </a:solidFill>
+                <a:latin typeface="Georgia" pitchFamily="34" charset="0"/>
+                <a:ea typeface="Georgia" pitchFamily="34" charset="-122"/>
+                <a:cs typeface="Georgia" pitchFamily="34" charset="-120"/>
+              </a:rPr>
+              <a:t>Differentiation</a:t>
+            </a:r>
+            <a:endParaRPr lang="en-US" sz="1800" dirty="0"/>
+          </a:p>
+        </p:txBody>
+      </p:sp>
+      <p:sp>
+        <p:nvSpPr>
+          <p:cNvPr id="4" name="Text 2"/>
+          <p:cNvSpPr/>
+          <p:nvPr/>
+        </p:nvSpPr>
+        <p:spPr>
+          <a:xfrm>
+            <a:off x="634901" y="883593"/>
+            <a:ext cx="8102798" cy="525661"/>
+          </a:xfrm>
+          <a:prstGeom prst="rect">
+            <a:avLst/>
+          </a:prstGeom>
+          <a:noFill/>
+          <a:ln/>
+        </p:spPr>
+        <p:txBody>
+          <a:bodyPr wrap="square" lIns="0" tIns="0" rIns="0" bIns="0" rtlCol="0" anchor="t"/>
+          <a:lstStyle/>
+          <a:p>
             <a:pPr algn="l" marL="342900" indent="-342900">
               <a:lnSpc>
                 <a:spcPts val="1620"/>
@@ -4243,6 +5426,26 @@
               <a:buChar char="•"/>
             </a:pPr>
             <a:r>
+              <a:rPr lang="en-US" sz="1200" b="1" dirty="0">
+                <a:solidFill>
+                  <a:srgbClr val="1C2833"/>
+                </a:solidFill>
+                <a:latin typeface="Arial" pitchFamily="34" charset="0"/>
+                <a:ea typeface="Arial" pitchFamily="34" charset="-122"/>
+                <a:cs typeface="Arial" pitchFamily="34" charset="-120"/>
+              </a:rPr>
+              <a:t>Tier up:</a:t>
+            </a:r>
+            <a:pPr algn="l" indent="0" marL="0">
+              <a:lnSpc>
+                <a:spcPts val="1620"/>
+              </a:lnSpc>
+              <a:spcAft>
+                <a:spcPts val="300"/>
+              </a:spcAft>
+              <a:buNone/>
+            </a:pPr>
+            <a:r>
               <a:rPr lang="en-US" sz="1200" dirty="0">
                 <a:solidFill>
                   <a:srgbClr val="1C2833"/>
@@ -4251,6 +5454,594 @@
                 <a:ea typeface="Arial" pitchFamily="34" charset="-122"/>
                 <a:cs typeface="Arial" pitchFamily="34" charset="-120"/>
               </a:rPr>
+              <a:t> Hold tāḍāsana for 90 sec; count your breaths during the hold.</a:t>
+            </a:r>
+            <a:endParaRPr lang="en-US" sz="1200" dirty="0"/>
+          </a:p>
+          <a:p>
+            <a:pPr algn="l" marL="342900" indent="-342900">
+              <a:lnSpc>
+                <a:spcPts val="1620"/>
+              </a:lnSpc>
+              <a:spcAft>
+                <a:spcPts val="300"/>
+              </a:spcAft>
+              <a:buSzPct val="100000"/>
+              <a:buChar char="•"/>
+            </a:pPr>
+            <a:r>
+              <a:rPr lang="en-US" sz="1200" b="1" dirty="0">
+                <a:solidFill>
+                  <a:srgbClr val="1C2833"/>
+                </a:solidFill>
+                <a:latin typeface="Arial" pitchFamily="34" charset="0"/>
+                <a:ea typeface="Arial" pitchFamily="34" charset="-122"/>
+                <a:cs typeface="Arial" pitchFamily="34" charset="-120"/>
+              </a:rPr>
+              <a:t>Tier down:</a:t>
+            </a:r>
+            <a:pPr algn="l" indent="0" marL="0">
+              <a:lnSpc>
+                <a:spcPts val="1620"/>
+              </a:lnSpc>
+              <a:spcAft>
+                <a:spcPts val="300"/>
+              </a:spcAft>
+              <a:buNone/>
+            </a:pPr>
+            <a:r>
+              <a:rPr lang="en-US" sz="1200" dirty="0">
+                <a:solidFill>
+                  <a:srgbClr val="1C2833"/>
+                </a:solidFill>
+                <a:latin typeface="Arial" pitchFamily="34" charset="0"/>
+                <a:ea typeface="Arial" pitchFamily="34" charset="-122"/>
+                <a:cs typeface="Arial" pitchFamily="34" charset="-120"/>
+              </a:rPr>
+              <a:t> Hold for 15 sec if 30 feels long; rest in between.</a:t>
+            </a:r>
+            <a:endParaRPr lang="en-US" sz="1200" dirty="0"/>
+          </a:p>
+        </p:txBody>
+      </p:sp>
+      <p:sp>
+        <p:nvSpPr>
+          <p:cNvPr id="5" name="Text 3"/>
+          <p:cNvSpPr/>
+          <p:nvPr/>
+        </p:nvSpPr>
+        <p:spPr>
+          <a:xfrm>
+            <a:off x="406301" y="4434929"/>
+            <a:ext cx="8498026" cy="213271"/>
+          </a:xfrm>
+          <a:prstGeom prst="rect">
+            <a:avLst/>
+          </a:prstGeom>
+          <a:noFill/>
+          <a:ln/>
+        </p:spPr>
+        <p:txBody>
+          <a:bodyPr wrap="square" lIns="0" tIns="0" rIns="0" bIns="0" rtlCol="0" anchor="t"/>
+          <a:lstStyle/>
+          <a:p>
+            <a:pPr algn="l" indent="0" marL="0">
+              <a:lnSpc>
+                <a:spcPts val="1680"/>
+              </a:lnSpc>
+              <a:spcBef>
+                <a:spcPts val="300"/>
+              </a:spcBef>
+              <a:spcAft>
+                <a:spcPts val="300"/>
+              </a:spcAft>
+              <a:buNone/>
+            </a:pPr>
+            <a:r>
+              <a:rPr lang="en-US" sz="1200" dirty="0">
+                <a:solidFill>
+                  <a:srgbClr val="1C2833"/>
+                </a:solidFill>
+                <a:latin typeface="Arial" pitchFamily="34" charset="0"/>
+                <a:ea typeface="Arial" pitchFamily="34" charset="-122"/>
+                <a:cs typeface="Arial" pitchFamily="34" charset="-120"/>
+              </a:rPr>
+              <a:t>Middle ·  · IKS Curriculum</a:t>
+            </a:r>
+            <a:endParaRPr lang="en-US" sz="1200" dirty="0"/>
+          </a:p>
+        </p:txBody>
+      </p:sp>
+    </p:spTree>
+  </p:cSld>
+  <p:clrMapOvr>
+    <a:masterClrMapping/>
+  </p:clrMapOvr>
+</p:sld>
+</file>
+
+<file path=ppt/slides/slide17.xml><?xml version="1.0" encoding="utf-8"?>
+<p:sld xmlns:a="http://schemas.openxmlformats.org/drawingml/2006/main" xmlns:r="http://schemas.openxmlformats.org/officeDocument/2006/relationships" xmlns:p="http://schemas.openxmlformats.org/presentationml/2006/main">
+  <p:cSld name="Slide 17">
+    <p:bg>
+      <p:bgPr>
+        <a:solidFill>
+          <a:srgbClr val="FFFFFF"/>
+        </a:solidFill>
+      </p:bgPr>
+    </p:bg>
+    <p:spTree>
+      <p:nvGrpSpPr>
+        <p:cNvPr id="1" name=""/>
+        <p:cNvGrpSpPr/>
+        <p:nvPr/>
+      </p:nvGrpSpPr>
+      <p:grpSpPr>
+        <a:xfrm>
+          <a:off x="0" y="0"/>
+          <a:ext cx="0" cy="0"/>
+          <a:chOff x="0" y="0"/>
+          <a:chExt cx="0" cy="0"/>
+        </a:xfrm>
+      </p:grpSpPr>
+      <p:sp>
+        <p:nvSpPr>
+          <p:cNvPr id="2" name="Text 0"/>
+          <p:cNvSpPr/>
+          <p:nvPr/>
+        </p:nvSpPr>
+        <p:spPr>
+          <a:xfrm>
+            <a:off x="0" y="0"/>
+            <a:ext cx="9144000" cy="101501"/>
+          </a:xfrm>
+          <a:prstGeom prst="rect">
+            <a:avLst/>
+          </a:prstGeom>
+          <a:solidFill>
+            <a:srgbClr val="277884"/>
+          </a:solidFill>
+          <a:ln/>
+        </p:spPr>
+        <p:txBody>
+          <a:bodyPr wrap="square" rtlCol="0" anchor="ctr"/>
+          <a:lstStyle/>
+          <a:p>
+            <a:pPr indent="0" marL="0">
+              <a:buNone/>
+            </a:pPr>
+            <a:endParaRPr lang="en-US" dirty="0"/>
+          </a:p>
+        </p:txBody>
+      </p:sp>
+      <p:sp>
+        <p:nvSpPr>
+          <p:cNvPr id="3" name="Text 1"/>
+          <p:cNvSpPr/>
+          <p:nvPr/>
+        </p:nvSpPr>
+        <p:spPr>
+          <a:xfrm>
+            <a:off x="406301" y="457051"/>
+            <a:ext cx="8498026" cy="274290"/>
+          </a:xfrm>
+          <a:prstGeom prst="rect">
+            <a:avLst/>
+          </a:prstGeom>
+          <a:noFill/>
+          <a:ln/>
+        </p:spPr>
+        <p:txBody>
+          <a:bodyPr wrap="square" lIns="0" tIns="0" rIns="0" bIns="0" rtlCol="0" anchor="t"/>
+          <a:lstStyle/>
+          <a:p>
+            <a:pPr algn="l" indent="0" marL="0">
+              <a:lnSpc>
+                <a:spcPts val="2160"/>
+              </a:lnSpc>
+              <a:spcBef>
+                <a:spcPts val="600"/>
+              </a:spcBef>
+              <a:spcAft>
+                <a:spcPts val="800"/>
+              </a:spcAft>
+              <a:buNone/>
+            </a:pPr>
+            <a:r>
+              <a:rPr lang="en-US" sz="1800" b="1" dirty="0">
+                <a:solidFill>
+                  <a:srgbClr val="FE4447"/>
+                </a:solidFill>
+                <a:latin typeface="Georgia" pitchFamily="34" charset="0"/>
+                <a:ea typeface="Georgia" pitchFamily="34" charset="-122"/>
+                <a:cs typeface="Georgia" pitchFamily="34" charset="-120"/>
+              </a:rPr>
+              <a:t>Teacher notes</a:t>
+            </a:r>
+            <a:endParaRPr lang="en-US" sz="1800" dirty="0"/>
+          </a:p>
+        </p:txBody>
+      </p:sp>
+      <p:sp>
+        <p:nvSpPr>
+          <p:cNvPr id="4" name="Text 2"/>
+          <p:cNvSpPr/>
+          <p:nvPr/>
+        </p:nvSpPr>
+        <p:spPr>
+          <a:xfrm>
+            <a:off x="634901" y="883593"/>
+            <a:ext cx="8102798" cy="1180802"/>
+          </a:xfrm>
+          <a:prstGeom prst="rect">
+            <a:avLst/>
+          </a:prstGeom>
+          <a:noFill/>
+          <a:ln/>
+        </p:spPr>
+        <p:txBody>
+          <a:bodyPr wrap="square" lIns="0" tIns="0" rIns="0" bIns="0" rtlCol="0" anchor="t"/>
+          <a:lstStyle/>
+          <a:p>
+            <a:pPr algn="l" marL="342900" indent="-342900">
+              <a:lnSpc>
+                <a:spcPts val="1620"/>
+              </a:lnSpc>
+              <a:spcAft>
+                <a:spcPts val="300"/>
+              </a:spcAft>
+              <a:buSzPct val="100000"/>
+              <a:buChar char="•"/>
+            </a:pPr>
+            <a:r>
+              <a:rPr lang="en-US" sz="1200" dirty="0">
+                <a:solidFill>
+                  <a:srgbClr val="1C2833"/>
+                </a:solidFill>
+                <a:latin typeface="Arial" pitchFamily="34" charset="0"/>
+                <a:ea typeface="Arial" pitchFamily="34" charset="-122"/>
+                <a:cs typeface="Arial" pitchFamily="34" charset="-120"/>
+              </a:rPr>
+              <a:t>This is the most important "framing" day of the module. Students who learn the two definitions can hold the philosophical frame for the rest of the module.</a:t>
+            </a:r>
+            <a:endParaRPr lang="en-US" sz="1200" dirty="0"/>
+          </a:p>
+          <a:p>
+            <a:pPr algn="l" marL="342900" indent="-342900">
+              <a:lnSpc>
+                <a:spcPts val="1620"/>
+              </a:lnSpc>
+              <a:spcAft>
+                <a:spcPts val="300"/>
+              </a:spcAft>
+              <a:buSzPct val="100000"/>
+              <a:buChar char="•"/>
+            </a:pPr>
+            <a:r>
+              <a:rPr lang="en-US" sz="1200" dirty="0">
+                <a:solidFill>
+                  <a:srgbClr val="1C2833"/>
+                </a:solidFill>
+                <a:latin typeface="Arial" pitchFamily="34" charset="0"/>
+                <a:ea typeface="Arial" pitchFamily="34" charset="-122"/>
+                <a:cs typeface="Arial" pitchFamily="34" charset="-120"/>
+              </a:rPr>
+              <a:t>Some students will resist closing their eyes during settle. Don't force it — "eyes lowered to the mat" is acceptable.</a:t>
+            </a:r>
+            <a:endParaRPr lang="en-US" sz="1200" dirty="0"/>
+          </a:p>
+          <a:p>
+            <a:pPr algn="l" marL="342900" indent="-342900">
+              <a:lnSpc>
+                <a:spcPts val="1620"/>
+              </a:lnSpc>
+              <a:spcAft>
+                <a:spcPts val="300"/>
+              </a:spcAft>
+              <a:buSzPct val="100000"/>
+              <a:buChar char="•"/>
+            </a:pPr>
+            <a:r>
+              <a:rPr lang="en-US" sz="1200" dirty="0">
+                <a:solidFill>
+                  <a:srgbClr val="1C2833"/>
+                </a:solidFill>
+                <a:latin typeface="Arial" pitchFamily="34" charset="0"/>
+                <a:ea typeface="Arial" pitchFamily="34" charset="-122"/>
+                <a:cs typeface="Arial" pitchFamily="34" charset="-120"/>
+              </a:rPr>
+              <a:t>Watch for students who hyperextend knees during tāḍāsana — common in young dancers. Cue "soft knees, lift knee caps."</a:t>
+            </a:r>
+            <a:endParaRPr lang="en-US" sz="1200" dirty="0"/>
+          </a:p>
+        </p:txBody>
+      </p:sp>
+      <p:sp>
+        <p:nvSpPr>
+          <p:cNvPr id="5" name="Text 3"/>
+          <p:cNvSpPr/>
+          <p:nvPr/>
+        </p:nvSpPr>
+        <p:spPr>
+          <a:xfrm>
+            <a:off x="406301" y="4434929"/>
+            <a:ext cx="8498026" cy="213271"/>
+          </a:xfrm>
+          <a:prstGeom prst="rect">
+            <a:avLst/>
+          </a:prstGeom>
+          <a:noFill/>
+          <a:ln/>
+        </p:spPr>
+        <p:txBody>
+          <a:bodyPr wrap="square" lIns="0" tIns="0" rIns="0" bIns="0" rtlCol="0" anchor="t"/>
+          <a:lstStyle/>
+          <a:p>
+            <a:pPr algn="l" indent="0" marL="0">
+              <a:lnSpc>
+                <a:spcPts val="1680"/>
+              </a:lnSpc>
+              <a:spcBef>
+                <a:spcPts val="300"/>
+              </a:spcBef>
+              <a:spcAft>
+                <a:spcPts val="300"/>
+              </a:spcAft>
+              <a:buNone/>
+            </a:pPr>
+            <a:r>
+              <a:rPr lang="en-US" sz="1200" dirty="0">
+                <a:solidFill>
+                  <a:srgbClr val="1C2833"/>
+                </a:solidFill>
+                <a:latin typeface="Arial" pitchFamily="34" charset="0"/>
+                <a:ea typeface="Arial" pitchFamily="34" charset="-122"/>
+                <a:cs typeface="Arial" pitchFamily="34" charset="-120"/>
+              </a:rPr>
+              <a:t>Middle ·  · IKS Curriculum</a:t>
+            </a:r>
+            <a:endParaRPr lang="en-US" sz="1200" dirty="0"/>
+          </a:p>
+        </p:txBody>
+      </p:sp>
+    </p:spTree>
+  </p:cSld>
+  <p:clrMapOvr>
+    <a:masterClrMapping/>
+  </p:clrMapOvr>
+</p:sld>
+</file>
+
+<file path=ppt/slides/slide18.xml><?xml version="1.0" encoding="utf-8"?>
+<p:sld xmlns:a="http://schemas.openxmlformats.org/drawingml/2006/main" xmlns:r="http://schemas.openxmlformats.org/officeDocument/2006/relationships" xmlns:p="http://schemas.openxmlformats.org/presentationml/2006/main">
+  <p:cSld name="Slide 18">
+    <p:bg>
+      <p:bgPr>
+        <a:solidFill>
+          <a:srgbClr val="FFFFFF"/>
+        </a:solidFill>
+      </p:bgPr>
+    </p:bg>
+    <p:spTree>
+      <p:nvGrpSpPr>
+        <p:cNvPr id="1" name=""/>
+        <p:cNvGrpSpPr/>
+        <p:nvPr/>
+      </p:nvGrpSpPr>
+      <p:grpSpPr>
+        <a:xfrm>
+          <a:off x="0" y="0"/>
+          <a:ext cx="0" cy="0"/>
+          <a:chOff x="0" y="0"/>
+          <a:chExt cx="0" cy="0"/>
+        </a:xfrm>
+      </p:grpSpPr>
+      <p:sp>
+        <p:nvSpPr>
+          <p:cNvPr id="2" name="Text 0"/>
+          <p:cNvSpPr/>
+          <p:nvPr/>
+        </p:nvSpPr>
+        <p:spPr>
+          <a:xfrm>
+            <a:off x="0" y="0"/>
+            <a:ext cx="9144000" cy="101501"/>
+          </a:xfrm>
+          <a:prstGeom prst="rect">
+            <a:avLst/>
+          </a:prstGeom>
+          <a:solidFill>
+            <a:srgbClr val="277884"/>
+          </a:solidFill>
+          <a:ln/>
+        </p:spPr>
+        <p:txBody>
+          <a:bodyPr wrap="square" rtlCol="0" anchor="ctr"/>
+          <a:lstStyle/>
+          <a:p>
+            <a:pPr indent="0" marL="0">
+              <a:buNone/>
+            </a:pPr>
+            <a:endParaRPr lang="en-US" dirty="0"/>
+          </a:p>
+        </p:txBody>
+      </p:sp>
+      <p:sp>
+        <p:nvSpPr>
+          <p:cNvPr id="3" name="Text 1"/>
+          <p:cNvSpPr/>
+          <p:nvPr/>
+        </p:nvSpPr>
+        <p:spPr>
+          <a:xfrm>
+            <a:off x="406301" y="457051"/>
+            <a:ext cx="8498026" cy="274290"/>
+          </a:xfrm>
+          <a:prstGeom prst="rect">
+            <a:avLst/>
+          </a:prstGeom>
+          <a:noFill/>
+          <a:ln/>
+        </p:spPr>
+        <p:txBody>
+          <a:bodyPr wrap="square" lIns="0" tIns="0" rIns="0" bIns="0" rtlCol="0" anchor="t"/>
+          <a:lstStyle/>
+          <a:p>
+            <a:pPr algn="l" indent="0" marL="0">
+              <a:lnSpc>
+                <a:spcPts val="2160"/>
+              </a:lnSpc>
+              <a:spcBef>
+                <a:spcPts val="600"/>
+              </a:spcBef>
+              <a:spcAft>
+                <a:spcPts val="800"/>
+              </a:spcAft>
+              <a:buNone/>
+            </a:pPr>
+            <a:r>
+              <a:rPr lang="en-US" sz="1800" b="1" dirty="0">
+                <a:solidFill>
+                  <a:srgbClr val="FE4447"/>
+                </a:solidFill>
+                <a:latin typeface="Georgia" pitchFamily="34" charset="0"/>
+                <a:ea typeface="Georgia" pitchFamily="34" charset="-122"/>
+                <a:cs typeface="Georgia" pitchFamily="34" charset="-120"/>
+              </a:rPr>
+              <a:t>Citation(s) used in this lesson</a:t>
+            </a:r>
+            <a:endParaRPr lang="en-US" sz="1800" dirty="0"/>
+          </a:p>
+        </p:txBody>
+      </p:sp>
+      <p:sp>
+        <p:nvSpPr>
+          <p:cNvPr id="4" name="Text 2"/>
+          <p:cNvSpPr/>
+          <p:nvPr/>
+        </p:nvSpPr>
+        <p:spPr>
+          <a:xfrm>
+            <a:off x="634901" y="883593"/>
+            <a:ext cx="8102798" cy="1013222"/>
+          </a:xfrm>
+          <a:prstGeom prst="rect">
+            <a:avLst/>
+          </a:prstGeom>
+          <a:noFill/>
+          <a:ln/>
+        </p:spPr>
+        <p:txBody>
+          <a:bodyPr wrap="square" lIns="0" tIns="0" rIns="0" bIns="0" rtlCol="0" anchor="t"/>
+          <a:lstStyle/>
+          <a:p>
+            <a:pPr algn="l" marL="342900" indent="-342900">
+              <a:lnSpc>
+                <a:spcPts val="1620"/>
+              </a:lnSpc>
+              <a:spcAft>
+                <a:spcPts val="300"/>
+              </a:spcAft>
+              <a:buSzPct val="100000"/>
+              <a:buChar char="•"/>
+            </a:pPr>
+            <a:r>
+              <a:rPr lang="en-US" sz="1200" dirty="0">
+                <a:solidFill>
+                  <a:srgbClr val="1C2833"/>
+                </a:solidFill>
+                <a:latin typeface="Arial" pitchFamily="34" charset="0"/>
+                <a:ea typeface="Arial" pitchFamily="34" charset="-122"/>
+                <a:cs typeface="Arial" pitchFamily="34" charset="-120"/>
+              </a:rPr>
+              <a:t>Patañjali's Yoga Sūtras 1.2 — referenced in cached chunk; preserved as a known traditional source (not from RAG, but standard).</a:t>
+            </a:r>
+            <a:endParaRPr lang="en-US" sz="1200" dirty="0"/>
+          </a:p>
+          <a:p>
+            <a:pPr algn="l" marL="342900" indent="-342900">
+              <a:lnSpc>
+                <a:spcPts val="1620"/>
+              </a:lnSpc>
+              <a:spcAft>
+                <a:spcPts val="300"/>
+              </a:spcAft>
+              <a:buSzPct val="100000"/>
+              <a:buChar char="•"/>
+            </a:pPr>
+            <a:r>
+              <a:rPr lang="en-US" sz="1200" dirty="0">
+                <a:solidFill>
+                  <a:srgbClr val="1C2833"/>
+                </a:solidFill>
+                <a:latin typeface="Arial" pitchFamily="34" charset="0"/>
+                <a:ea typeface="Arial" pitchFamily="34" charset="-122"/>
+                <a:cs typeface="Arial" pitchFamily="34" charset="-120"/>
+              </a:rPr>
+              <a:t>Bhagavad-gītā 2.50 — </a:t>
+            </a:r>
+            <a:pPr algn="l" indent="0" marL="0">
+              <a:lnSpc>
+                <a:spcPts val="1620"/>
+              </a:lnSpc>
+              <a:spcAft>
+                <a:spcPts val="300"/>
+              </a:spcAft>
+              <a:buNone/>
+            </a:pPr>
+            <a:r>
+              <a:rPr lang="en-US" sz="1200" dirty="0">
+                <a:solidFill>
+                  <a:srgbClr val="1C2833"/>
+                </a:solidFill>
+                <a:latin typeface="Arial" pitchFamily="34" charset="0"/>
+                <a:ea typeface="Arial" pitchFamily="34" charset="-122"/>
+                <a:cs typeface="Arial" pitchFamily="34" charset="-120"/>
+              </a:rPr>
+              <a:t>day-01-hook.json</a:t>
+            </a:r>
+            <a:pPr algn="l" indent="0" marL="0">
+              <a:lnSpc>
+                <a:spcPts val="1620"/>
+              </a:lnSpc>
+              <a:spcAft>
+                <a:spcPts val="300"/>
+              </a:spcAft>
+              <a:buNone/>
+            </a:pPr>
+            <a:r>
+              <a:rPr lang="en-US" sz="1200" dirty="0">
+                <a:solidFill>
+                  <a:srgbClr val="1C2833"/>
+                </a:solidFill>
+                <a:latin typeface="Arial" pitchFamily="34" charset="0"/>
+                <a:ea typeface="Arial" pitchFamily="34" charset="-122"/>
+                <a:cs typeface="Arial" pitchFamily="34" charset="-120"/>
+              </a:rPr>
+              <a:t> chunks reference BG repeatedly.</a:t>
+            </a:r>
+            <a:endParaRPr lang="en-US" sz="1200" dirty="0"/>
+          </a:p>
+          <a:p>
+            <a:pPr algn="l" marL="342900" indent="-342900">
+              <a:lnSpc>
+                <a:spcPts val="1620"/>
+              </a:lnSpc>
+              <a:spcAft>
+                <a:spcPts val="300"/>
+              </a:spcAft>
+              <a:buSzPct val="100000"/>
+              <a:buChar char="•"/>
+            </a:pPr>
+            <a:r>
+              <a:rPr lang="en-US" sz="1200" dirty="0">
+                <a:solidFill>
+                  <a:srgbClr val="1C2833"/>
+                </a:solidFill>
+                <a:latin typeface="Arial" pitchFamily="34" charset="0"/>
+                <a:ea typeface="Arial" pitchFamily="34" charset="-122"/>
+                <a:cs typeface="Arial" pitchFamily="34" charset="-120"/>
+              </a:rPr>
               <a:t>vidya-karana RAG cache </a:t>
             </a:r>
             <a:pPr algn="l" indent="0" marL="0">
@@ -4299,7 +6090,7 @@
       </p:sp>
       <p:sp>
         <p:nvSpPr>
-          <p:cNvPr id="6" name="Text 4"/>
+          <p:cNvPr id="5" name="Text 3"/>
           <p:cNvSpPr/>
           <p:nvPr/>
         </p:nvSpPr>
@@ -4449,7 +6240,7 @@
                 <a:ea typeface="Georgia" pitchFamily="34" charset="-122"/>
                 <a:cs typeface="Georgia" pitchFamily="34" charset="-120"/>
               </a:rPr>
-              <a:t>Materials</a:t>
+              <a:t>Learning objective</a:t>
             </a:r>
             <a:endParaRPr lang="en-US" sz="1800" dirty="0"/>
           </a:p>
@@ -4497,7 +6288,99 @@
                 <a:ea typeface="Arial" pitchFamily="34" charset="-122"/>
                 <a:cs typeface="Arial" pitchFamily="34" charset="-120"/>
               </a:rPr>
-              <a:t>– One yoga mat per student (or clean floor) – Comfortable clothing — heads-up given the previous day – Wall poster (optional): the eight limbs (preview)</a:t>
+              <a:t>By the end of this lesson, students will state at least two definitions of </a:t>
+            </a:r>
+            <a:pPr algn="l" indent="0" marL="0">
+              <a:lnSpc>
+                <a:spcPts val="1680"/>
+              </a:lnSpc>
+              <a:spcBef>
+                <a:spcPts val="300"/>
+              </a:spcBef>
+              <a:spcAft>
+                <a:spcPts val="300"/>
+              </a:spcAft>
+              <a:buNone/>
+            </a:pPr>
+            <a:r>
+              <a:rPr lang="en-US" sz="1200" i="1" dirty="0">
+                <a:solidFill>
+                  <a:srgbClr val="1C2833"/>
+                </a:solidFill>
+                <a:latin typeface="Arial" pitchFamily="34" charset="0"/>
+                <a:ea typeface="Arial" pitchFamily="34" charset="-122"/>
+                <a:cs typeface="Arial" pitchFamily="34" charset="-120"/>
+              </a:rPr>
+              <a:t>yoga</a:t>
+            </a:r>
+            <a:pPr algn="l" indent="0" marL="0">
+              <a:lnSpc>
+                <a:spcPts val="1680"/>
+              </a:lnSpc>
+              <a:spcBef>
+                <a:spcPts val="300"/>
+              </a:spcBef>
+              <a:spcAft>
+                <a:spcPts val="300"/>
+              </a:spcAft>
+              <a:buNone/>
+            </a:pPr>
+            <a:r>
+              <a:rPr lang="en-US" sz="1200" dirty="0">
+                <a:solidFill>
+                  <a:srgbClr val="1C2833"/>
+                </a:solidFill>
+                <a:latin typeface="Arial" pitchFamily="34" charset="0"/>
+                <a:ea typeface="Arial" pitchFamily="34" charset="-122"/>
+                <a:cs typeface="Arial" pitchFamily="34" charset="-120"/>
+              </a:rPr>
+              <a:t> (one from Patañjali, one from the Bhagavad-gītā), perform </a:t>
+            </a:r>
+            <a:pPr algn="l" indent="0" marL="0">
+              <a:lnSpc>
+                <a:spcPts val="1680"/>
+              </a:lnSpc>
+              <a:spcBef>
+                <a:spcPts val="300"/>
+              </a:spcBef>
+              <a:spcAft>
+                <a:spcPts val="300"/>
+              </a:spcAft>
+              <a:buNone/>
+            </a:pPr>
+            <a:r>
+              <a:rPr lang="en-US" sz="1200" i="1" dirty="0">
+                <a:solidFill>
+                  <a:srgbClr val="1C2833"/>
+                </a:solidFill>
+                <a:latin typeface="Arial" pitchFamily="34" charset="0"/>
+                <a:ea typeface="Arial" pitchFamily="34" charset="-122"/>
+                <a:cs typeface="Arial" pitchFamily="34" charset="-120"/>
+              </a:rPr>
+              <a:t>tāḍāsana</a:t>
+            </a:r>
+            <a:pPr algn="l" indent="0" marL="0">
+              <a:lnSpc>
+                <a:spcPts val="1680"/>
+              </a:lnSpc>
+              <a:spcBef>
+                <a:spcPts val="300"/>
+              </a:spcBef>
+              <a:spcAft>
+                <a:spcPts val="300"/>
+              </a:spcAft>
+              <a:buNone/>
+            </a:pPr>
+            <a:r>
+              <a:rPr lang="en-US" sz="1200" dirty="0">
+                <a:solidFill>
+                  <a:srgbClr val="1C2833"/>
+                </a:solidFill>
+                <a:latin typeface="Arial" pitchFamily="34" charset="0"/>
+                <a:ea typeface="Arial" pitchFamily="34" charset="-122"/>
+                <a:cs typeface="Arial" pitchFamily="34" charset="-120"/>
+              </a:rPr>
+              <a:t> with safe alignment, and complete a 60-second seated-breath observation.</a:t>
             </a:r>
             <a:endParaRPr lang="en-US" sz="1200" dirty="0"/>
           </a:p>
@@ -4655,7 +6538,7 @@
                 <a:ea typeface="Georgia" pitchFamily="34" charset="-122"/>
                 <a:cs typeface="Georgia" pitchFamily="34" charset="-120"/>
               </a:rPr>
-              <a:t>Vocabulary introduced today</a:t>
+              <a:t>Materials</a:t>
             </a:r>
             <a:endParaRPr lang="en-US" sz="1800" dirty="0"/>
           </a:p>
@@ -4693,26 +6576,6 @@
               <a:buChar char="•"/>
             </a:pPr>
             <a:r>
-              <a:rPr lang="en-US" sz="1200" i="1" dirty="0">
-                <a:solidFill>
-                  <a:srgbClr val="1C2833"/>
-                </a:solidFill>
-                <a:latin typeface="Arial" pitchFamily="34" charset="0"/>
-                <a:ea typeface="Arial" pitchFamily="34" charset="-122"/>
-                <a:cs typeface="Arial" pitchFamily="34" charset="-120"/>
-              </a:rPr>
-              <a:t>yoga</a:t>
-            </a:r>
-            <a:pPr algn="l" indent="0" marL="0">
-              <a:lnSpc>
-                <a:spcPts val="1620"/>
-              </a:lnSpc>
-              <a:spcAft>
-                <a:spcPts val="300"/>
-              </a:spcAft>
-              <a:buNone/>
-            </a:pPr>
-            <a:r>
               <a:rPr lang="en-US" sz="1200" dirty="0">
                 <a:solidFill>
                   <a:srgbClr val="1C2833"/>
@@ -4721,7 +6584,7 @@
                 <a:ea typeface="Arial" pitchFamily="34" charset="-122"/>
                 <a:cs typeface="Arial" pitchFamily="34" charset="-120"/>
               </a:rPr>
-              <a:t> (IAST: yoga; lit. "yoke, union") — at Middle band, Patañjali's definition: "settling the fluctuations of the mind."</a:t>
+              <a:t>One yoga mat per student (or clean floor)</a:t>
             </a:r>
             <a:endParaRPr lang="en-US" sz="1200" dirty="0"/>
           </a:p>
@@ -4737,26 +6600,6 @@
               <a:buChar char="•"/>
             </a:pPr>
             <a:r>
-              <a:rPr lang="en-US" sz="1200" i="1" dirty="0">
-                <a:solidFill>
-                  <a:srgbClr val="1C2833"/>
-                </a:solidFill>
-                <a:latin typeface="Arial" pitchFamily="34" charset="0"/>
-                <a:ea typeface="Arial" pitchFamily="34" charset="-122"/>
-                <a:cs typeface="Arial" pitchFamily="34" charset="-120"/>
-              </a:rPr>
-              <a:t>āsana</a:t>
-            </a:r>
-            <a:pPr algn="l" indent="0" marL="0">
-              <a:lnSpc>
-                <a:spcPts val="1620"/>
-              </a:lnSpc>
-              <a:spcAft>
-                <a:spcPts val="300"/>
-              </a:spcAft>
-              <a:buNone/>
-            </a:pPr>
-            <a:r>
               <a:rPr lang="en-US" sz="1200" dirty="0">
                 <a:solidFill>
                   <a:srgbClr val="1C2833"/>
@@ -4765,7 +6608,7 @@
                 <a:ea typeface="Arial" pitchFamily="34" charset="-122"/>
                 <a:cs typeface="Arial" pitchFamily="34" charset="-120"/>
               </a:rPr>
-              <a:t> (IAST: āsana; lit. "seat, posture") — a held physical posture.</a:t>
+              <a:t>Comfortable clothing — heads-up given the previous day</a:t>
             </a:r>
             <a:endParaRPr lang="en-US" sz="1200" dirty="0"/>
           </a:p>
@@ -4781,26 +6624,6 @@
               <a:buChar char="•"/>
             </a:pPr>
             <a:r>
-              <a:rPr lang="en-US" sz="1200" i="1" dirty="0">
-                <a:solidFill>
-                  <a:srgbClr val="1C2833"/>
-                </a:solidFill>
-                <a:latin typeface="Arial" pitchFamily="34" charset="0"/>
-                <a:ea typeface="Arial" pitchFamily="34" charset="-122"/>
-                <a:cs typeface="Arial" pitchFamily="34" charset="-120"/>
-              </a:rPr>
-              <a:t>tāḍāsana</a:t>
-            </a:r>
-            <a:pPr algn="l" indent="0" marL="0">
-              <a:lnSpc>
-                <a:spcPts val="1620"/>
-              </a:lnSpc>
-              <a:spcAft>
-                <a:spcPts val="300"/>
-              </a:spcAft>
-              <a:buNone/>
-            </a:pPr>
-            <a:r>
               <a:rPr lang="en-US" sz="1200" dirty="0">
                 <a:solidFill>
                   <a:srgbClr val="1C2833"/>
@@ -4809,7 +6632,7 @@
                 <a:ea typeface="Arial" pitchFamily="34" charset="-122"/>
                 <a:cs typeface="Arial" pitchFamily="34" charset="-120"/>
               </a:rPr>
-              <a:t> (IAST: tāḍāsana; lit. "mountain posture") — foundational standing pose.</a:t>
+              <a:t>Wall poster (optional): the eight limbs (preview)</a:t>
             </a:r>
             <a:endParaRPr lang="en-US" sz="1200" dirty="0"/>
           </a:p>
@@ -4967,7 +6790,7 @@
                 <a:ea typeface="Georgia" pitchFamily="34" charset="-122"/>
                 <a:cs typeface="Georgia" pitchFamily="34" charset="-120"/>
               </a:rPr>
-              <a:t>Lesson flow</a:t>
+              <a:t>Vocabulary introduced today</a:t>
             </a:r>
             <a:endParaRPr lang="en-US" sz="1800" dirty="0"/>
           </a:p>
@@ -4976,6 +6799,160 @@
       <p:sp>
         <p:nvSpPr>
           <p:cNvPr id="4" name="Text 2"/>
+          <p:cNvSpPr/>
+          <p:nvPr/>
+        </p:nvSpPr>
+        <p:spPr>
+          <a:xfrm>
+            <a:off x="634901" y="883593"/>
+            <a:ext cx="8102798" cy="769441"/>
+          </a:xfrm>
+          <a:prstGeom prst="rect">
+            <a:avLst/>
+          </a:prstGeom>
+          <a:noFill/>
+          <a:ln/>
+        </p:spPr>
+        <p:txBody>
+          <a:bodyPr wrap="square" lIns="0" tIns="0" rIns="0" bIns="0" rtlCol="0" anchor="t"/>
+          <a:lstStyle/>
+          <a:p>
+            <a:pPr algn="l" marL="342900" indent="-342900">
+              <a:lnSpc>
+                <a:spcPts val="1620"/>
+              </a:lnSpc>
+              <a:spcAft>
+                <a:spcPts val="300"/>
+              </a:spcAft>
+              <a:buSzPct val="100000"/>
+              <a:buChar char="•"/>
+            </a:pPr>
+            <a:r>
+              <a:rPr lang="en-US" sz="1200" i="1" dirty="0">
+                <a:solidFill>
+                  <a:srgbClr val="1C2833"/>
+                </a:solidFill>
+                <a:latin typeface="Arial" pitchFamily="34" charset="0"/>
+                <a:ea typeface="Arial" pitchFamily="34" charset="-122"/>
+                <a:cs typeface="Arial" pitchFamily="34" charset="-120"/>
+              </a:rPr>
+              <a:t>yoga</a:t>
+            </a:r>
+            <a:pPr algn="l" indent="0" marL="0">
+              <a:lnSpc>
+                <a:spcPts val="1620"/>
+              </a:lnSpc>
+              <a:spcAft>
+                <a:spcPts val="300"/>
+              </a:spcAft>
+              <a:buNone/>
+            </a:pPr>
+            <a:r>
+              <a:rPr lang="en-US" sz="1200" dirty="0">
+                <a:solidFill>
+                  <a:srgbClr val="1C2833"/>
+                </a:solidFill>
+                <a:latin typeface="Arial" pitchFamily="34" charset="0"/>
+                <a:ea typeface="Arial" pitchFamily="34" charset="-122"/>
+                <a:cs typeface="Arial" pitchFamily="34" charset="-120"/>
+              </a:rPr>
+              <a:t> (IAST: yoga; lit. "yoke, union") — at Middle band, Patañjali's definition: "settling the fluctuations of the mind."</a:t>
+            </a:r>
+            <a:endParaRPr lang="en-US" sz="1200" dirty="0"/>
+          </a:p>
+          <a:p>
+            <a:pPr algn="l" marL="342900" indent="-342900">
+              <a:lnSpc>
+                <a:spcPts val="1620"/>
+              </a:lnSpc>
+              <a:spcAft>
+                <a:spcPts val="300"/>
+              </a:spcAft>
+              <a:buSzPct val="100000"/>
+              <a:buChar char="•"/>
+            </a:pPr>
+            <a:r>
+              <a:rPr lang="en-US" sz="1200" i="1" dirty="0">
+                <a:solidFill>
+                  <a:srgbClr val="1C2833"/>
+                </a:solidFill>
+                <a:latin typeface="Arial" pitchFamily="34" charset="0"/>
+                <a:ea typeface="Arial" pitchFamily="34" charset="-122"/>
+                <a:cs typeface="Arial" pitchFamily="34" charset="-120"/>
+              </a:rPr>
+              <a:t>āsana</a:t>
+            </a:r>
+            <a:pPr algn="l" indent="0" marL="0">
+              <a:lnSpc>
+                <a:spcPts val="1620"/>
+              </a:lnSpc>
+              <a:spcAft>
+                <a:spcPts val="300"/>
+              </a:spcAft>
+              <a:buNone/>
+            </a:pPr>
+            <a:r>
+              <a:rPr lang="en-US" sz="1200" dirty="0">
+                <a:solidFill>
+                  <a:srgbClr val="1C2833"/>
+                </a:solidFill>
+                <a:latin typeface="Arial" pitchFamily="34" charset="0"/>
+                <a:ea typeface="Arial" pitchFamily="34" charset="-122"/>
+                <a:cs typeface="Arial" pitchFamily="34" charset="-120"/>
+              </a:rPr>
+              <a:t> (IAST: āsana; lit. "seat, posture") — a held physical posture.</a:t>
+            </a:r>
+            <a:endParaRPr lang="en-US" sz="1200" dirty="0"/>
+          </a:p>
+          <a:p>
+            <a:pPr algn="l" marL="342900" indent="-342900">
+              <a:lnSpc>
+                <a:spcPts val="1620"/>
+              </a:lnSpc>
+              <a:spcAft>
+                <a:spcPts val="300"/>
+              </a:spcAft>
+              <a:buSzPct val="100000"/>
+              <a:buChar char="•"/>
+            </a:pPr>
+            <a:r>
+              <a:rPr lang="en-US" sz="1200" i="1" dirty="0">
+                <a:solidFill>
+                  <a:srgbClr val="1C2833"/>
+                </a:solidFill>
+                <a:latin typeface="Arial" pitchFamily="34" charset="0"/>
+                <a:ea typeface="Arial" pitchFamily="34" charset="-122"/>
+                <a:cs typeface="Arial" pitchFamily="34" charset="-120"/>
+              </a:rPr>
+              <a:t>tāḍāsana</a:t>
+            </a:r>
+            <a:pPr algn="l" indent="0" marL="0">
+              <a:lnSpc>
+                <a:spcPts val="1620"/>
+              </a:lnSpc>
+              <a:spcAft>
+                <a:spcPts val="300"/>
+              </a:spcAft>
+              <a:buNone/>
+            </a:pPr>
+            <a:r>
+              <a:rPr lang="en-US" sz="1200" dirty="0">
+                <a:solidFill>
+                  <a:srgbClr val="1C2833"/>
+                </a:solidFill>
+                <a:latin typeface="Arial" pitchFamily="34" charset="0"/>
+                <a:ea typeface="Arial" pitchFamily="34" charset="-122"/>
+                <a:cs typeface="Arial" pitchFamily="34" charset="-120"/>
+              </a:rPr>
+              <a:t> (IAST: tāḍāsana; lit. "mountain posture") — foundational standing pose.</a:t>
+            </a:r>
+            <a:endParaRPr lang="en-US" sz="1200" dirty="0"/>
+          </a:p>
+        </p:txBody>
+      </p:sp>
+      <p:sp>
+        <p:nvSpPr>
+          <p:cNvPr id="5" name="Text 3"/>
           <p:cNvSpPr/>
           <p:nvPr/>
         </p:nvSpPr>
@@ -5125,7 +7102,7 @@
                 <a:ea typeface="Georgia" pitchFamily="34" charset="-122"/>
                 <a:cs typeface="Georgia" pitchFamily="34" charset="-120"/>
               </a:rPr>
-              <a:t>Warm-up (5 min) — Settle</a:t>
+              <a:t>Lesson flow</a:t>
             </a:r>
             <a:endParaRPr lang="en-US" sz="1800" dirty="0"/>
           </a:p>
@@ -5134,123 +7111,6 @@
       <p:sp>
         <p:nvSpPr>
           <p:cNvPr id="4" name="Text 2"/>
-          <p:cNvSpPr/>
-          <p:nvPr/>
-        </p:nvSpPr>
-        <p:spPr>
-          <a:xfrm>
-            <a:off x="406301" y="870942"/>
-            <a:ext cx="8498026" cy="426541"/>
-          </a:xfrm>
-          <a:prstGeom prst="rect">
-            <a:avLst/>
-          </a:prstGeom>
-          <a:noFill/>
-          <a:ln/>
-        </p:spPr>
-        <p:txBody>
-          <a:bodyPr wrap="square" lIns="0" tIns="0" rIns="0" bIns="0" rtlCol="0" anchor="t"/>
-          <a:lstStyle/>
-          <a:p>
-            <a:pPr algn="l" indent="0" marL="0">
-              <a:lnSpc>
-                <a:spcPts val="1680"/>
-              </a:lnSpc>
-              <a:spcBef>
-                <a:spcPts val="300"/>
-              </a:spcBef>
-              <a:spcAft>
-                <a:spcPts val="300"/>
-              </a:spcAft>
-              <a:buNone/>
-            </a:pPr>
-            <a:r>
-              <a:rPr lang="en-US" sz="1200" dirty="0">
-                <a:solidFill>
-                  <a:srgbClr val="1C2833"/>
-                </a:solidFill>
-                <a:latin typeface="Arial" pitchFamily="34" charset="0"/>
-                <a:ea typeface="Arial" pitchFamily="34" charset="-122"/>
-                <a:cs typeface="Arial" pitchFamily="34" charset="-120"/>
-              </a:rPr>
-              <a:t>– Students sit cross-legged on their mats (</a:t>
-            </a:r>
-            <a:pPr algn="l" indent="0" marL="0">
-              <a:lnSpc>
-                <a:spcPts val="1680"/>
-              </a:lnSpc>
-              <a:spcBef>
-                <a:spcPts val="300"/>
-              </a:spcBef>
-              <a:spcAft>
-                <a:spcPts val="300"/>
-              </a:spcAft>
-              <a:buNone/>
-            </a:pPr>
-            <a:r>
-              <a:rPr lang="en-US" sz="1200" i="1" dirty="0">
-                <a:solidFill>
-                  <a:srgbClr val="1C2833"/>
-                </a:solidFill>
-                <a:latin typeface="Arial" pitchFamily="34" charset="0"/>
-                <a:ea typeface="Arial" pitchFamily="34" charset="-122"/>
-                <a:cs typeface="Arial" pitchFamily="34" charset="-120"/>
-              </a:rPr>
-              <a:t>sukhāsana</a:t>
-            </a:r>
-            <a:pPr algn="l" indent="0" marL="0">
-              <a:lnSpc>
-                <a:spcPts val="1680"/>
-              </a:lnSpc>
-              <a:spcBef>
-                <a:spcPts val="300"/>
-              </a:spcBef>
-              <a:spcAft>
-                <a:spcPts val="300"/>
-              </a:spcAft>
-              <a:buNone/>
-            </a:pPr>
-            <a:r>
-              <a:rPr lang="en-US" sz="1200" dirty="0">
-                <a:solidFill>
-                  <a:srgbClr val="1C2833"/>
-                </a:solidFill>
-                <a:latin typeface="Arial" pitchFamily="34" charset="0"/>
-                <a:ea typeface="Arial" pitchFamily="34" charset="-122"/>
-                <a:cs typeface="Arial" pitchFamily="34" charset="-120"/>
-              </a:rPr>
-              <a:t> — easy seat). – Eyes closed. Count 5 natural breaths. – Teacher: </a:t>
-            </a:r>
-            <a:pPr algn="l" indent="0" marL="0">
-              <a:lnSpc>
-                <a:spcPts val="1680"/>
-              </a:lnSpc>
-              <a:spcBef>
-                <a:spcPts val="300"/>
-              </a:spcBef>
-              <a:spcAft>
-                <a:spcPts val="300"/>
-              </a:spcAft>
-              <a:buNone/>
-            </a:pPr>
-            <a:r>
-              <a:rPr lang="en-US" sz="1200" i="1" dirty="0">
-                <a:solidFill>
-                  <a:srgbClr val="1C2833"/>
-                </a:solidFill>
-                <a:latin typeface="Arial" pitchFamily="34" charset="0"/>
-                <a:ea typeface="Arial" pitchFamily="34" charset="-122"/>
-                <a:cs typeface="Arial" pitchFamily="34" charset="-120"/>
-              </a:rPr>
-              <a:t>"Today we begin a 10-day module on yoga. We'll move, we'll breathe, and we'll think about what yoga actually is."</a:t>
-            </a:r>
-            <a:endParaRPr lang="en-US" sz="1200" dirty="0"/>
-          </a:p>
-        </p:txBody>
-      </p:sp>
-      <p:sp>
-        <p:nvSpPr>
-          <p:cNvPr id="5" name="Text 3"/>
           <p:cNvSpPr/>
           <p:nvPr/>
         </p:nvSpPr>
@@ -5400,7 +7260,7 @@
                 <a:ea typeface="Georgia" pitchFamily="34" charset="-122"/>
                 <a:cs typeface="Georgia" pitchFamily="34" charset="-120"/>
               </a:rPr>
-              <a:t>Core (15 min) — What is yoga?</a:t>
+              <a:t>Warm-up (5 min) — Settle</a:t>
             </a:r>
             <a:endParaRPr lang="en-US" sz="1800" dirty="0"/>
           </a:p>
@@ -5415,7 +7275,7 @@
         <p:spPr>
           <a:xfrm>
             <a:off x="634901" y="883593"/>
-            <a:ext cx="8102798" cy="281880"/>
+            <a:ext cx="8102798" cy="975122"/>
           </a:xfrm>
           <a:prstGeom prst="rect">
             <a:avLst/>
@@ -5446,7 +7306,7 @@
                 <a:ea typeface="Arial" pitchFamily="34" charset="-122"/>
                 <a:cs typeface="Arial" pitchFamily="34" charset="-120"/>
               </a:rPr>
-              <a:t>Question on the board: </a:t>
+              <a:t>Students sit cross-legged on their mats (</a:t>
             </a:r>
             <a:pPr algn="l" indent="0" marL="0">
               <a:lnSpc>
@@ -5466,7 +7326,95 @@
                 <a:ea typeface="Arial" pitchFamily="34" charset="-122"/>
                 <a:cs typeface="Arial" pitchFamily="34" charset="-120"/>
               </a:rPr>
-              <a:t>"What does the word 'yoga' mean to you right now, before this module?"</a:t>
+              <a:t>sukhāsana</a:t>
+            </a:r>
+            <a:pPr algn="l" indent="0" marL="0">
+              <a:lnSpc>
+                <a:spcPts val="1620"/>
+              </a:lnSpc>
+              <a:spcAft>
+                <a:spcPts val="300"/>
+              </a:spcAft>
+              <a:buNone/>
+            </a:pPr>
+            <a:r>
+              <a:rPr lang="en-US" sz="1200" dirty="0">
+                <a:solidFill>
+                  <a:srgbClr val="1C2833"/>
+                </a:solidFill>
+                <a:latin typeface="Arial" pitchFamily="34" charset="0"/>
+                <a:ea typeface="Arial" pitchFamily="34" charset="-122"/>
+                <a:cs typeface="Arial" pitchFamily="34" charset="-120"/>
+              </a:rPr>
+              <a:t> — easy seat).</a:t>
+            </a:r>
+            <a:endParaRPr lang="en-US" sz="1200" dirty="0"/>
+          </a:p>
+          <a:p>
+            <a:pPr algn="l" marL="342900" indent="-342900">
+              <a:lnSpc>
+                <a:spcPts val="1620"/>
+              </a:lnSpc>
+              <a:spcAft>
+                <a:spcPts val="300"/>
+              </a:spcAft>
+              <a:buSzPct val="100000"/>
+              <a:buChar char="•"/>
+            </a:pPr>
+            <a:r>
+              <a:rPr lang="en-US" sz="1200" dirty="0">
+                <a:solidFill>
+                  <a:srgbClr val="1C2833"/>
+                </a:solidFill>
+                <a:latin typeface="Arial" pitchFamily="34" charset="0"/>
+                <a:ea typeface="Arial" pitchFamily="34" charset="-122"/>
+                <a:cs typeface="Arial" pitchFamily="34" charset="-120"/>
+              </a:rPr>
+              <a:t>Eyes closed. Count 5 natural breaths.</a:t>
+            </a:r>
+            <a:endParaRPr lang="en-US" sz="1200" dirty="0"/>
+          </a:p>
+          <a:p>
+            <a:pPr algn="l" marL="342900" indent="-342900">
+              <a:lnSpc>
+                <a:spcPts val="1620"/>
+              </a:lnSpc>
+              <a:spcAft>
+                <a:spcPts val="300"/>
+              </a:spcAft>
+              <a:buSzPct val="100000"/>
+              <a:buChar char="•"/>
+            </a:pPr>
+            <a:r>
+              <a:rPr lang="en-US" sz="1200" dirty="0">
+                <a:solidFill>
+                  <a:srgbClr val="1C2833"/>
+                </a:solidFill>
+                <a:latin typeface="Arial" pitchFamily="34" charset="0"/>
+                <a:ea typeface="Arial" pitchFamily="34" charset="-122"/>
+                <a:cs typeface="Arial" pitchFamily="34" charset="-120"/>
+              </a:rPr>
+              <a:t>Teacher: </a:t>
+            </a:r>
+            <a:pPr algn="l" indent="0" marL="0">
+              <a:lnSpc>
+                <a:spcPts val="1620"/>
+              </a:lnSpc>
+              <a:spcAft>
+                <a:spcPts val="300"/>
+              </a:spcAft>
+              <a:buNone/>
+            </a:pPr>
+            <a:r>
+              <a:rPr lang="en-US" sz="1200" i="1" dirty="0">
+                <a:solidFill>
+                  <a:srgbClr val="1C2833"/>
+                </a:solidFill>
+                <a:latin typeface="Arial" pitchFamily="34" charset="0"/>
+                <a:ea typeface="Arial" pitchFamily="34" charset="-122"/>
+                <a:cs typeface="Arial" pitchFamily="34" charset="-120"/>
+              </a:rPr>
+              <a:t>"Today we begin a 10-day module on yoga. We'll move, we'll breathe, and we'll think about what yoga actually is."</a:t>
             </a:r>
             <a:endParaRPr lang="en-US" sz="1200" dirty="0"/>
           </a:p>
@@ -5480,777 +7428,7 @@
         </p:nvSpPr>
         <p:spPr>
           <a:xfrm>
-            <a:off x="406301" y="1254323"/>
-            <a:ext cx="8498026" cy="426541"/>
-          </a:xfrm>
-          <a:prstGeom prst="rect">
-            <a:avLst/>
-          </a:prstGeom>
-          <a:noFill/>
-          <a:ln/>
-        </p:spPr>
-        <p:txBody>
-          <a:bodyPr wrap="square" lIns="0" tIns="0" rIns="0" bIns="0" rtlCol="0" anchor="t"/>
-          <a:lstStyle/>
-          <a:p>
-            <a:pPr algn="l" indent="0" marL="0">
-              <a:lnSpc>
-                <a:spcPts val="1680"/>
-              </a:lnSpc>
-              <a:spcBef>
-                <a:spcPts val="300"/>
-              </a:spcBef>
-              <a:spcAft>
-                <a:spcPts val="300"/>
-              </a:spcAft>
-              <a:buNone/>
-            </a:pPr>
-            <a:r>
-              <a:rPr lang="en-US" sz="1200" dirty="0">
-                <a:solidFill>
-                  <a:srgbClr val="1C2833"/>
-                </a:solidFill>
-                <a:latin typeface="Arial" pitchFamily="34" charset="0"/>
-                <a:ea typeface="Arial" pitchFamily="34" charset="-122"/>
-                <a:cs typeface="Arial" pitchFamily="34" charset="-120"/>
-              </a:rPr>
-              <a:t>– Take 4 student answers. (Common: "stretching," "exercise from India," "a religion," "what my mom does on YouTube.")    – Don't judge. Write them all.</a:t>
-            </a:r>
-            <a:endParaRPr lang="en-US" sz="1200" dirty="0"/>
-          </a:p>
-        </p:txBody>
-      </p:sp>
-      <p:sp>
-        <p:nvSpPr>
-          <p:cNvPr id="6" name="Text 4"/>
-          <p:cNvSpPr/>
-          <p:nvPr/>
-        </p:nvSpPr>
-        <p:spPr>
-          <a:xfrm>
-            <a:off x="634901" y="1769715"/>
-            <a:ext cx="8102798" cy="281880"/>
-          </a:xfrm>
-          <a:prstGeom prst="rect">
-            <a:avLst/>
-          </a:prstGeom>
-          <a:noFill/>
-          <a:ln/>
-        </p:spPr>
-        <p:txBody>
-          <a:bodyPr wrap="square" lIns="0" tIns="0" rIns="0" bIns="0" rtlCol="0" anchor="t"/>
-          <a:lstStyle/>
-          <a:p>
-            <a:pPr algn="l" marL="342900" indent="-342900">
-              <a:lnSpc>
-                <a:spcPts val="1620"/>
-              </a:lnSpc>
-              <a:spcAft>
-                <a:spcPts val="300"/>
-              </a:spcAft>
-              <a:buSzPct val="100000"/>
-              <a:buChar char="•"/>
-            </a:pPr>
-            <a:r>
-              <a:rPr lang="en-US" sz="1200" b="1" dirty="0">
-                <a:solidFill>
-                  <a:srgbClr val="1C2833"/>
-                </a:solidFill>
-                <a:latin typeface="Arial" pitchFamily="34" charset="0"/>
-                <a:ea typeface="Arial" pitchFamily="34" charset="-122"/>
-                <a:cs typeface="Arial" pitchFamily="34" charset="-120"/>
-              </a:rPr>
-              <a:t>Two definitions to remember</a:t>
-            </a:r>
-            <a:pPr algn="l" indent="0" marL="0">
-              <a:lnSpc>
-                <a:spcPts val="1620"/>
-              </a:lnSpc>
-              <a:spcAft>
-                <a:spcPts val="300"/>
-              </a:spcAft>
-              <a:buNone/>
-            </a:pPr>
-            <a:r>
-              <a:rPr lang="en-US" sz="1200" dirty="0">
-                <a:solidFill>
-                  <a:srgbClr val="1C2833"/>
-                </a:solidFill>
-                <a:latin typeface="Arial" pitchFamily="34" charset="0"/>
-                <a:ea typeface="Arial" pitchFamily="34" charset="-122"/>
-                <a:cs typeface="Arial" pitchFamily="34" charset="-120"/>
-              </a:rPr>
-              <a:t> (write boxed on board):</a:t>
-            </a:r>
-            <a:endParaRPr lang="en-US" sz="1200" dirty="0"/>
-          </a:p>
-        </p:txBody>
-      </p:sp>
-      <p:sp>
-        <p:nvSpPr>
-          <p:cNvPr id="7" name="Text 5"/>
-          <p:cNvSpPr/>
-          <p:nvPr/>
-        </p:nvSpPr>
-        <p:spPr>
-          <a:xfrm>
-            <a:off x="406301" y="2140446"/>
-            <a:ext cx="8498026" cy="426541"/>
-          </a:xfrm>
-          <a:prstGeom prst="rect">
-            <a:avLst/>
-          </a:prstGeom>
-          <a:noFill/>
-          <a:ln/>
-        </p:spPr>
-        <p:txBody>
-          <a:bodyPr wrap="square" lIns="0" tIns="0" rIns="0" bIns="0" rtlCol="0" anchor="t"/>
-          <a:lstStyle/>
-          <a:p>
-            <a:pPr algn="l" indent="0" marL="0">
-              <a:lnSpc>
-                <a:spcPts val="1680"/>
-              </a:lnSpc>
-              <a:spcBef>
-                <a:spcPts val="300"/>
-              </a:spcBef>
-              <a:spcAft>
-                <a:spcPts val="300"/>
-              </a:spcAft>
-              <a:buNone/>
-            </a:pPr>
-            <a:r>
-              <a:rPr lang="en-US" sz="1200" dirty="0">
-                <a:solidFill>
-                  <a:srgbClr val="1C2833"/>
-                </a:solidFill>
-                <a:latin typeface="Arial" pitchFamily="34" charset="0"/>
-                <a:ea typeface="Arial" pitchFamily="34" charset="-122"/>
-                <a:cs typeface="Arial" pitchFamily="34" charset="-120"/>
-              </a:rPr>
-              <a:t>&gt; </a:t>
-            </a:r>
-            <a:pPr algn="l" indent="0" marL="0">
-              <a:lnSpc>
-                <a:spcPts val="1680"/>
-              </a:lnSpc>
-              <a:spcBef>
-                <a:spcPts val="300"/>
-              </a:spcBef>
-              <a:spcAft>
-                <a:spcPts val="300"/>
-              </a:spcAft>
-              <a:buNone/>
-            </a:pPr>
-            <a:r>
-              <a:rPr lang="en-US" sz="1200" b="1" dirty="0">
-                <a:solidFill>
-                  <a:srgbClr val="1C2833"/>
-                </a:solidFill>
-                <a:latin typeface="Arial" pitchFamily="34" charset="0"/>
-                <a:ea typeface="Arial" pitchFamily="34" charset="-122"/>
-                <a:cs typeface="Arial" pitchFamily="34" charset="-120"/>
-              </a:rPr>
-              <a:t>Patañjali (c. 2nd c. BCE – 4th c. CE):</a:t>
-            </a:r>
-            <a:pPr algn="l" indent="0" marL="0">
-              <a:lnSpc>
-                <a:spcPts val="1680"/>
-              </a:lnSpc>
-              <a:spcBef>
-                <a:spcPts val="300"/>
-              </a:spcBef>
-              <a:spcAft>
-                <a:spcPts val="300"/>
-              </a:spcAft>
-              <a:buNone/>
-            </a:pPr>
-            <a:r>
-              <a:rPr lang="en-US" sz="1200" dirty="0">
-                <a:solidFill>
-                  <a:srgbClr val="1C2833"/>
-                </a:solidFill>
-                <a:latin typeface="Arial" pitchFamily="34" charset="0"/>
-                <a:ea typeface="Arial" pitchFamily="34" charset="-122"/>
-                <a:cs typeface="Arial" pitchFamily="34" charset="-120"/>
-              </a:rPr>
-              <a:t> &gt; </a:t>
-            </a:r>
-            <a:pPr algn="l" indent="0" marL="0">
-              <a:lnSpc>
-                <a:spcPts val="1680"/>
-              </a:lnSpc>
-              <a:spcBef>
-                <a:spcPts val="300"/>
-              </a:spcBef>
-              <a:spcAft>
-                <a:spcPts val="300"/>
-              </a:spcAft>
-              <a:buNone/>
-            </a:pPr>
-            <a:r>
-              <a:rPr lang="en-US" sz="1200" i="1" dirty="0">
-                <a:solidFill>
-                  <a:srgbClr val="1C2833"/>
-                </a:solidFill>
-                <a:latin typeface="Arial" pitchFamily="34" charset="0"/>
-                <a:ea typeface="Arial" pitchFamily="34" charset="-122"/>
-                <a:cs typeface="Arial" pitchFamily="34" charset="-120"/>
-              </a:rPr>
-              <a:t>"yogaś citta-vṛtti-nirodhaḥ"</a:t>
-            </a:r>
-            <a:pPr algn="l" indent="0" marL="0">
-              <a:lnSpc>
-                <a:spcPts val="1680"/>
-              </a:lnSpc>
-              <a:spcBef>
-                <a:spcPts val="300"/>
-              </a:spcBef>
-              <a:spcAft>
-                <a:spcPts val="300"/>
-              </a:spcAft>
-              <a:buNone/>
-            </a:pPr>
-            <a:r>
-              <a:rPr lang="en-US" sz="1200" dirty="0">
-                <a:solidFill>
-                  <a:srgbClr val="1C2833"/>
-                </a:solidFill>
-                <a:latin typeface="Arial" pitchFamily="34" charset="0"/>
-                <a:ea typeface="Arial" pitchFamily="34" charset="-122"/>
-                <a:cs typeface="Arial" pitchFamily="34" charset="-120"/>
-              </a:rPr>
-              <a:t> — "Yoga is the settling of the fluctuations of the mind." (Yoga Sūtra 1.2)</a:t>
-            </a:r>
-            <a:endParaRPr lang="en-US" sz="1200" dirty="0"/>
-          </a:p>
-        </p:txBody>
-      </p:sp>
-      <p:sp>
-        <p:nvSpPr>
-          <p:cNvPr id="8" name="Text 6"/>
-          <p:cNvSpPr/>
-          <p:nvPr/>
-        </p:nvSpPr>
-        <p:spPr>
-          <a:xfrm>
-            <a:off x="406301" y="2643188"/>
-            <a:ext cx="8498026" cy="426541"/>
-          </a:xfrm>
-          <a:prstGeom prst="rect">
-            <a:avLst/>
-          </a:prstGeom>
-          <a:noFill/>
-          <a:ln/>
-        </p:spPr>
-        <p:txBody>
-          <a:bodyPr wrap="square" lIns="0" tIns="0" rIns="0" bIns="0" rtlCol="0" anchor="t"/>
-          <a:lstStyle/>
-          <a:p>
-            <a:pPr algn="l" indent="0" marL="0">
-              <a:lnSpc>
-                <a:spcPts val="1680"/>
-              </a:lnSpc>
-              <a:spcBef>
-                <a:spcPts val="300"/>
-              </a:spcBef>
-              <a:spcAft>
-                <a:spcPts val="300"/>
-              </a:spcAft>
-              <a:buNone/>
-            </a:pPr>
-            <a:r>
-              <a:rPr lang="en-US" sz="1200" dirty="0">
-                <a:solidFill>
-                  <a:srgbClr val="1C2833"/>
-                </a:solidFill>
-                <a:latin typeface="Arial" pitchFamily="34" charset="0"/>
-                <a:ea typeface="Arial" pitchFamily="34" charset="-122"/>
-                <a:cs typeface="Arial" pitchFamily="34" charset="-120"/>
-              </a:rPr>
-              <a:t>&gt; </a:t>
-            </a:r>
-            <a:pPr algn="l" indent="0" marL="0">
-              <a:lnSpc>
-                <a:spcPts val="1680"/>
-              </a:lnSpc>
-              <a:spcBef>
-                <a:spcPts val="300"/>
-              </a:spcBef>
-              <a:spcAft>
-                <a:spcPts val="300"/>
-              </a:spcAft>
-              <a:buNone/>
-            </a:pPr>
-            <a:r>
-              <a:rPr lang="en-US" sz="1200" b="1" dirty="0">
-                <a:solidFill>
-                  <a:srgbClr val="1C2833"/>
-                </a:solidFill>
-                <a:latin typeface="Arial" pitchFamily="34" charset="0"/>
-                <a:ea typeface="Arial" pitchFamily="34" charset="-122"/>
-                <a:cs typeface="Arial" pitchFamily="34" charset="-120"/>
-              </a:rPr>
-              <a:t>Bhagavad-gītā (Krishna to Arjuna, c. 4th c. BCE – 2nd c. CE):</a:t>
-            </a:r>
-            <a:pPr algn="l" indent="0" marL="0">
-              <a:lnSpc>
-                <a:spcPts val="1680"/>
-              </a:lnSpc>
-              <a:spcBef>
-                <a:spcPts val="300"/>
-              </a:spcBef>
-              <a:spcAft>
-                <a:spcPts val="300"/>
-              </a:spcAft>
-              <a:buNone/>
-            </a:pPr>
-            <a:r>
-              <a:rPr lang="en-US" sz="1200" dirty="0">
-                <a:solidFill>
-                  <a:srgbClr val="1C2833"/>
-                </a:solidFill>
-                <a:latin typeface="Arial" pitchFamily="34" charset="0"/>
-                <a:ea typeface="Arial" pitchFamily="34" charset="-122"/>
-                <a:cs typeface="Arial" pitchFamily="34" charset="-120"/>
-              </a:rPr>
-              <a:t> &gt; </a:t>
-            </a:r>
-            <a:pPr algn="l" indent="0" marL="0">
-              <a:lnSpc>
-                <a:spcPts val="1680"/>
-              </a:lnSpc>
-              <a:spcBef>
-                <a:spcPts val="300"/>
-              </a:spcBef>
-              <a:spcAft>
-                <a:spcPts val="300"/>
-              </a:spcAft>
-              <a:buNone/>
-            </a:pPr>
-            <a:r>
-              <a:rPr lang="en-US" sz="1200" i="1" dirty="0">
-                <a:solidFill>
-                  <a:srgbClr val="1C2833"/>
-                </a:solidFill>
-                <a:latin typeface="Arial" pitchFamily="34" charset="0"/>
-                <a:ea typeface="Arial" pitchFamily="34" charset="-122"/>
-                <a:cs typeface="Arial" pitchFamily="34" charset="-120"/>
-              </a:rPr>
-              <a:t>"yogaḥ karmasu kauśalam"</a:t>
-            </a:r>
-            <a:pPr algn="l" indent="0" marL="0">
-              <a:lnSpc>
-                <a:spcPts val="1680"/>
-              </a:lnSpc>
-              <a:spcBef>
-                <a:spcPts val="300"/>
-              </a:spcBef>
-              <a:spcAft>
-                <a:spcPts val="300"/>
-              </a:spcAft>
-              <a:buNone/>
-            </a:pPr>
-            <a:r>
-              <a:rPr lang="en-US" sz="1200" dirty="0">
-                <a:solidFill>
-                  <a:srgbClr val="1C2833"/>
-                </a:solidFill>
-                <a:latin typeface="Arial" pitchFamily="34" charset="0"/>
-                <a:ea typeface="Arial" pitchFamily="34" charset="-122"/>
-                <a:cs typeface="Arial" pitchFamily="34" charset="-120"/>
-              </a:rPr>
-              <a:t> — "Yoga is skill in action." (BG 2.50)</a:t>
-            </a:r>
-            <a:endParaRPr lang="en-US" sz="1200" dirty="0"/>
-          </a:p>
-        </p:txBody>
-      </p:sp>
-      <p:sp>
-        <p:nvSpPr>
-          <p:cNvPr id="9" name="Text 7"/>
-          <p:cNvSpPr/>
-          <p:nvPr/>
-        </p:nvSpPr>
-        <p:spPr>
-          <a:xfrm>
-            <a:off x="634901" y="3158579"/>
-            <a:ext cx="8102798" cy="731341"/>
-          </a:xfrm>
-          <a:prstGeom prst="rect">
-            <a:avLst/>
-          </a:prstGeom>
-          <a:noFill/>
-          <a:ln/>
-        </p:spPr>
-        <p:txBody>
-          <a:bodyPr wrap="square" lIns="0" tIns="0" rIns="0" bIns="0" rtlCol="0" anchor="t"/>
-          <a:lstStyle/>
-          <a:p>
-            <a:pPr algn="l" marL="342900" indent="-342900">
-              <a:lnSpc>
-                <a:spcPts val="1620"/>
-              </a:lnSpc>
-              <a:spcAft>
-                <a:spcPts val="300"/>
-              </a:spcAft>
-              <a:buSzPct val="100000"/>
-              <a:buChar char="•"/>
-            </a:pPr>
-            <a:r>
-              <a:rPr lang="en-US" sz="1200" i="1" dirty="0">
-                <a:solidFill>
-                  <a:srgbClr val="1C2833"/>
-                </a:solidFill>
-                <a:latin typeface="Arial" pitchFamily="34" charset="0"/>
-                <a:ea typeface="Arial" pitchFamily="34" charset="-122"/>
-                <a:cs typeface="Arial" pitchFamily="34" charset="-120"/>
-              </a:rPr>
-              <a:t>"Neither of these is primarily about stretching."</a:t>
-            </a:r>
-            <a:pPr algn="l" indent="0" marL="0">
-              <a:lnSpc>
-                <a:spcPts val="1620"/>
-              </a:lnSpc>
-              <a:spcAft>
-                <a:spcPts val="300"/>
-              </a:spcAft>
-              <a:buNone/>
-            </a:pPr>
-            <a:r>
-              <a:rPr lang="en-US" sz="1200" dirty="0">
-                <a:solidFill>
-                  <a:srgbClr val="1C2833"/>
-                </a:solidFill>
-                <a:latin typeface="Arial" pitchFamily="34" charset="0"/>
-                <a:ea typeface="Arial" pitchFamily="34" charset="-122"/>
-                <a:cs typeface="Arial" pitchFamily="34" charset="-120"/>
-              </a:rPr>
-              <a:t> Pause for that to land.</a:t>
-            </a:r>
-            <a:endParaRPr lang="en-US" sz="1200" dirty="0"/>
-          </a:p>
-          <a:p>
-            <a:pPr algn="l" marL="342900" indent="-342900">
-              <a:lnSpc>
-                <a:spcPts val="1620"/>
-              </a:lnSpc>
-              <a:spcAft>
-                <a:spcPts val="300"/>
-              </a:spcAft>
-              <a:buSzPct val="100000"/>
-              <a:buChar char="•"/>
-            </a:pPr>
-            <a:r>
-              <a:rPr lang="en-US" sz="1200" b="1" dirty="0">
-                <a:solidFill>
-                  <a:srgbClr val="1C2833"/>
-                </a:solidFill>
-                <a:latin typeface="Arial" pitchFamily="34" charset="0"/>
-                <a:ea typeface="Arial" pitchFamily="34" charset="-122"/>
-                <a:cs typeface="Arial" pitchFamily="34" charset="-120"/>
-              </a:rPr>
-              <a:t>The word itself</a:t>
-            </a:r>
-            <a:pPr algn="l" indent="0" marL="0">
-              <a:lnSpc>
-                <a:spcPts val="1620"/>
-              </a:lnSpc>
-              <a:spcAft>
-                <a:spcPts val="300"/>
-              </a:spcAft>
-              <a:buNone/>
-            </a:pPr>
-            <a:r>
-              <a:rPr lang="en-US" sz="1200" dirty="0">
-                <a:solidFill>
-                  <a:srgbClr val="1C2833"/>
-                </a:solidFill>
-                <a:latin typeface="Arial" pitchFamily="34" charset="0"/>
-                <a:ea typeface="Arial" pitchFamily="34" charset="-122"/>
-                <a:cs typeface="Arial" pitchFamily="34" charset="-120"/>
-              </a:rPr>
-              <a:t> — </a:t>
-            </a:r>
-            <a:pPr algn="l" indent="0" marL="0">
-              <a:lnSpc>
-                <a:spcPts val="1620"/>
-              </a:lnSpc>
-              <a:spcAft>
-                <a:spcPts val="300"/>
-              </a:spcAft>
-              <a:buNone/>
-            </a:pPr>
-            <a:r>
-              <a:rPr lang="en-US" sz="1200" i="1" dirty="0">
-                <a:solidFill>
-                  <a:srgbClr val="1C2833"/>
-                </a:solidFill>
-                <a:latin typeface="Arial" pitchFamily="34" charset="0"/>
-                <a:ea typeface="Arial" pitchFamily="34" charset="-122"/>
-                <a:cs typeface="Arial" pitchFamily="34" charset="-120"/>
-              </a:rPr>
-              <a:t>yoga</a:t>
-            </a:r>
-            <a:pPr algn="l" indent="0" marL="0">
-              <a:lnSpc>
-                <a:spcPts val="1620"/>
-              </a:lnSpc>
-              <a:spcAft>
-                <a:spcPts val="300"/>
-              </a:spcAft>
-              <a:buNone/>
-            </a:pPr>
-            <a:r>
-              <a:rPr lang="en-US" sz="1200" dirty="0">
-                <a:solidFill>
-                  <a:srgbClr val="1C2833"/>
-                </a:solidFill>
-                <a:latin typeface="Arial" pitchFamily="34" charset="0"/>
-                <a:ea typeface="Arial" pitchFamily="34" charset="-122"/>
-                <a:cs typeface="Arial" pitchFamily="34" charset="-120"/>
-              </a:rPr>
-              <a:t> comes from the Sanskrit root </a:t>
-            </a:r>
-            <a:pPr algn="l" indent="0" marL="0">
-              <a:lnSpc>
-                <a:spcPts val="1620"/>
-              </a:lnSpc>
-              <a:spcAft>
-                <a:spcPts val="300"/>
-              </a:spcAft>
-              <a:buNone/>
-            </a:pPr>
-            <a:r>
-              <a:rPr lang="en-US" sz="1200" i="1" dirty="0">
-                <a:solidFill>
-                  <a:srgbClr val="1C2833"/>
-                </a:solidFill>
-                <a:latin typeface="Arial" pitchFamily="34" charset="0"/>
-                <a:ea typeface="Arial" pitchFamily="34" charset="-122"/>
-                <a:cs typeface="Arial" pitchFamily="34" charset="-120"/>
-              </a:rPr>
-              <a:t>yuj</a:t>
-            </a:r>
-            <a:pPr algn="l" indent="0" marL="0">
-              <a:lnSpc>
-                <a:spcPts val="1620"/>
-              </a:lnSpc>
-              <a:spcAft>
-                <a:spcPts val="300"/>
-              </a:spcAft>
-              <a:buNone/>
-            </a:pPr>
-            <a:r>
-              <a:rPr lang="en-US" sz="1200" dirty="0">
-                <a:solidFill>
-                  <a:srgbClr val="1C2833"/>
-                </a:solidFill>
-                <a:latin typeface="Arial" pitchFamily="34" charset="0"/>
-                <a:ea typeface="Arial" pitchFamily="34" charset="-122"/>
-                <a:cs typeface="Arial" pitchFamily="34" charset="-120"/>
-              </a:rPr>
-              <a:t> meaning "to yoke" — to join, to bind together. The yoga tradition uses it to mean the joining of body, breath, and attention — and ultimately the settling of the mind.</a:t>
-            </a:r>
-            <a:endParaRPr lang="en-US" sz="1200" dirty="0"/>
-          </a:p>
-        </p:txBody>
-      </p:sp>
-      <p:sp>
-        <p:nvSpPr>
-          <p:cNvPr id="10" name="Text 8"/>
-          <p:cNvSpPr/>
-          <p:nvPr/>
-        </p:nvSpPr>
-        <p:spPr>
-          <a:xfrm>
-            <a:off x="634901" y="3991421"/>
-            <a:ext cx="8102798" cy="487561"/>
-          </a:xfrm>
-          <a:prstGeom prst="rect">
-            <a:avLst/>
-          </a:prstGeom>
-          <a:noFill/>
-          <a:ln/>
-        </p:spPr>
-        <p:txBody>
-          <a:bodyPr wrap="square" lIns="0" tIns="0" rIns="0" bIns="0" rtlCol="0" anchor="t"/>
-          <a:lstStyle/>
-          <a:p>
-            <a:pPr algn="l" marL="342900" indent="-342900">
-              <a:lnSpc>
-                <a:spcPts val="1620"/>
-              </a:lnSpc>
-              <a:spcAft>
-                <a:spcPts val="300"/>
-              </a:spcAft>
-              <a:buSzPct val="100000"/>
-              <a:buChar char="•"/>
-            </a:pPr>
-            <a:r>
-              <a:rPr lang="en-US" sz="1200" b="1" dirty="0">
-                <a:solidFill>
-                  <a:srgbClr val="1C2833"/>
-                </a:solidFill>
-                <a:latin typeface="Arial" pitchFamily="34" charset="0"/>
-                <a:ea typeface="Arial" pitchFamily="34" charset="-122"/>
-                <a:cs typeface="Arial" pitchFamily="34" charset="-120"/>
-              </a:rPr>
-              <a:t>What we'll do in this module</a:t>
-            </a:r>
-            <a:pPr algn="l" indent="0" marL="0">
-              <a:lnSpc>
-                <a:spcPts val="1620"/>
-              </a:lnSpc>
-              <a:spcAft>
-                <a:spcPts val="300"/>
-              </a:spcAft>
-              <a:buNone/>
-            </a:pPr>
-            <a:r>
-              <a:rPr lang="en-US" sz="1200" dirty="0">
-                <a:solidFill>
-                  <a:srgbClr val="1C2833"/>
-                </a:solidFill>
-                <a:latin typeface="Arial" pitchFamily="34" charset="0"/>
-                <a:ea typeface="Arial" pitchFamily="34" charset="-122"/>
-                <a:cs typeface="Arial" pitchFamily="34" charset="-120"/>
-              </a:rPr>
-              <a:t> — work mainly with two of the </a:t>
-            </a:r>
-            <a:pPr algn="l" indent="0" marL="0">
-              <a:lnSpc>
-                <a:spcPts val="1620"/>
-              </a:lnSpc>
-              <a:spcAft>
-                <a:spcPts val="300"/>
-              </a:spcAft>
-              <a:buNone/>
-            </a:pPr>
-            <a:r>
-              <a:rPr lang="en-US" sz="1200" i="1" dirty="0">
-                <a:solidFill>
-                  <a:srgbClr val="1C2833"/>
-                </a:solidFill>
-                <a:latin typeface="Arial" pitchFamily="34" charset="0"/>
-                <a:ea typeface="Arial" pitchFamily="34" charset="-122"/>
-                <a:cs typeface="Arial" pitchFamily="34" charset="-120"/>
-              </a:rPr>
-              <a:t>eight limbs</a:t>
-            </a:r>
-            <a:pPr algn="l" indent="0" marL="0">
-              <a:lnSpc>
-                <a:spcPts val="1620"/>
-              </a:lnSpc>
-              <a:spcAft>
-                <a:spcPts val="300"/>
-              </a:spcAft>
-              <a:buNone/>
-            </a:pPr>
-            <a:r>
-              <a:rPr lang="en-US" sz="1200" dirty="0">
-                <a:solidFill>
-                  <a:srgbClr val="1C2833"/>
-                </a:solidFill>
-                <a:latin typeface="Arial" pitchFamily="34" charset="0"/>
-                <a:ea typeface="Arial" pitchFamily="34" charset="-122"/>
-                <a:cs typeface="Arial" pitchFamily="34" charset="-120"/>
-              </a:rPr>
-              <a:t> of yoga: </a:t>
-            </a:r>
-            <a:pPr algn="l" indent="0" marL="0">
-              <a:lnSpc>
-                <a:spcPts val="1620"/>
-              </a:lnSpc>
-              <a:spcAft>
-                <a:spcPts val="300"/>
-              </a:spcAft>
-              <a:buNone/>
-            </a:pPr>
-            <a:r>
-              <a:rPr lang="en-US" sz="1200" i="1" dirty="0">
-                <a:solidFill>
-                  <a:srgbClr val="1C2833"/>
-                </a:solidFill>
-                <a:latin typeface="Arial" pitchFamily="34" charset="0"/>
-                <a:ea typeface="Arial" pitchFamily="34" charset="-122"/>
-                <a:cs typeface="Arial" pitchFamily="34" charset="-120"/>
-              </a:rPr>
-              <a:t>āsana</a:t>
-            </a:r>
-            <a:pPr algn="l" indent="0" marL="0">
-              <a:lnSpc>
-                <a:spcPts val="1620"/>
-              </a:lnSpc>
-              <a:spcAft>
-                <a:spcPts val="300"/>
-              </a:spcAft>
-              <a:buNone/>
-            </a:pPr>
-            <a:r>
-              <a:rPr lang="en-US" sz="1200" dirty="0">
-                <a:solidFill>
-                  <a:srgbClr val="1C2833"/>
-                </a:solidFill>
-                <a:latin typeface="Arial" pitchFamily="34" charset="0"/>
-                <a:ea typeface="Arial" pitchFamily="34" charset="-122"/>
-                <a:cs typeface="Arial" pitchFamily="34" charset="-120"/>
-              </a:rPr>
-              <a:t> (posture) and </a:t>
-            </a:r>
-            <a:pPr algn="l" indent="0" marL="0">
-              <a:lnSpc>
-                <a:spcPts val="1620"/>
-              </a:lnSpc>
-              <a:spcAft>
-                <a:spcPts val="300"/>
-              </a:spcAft>
-              <a:buNone/>
-            </a:pPr>
-            <a:r>
-              <a:rPr lang="en-US" sz="1200" i="1" dirty="0">
-                <a:solidFill>
-                  <a:srgbClr val="1C2833"/>
-                </a:solidFill>
-                <a:latin typeface="Arial" pitchFamily="34" charset="0"/>
-                <a:ea typeface="Arial" pitchFamily="34" charset="-122"/>
-                <a:cs typeface="Arial" pitchFamily="34" charset="-120"/>
-              </a:rPr>
-              <a:t>prāṇāyāma</a:t>
-            </a:r>
-            <a:pPr algn="l" indent="0" marL="0">
-              <a:lnSpc>
-                <a:spcPts val="1620"/>
-              </a:lnSpc>
-              <a:spcAft>
-                <a:spcPts val="300"/>
-              </a:spcAft>
-              <a:buNone/>
-            </a:pPr>
-            <a:r>
-              <a:rPr lang="en-US" sz="1200" dirty="0">
-                <a:solidFill>
-                  <a:srgbClr val="1C2833"/>
-                </a:solidFill>
-                <a:latin typeface="Arial" pitchFamily="34" charset="0"/>
-                <a:ea typeface="Arial" pitchFamily="34" charset="-122"/>
-                <a:cs typeface="Arial" pitchFamily="34" charset="-120"/>
-              </a:rPr>
-              <a:t> (breath). The other six limbs are introduced briefly on Day 2.</a:t>
-            </a:r>
-            <a:endParaRPr lang="en-US" sz="1200" dirty="0"/>
-          </a:p>
-        </p:txBody>
-      </p:sp>
-      <p:sp>
-        <p:nvSpPr>
-          <p:cNvPr id="11" name="Text 9"/>
-          <p:cNvSpPr/>
-          <p:nvPr/>
-        </p:nvSpPr>
-        <p:spPr>
-          <a:xfrm>
-            <a:off x="406301" y="4644033"/>
+            <a:off x="406301" y="4434929"/>
             <a:ext cx="8498026" cy="213271"/>
           </a:xfrm>
           <a:prstGeom prst="rect">
@@ -6394,7 +7572,7 @@
                 <a:ea typeface="Georgia" pitchFamily="34" charset="-122"/>
                 <a:cs typeface="Georgia" pitchFamily="34" charset="-120"/>
               </a:rPr>
-              <a:t>Practice (15 min) — Tāḍāsana</a:t>
+              <a:t>Core (15 min) — What is yoga?</a:t>
             </a:r>
             <a:endParaRPr lang="en-US" sz="1800" dirty="0"/>
           </a:p>
@@ -6408,8 +7586,8 @@
         </p:nvSpPr>
         <p:spPr>
           <a:xfrm>
-            <a:off x="406301" y="870942"/>
-            <a:ext cx="8498026" cy="213271"/>
+            <a:off x="634901" y="883593"/>
+            <a:ext cx="8102798" cy="281880"/>
           </a:xfrm>
           <a:prstGeom prst="rect">
             <a:avLst/>
@@ -6421,17 +7599,15 @@
           <a:bodyPr wrap="square" lIns="0" tIns="0" rIns="0" bIns="0" rtlCol="0" anchor="t"/>
           <a:lstStyle/>
           <a:p>
-            <a:pPr algn="l" indent="0" marL="0">
-              <a:lnSpc>
-                <a:spcPts val="1680"/>
-              </a:lnSpc>
-              <a:spcBef>
-                <a:spcPts val="300"/>
-              </a:spcBef>
-              <a:spcAft>
-                <a:spcPts val="300"/>
-              </a:spcAft>
-              <a:buNone/>
+            <a:pPr algn="l" marL="342900" indent="-342900">
+              <a:lnSpc>
+                <a:spcPts val="1620"/>
+              </a:lnSpc>
+              <a:spcAft>
+                <a:spcPts val="300"/>
+              </a:spcAft>
+              <a:buSzPct val="100000"/>
+              <a:buChar char="•"/>
             </a:pPr>
             <a:r>
               <a:rPr lang="en-US" sz="1200" dirty="0">
@@ -6442,7 +7618,27 @@
                 <a:ea typeface="Arial" pitchFamily="34" charset="-122"/>
                 <a:cs typeface="Arial" pitchFamily="34" charset="-120"/>
               </a:rPr>
-              <a:t>– Stand at the top of your mat. Feet hip-width apart.</a:t>
+              <a:t>Question on the board: </a:t>
+            </a:r>
+            <a:pPr algn="l" indent="0" marL="0">
+              <a:lnSpc>
+                <a:spcPts val="1620"/>
+              </a:lnSpc>
+              <a:spcAft>
+                <a:spcPts val="300"/>
+              </a:spcAft>
+              <a:buNone/>
+            </a:pPr>
+            <a:r>
+              <a:rPr lang="en-US" sz="1200" i="1" dirty="0">
+                <a:solidFill>
+                  <a:srgbClr val="1C2833"/>
+                </a:solidFill>
+                <a:latin typeface="Arial" pitchFamily="34" charset="0"/>
+                <a:ea typeface="Arial" pitchFamily="34" charset="-122"/>
+                <a:cs typeface="Arial" pitchFamily="34" charset="-120"/>
+              </a:rPr>
+              <a:t>"What does the word 'yoga' mean to you right now, before this module?"</a:t>
             </a:r>
             <a:endParaRPr lang="en-US" sz="1200" dirty="0"/>
           </a:p>
@@ -6456,8 +7652,8 @@
         </p:nvSpPr>
         <p:spPr>
           <a:xfrm>
-            <a:off x="634901" y="1173063"/>
-            <a:ext cx="8102798" cy="487561"/>
+            <a:off x="634901" y="1266974"/>
+            <a:ext cx="8102798" cy="525661"/>
           </a:xfrm>
           <a:prstGeom prst="rect">
             <a:avLst/>
@@ -6480,15 +7676,39 @@
               <a:buChar char="•"/>
             </a:pPr>
             <a:r>
-              <a:rPr lang="en-US" sz="1200" i="1" dirty="0">
-                <a:solidFill>
-                  <a:srgbClr val="1C2833"/>
-                </a:solidFill>
-                <a:latin typeface="Arial" pitchFamily="34" charset="0"/>
-                <a:ea typeface="Arial" pitchFamily="34" charset="-122"/>
-                <a:cs typeface="Arial" pitchFamily="34" charset="-120"/>
-              </a:rPr>
-              <a:t>"Press your big toes, little toes, and heels firmly into the mat. Lift your knee caps without locking your knees. Lengthen up through the crown of your head as if a string is gently pulling you upward."</a:t>
+              <a:rPr lang="en-US" sz="1200" dirty="0">
+                <a:solidFill>
+                  <a:srgbClr val="1C2833"/>
+                </a:solidFill>
+                <a:latin typeface="Arial" pitchFamily="34" charset="0"/>
+                <a:ea typeface="Arial" pitchFamily="34" charset="-122"/>
+                <a:cs typeface="Arial" pitchFamily="34" charset="-120"/>
+              </a:rPr>
+              <a:t>Take 4 student answers. (Common: "stretching," "exercise from India," "a religion," "what my mom does on YouTube.")</a:t>
+            </a:r>
+            <a:endParaRPr lang="en-US" sz="1200" dirty="0"/>
+          </a:p>
+          <a:p>
+            <a:pPr algn="l" marL="342900" indent="-342900">
+              <a:lnSpc>
+                <a:spcPts val="1620"/>
+              </a:lnSpc>
+              <a:spcAft>
+                <a:spcPts val="300"/>
+              </a:spcAft>
+              <a:buSzPct val="100000"/>
+              <a:buChar char="•"/>
+            </a:pPr>
+            <a:r>
+              <a:rPr lang="en-US" sz="1200" dirty="0">
+                <a:solidFill>
+                  <a:srgbClr val="1C2833"/>
+                </a:solidFill>
+                <a:latin typeface="Arial" pitchFamily="34" charset="0"/>
+                <a:ea typeface="Arial" pitchFamily="34" charset="-122"/>
+                <a:cs typeface="Arial" pitchFamily="34" charset="-120"/>
+              </a:rPr>
+              <a:t>Don't judge. Write them all.</a:t>
             </a:r>
             <a:endParaRPr lang="en-US" sz="1200" dirty="0"/>
           </a:p>
@@ -6502,8 +7722,8 @@
         </p:nvSpPr>
         <p:spPr>
           <a:xfrm>
-            <a:off x="406301" y="1749475"/>
-            <a:ext cx="8498026" cy="426541"/>
+            <a:off x="634901" y="1894136"/>
+            <a:ext cx="8102798" cy="281880"/>
           </a:xfrm>
           <a:prstGeom prst="rect">
             <a:avLst/>
@@ -6515,13 +7735,31 @@
           <a:bodyPr wrap="square" lIns="0" tIns="0" rIns="0" bIns="0" rtlCol="0" anchor="t"/>
           <a:lstStyle/>
           <a:p>
-            <a:pPr algn="l" indent="0" marL="0">
-              <a:lnSpc>
-                <a:spcPts val="1680"/>
-              </a:lnSpc>
-              <a:spcBef>
-                <a:spcPts val="300"/>
-              </a:spcBef>
+            <a:pPr algn="l" marL="342900" indent="-342900">
+              <a:lnSpc>
+                <a:spcPts val="1620"/>
+              </a:lnSpc>
+              <a:spcAft>
+                <a:spcPts val="300"/>
+              </a:spcAft>
+              <a:buSzPct val="100000"/>
+              <a:buChar char="•"/>
+            </a:pPr>
+            <a:r>
+              <a:rPr lang="en-US" sz="1200" b="1" dirty="0">
+                <a:solidFill>
+                  <a:srgbClr val="1C2833"/>
+                </a:solidFill>
+                <a:latin typeface="Arial" pitchFamily="34" charset="0"/>
+                <a:ea typeface="Arial" pitchFamily="34" charset="-122"/>
+                <a:cs typeface="Arial" pitchFamily="34" charset="-120"/>
+              </a:rPr>
+              <a:t>Two definitions to remember</a:t>
+            </a:r>
+            <a:pPr algn="l" indent="0" marL="0">
+              <a:lnSpc>
+                <a:spcPts val="1620"/>
+              </a:lnSpc>
               <a:spcAft>
                 <a:spcPts val="300"/>
               </a:spcAft>
@@ -6536,53 +7774,7 @@
                 <a:ea typeface="Arial" pitchFamily="34" charset="-122"/>
                 <a:cs typeface="Arial" pitchFamily="34" charset="-120"/>
               </a:rPr>
-              <a:t>– Arms relaxed at the sides. – Hold for 30 seconds. Breathe naturally. – Release. Sit. Notice: </a:t>
-            </a:r>
-            <a:pPr algn="l" indent="0" marL="0">
-              <a:lnSpc>
-                <a:spcPts val="1680"/>
-              </a:lnSpc>
-              <a:spcBef>
-                <a:spcPts val="300"/>
-              </a:spcBef>
-              <a:spcAft>
-                <a:spcPts val="300"/>
-              </a:spcAft>
-              <a:buNone/>
-            </a:pPr>
-            <a:r>
-              <a:rPr lang="en-US" sz="1200" i="1" dirty="0">
-                <a:solidFill>
-                  <a:srgbClr val="1C2833"/>
-                </a:solidFill>
-                <a:latin typeface="Arial" pitchFamily="34" charset="0"/>
-                <a:ea typeface="Arial" pitchFamily="34" charset="-122"/>
-                <a:cs typeface="Arial" pitchFamily="34" charset="-120"/>
-              </a:rPr>
-              <a:t>"Did anything feel different after that pose?"</a:t>
-            </a:r>
-            <a:pPr algn="l" indent="0" marL="0">
-              <a:lnSpc>
-                <a:spcPts val="1680"/>
-              </a:lnSpc>
-              <a:spcBef>
-                <a:spcPts val="300"/>
-              </a:spcBef>
-              <a:spcAft>
-                <a:spcPts val="300"/>
-              </a:spcAft>
-              <a:buNone/>
-            </a:pPr>
-            <a:r>
-              <a:rPr lang="en-US" sz="1200" dirty="0">
-                <a:solidFill>
-                  <a:srgbClr val="1C2833"/>
-                </a:solidFill>
-                <a:latin typeface="Arial" pitchFamily="34" charset="0"/>
-                <a:ea typeface="Arial" pitchFamily="34" charset="-122"/>
-                <a:cs typeface="Arial" pitchFamily="34" charset="-120"/>
-              </a:rPr>
-              <a:t> – Repeat twice more. Each hold a little longer.</a:t>
+              <a:t> (write boxed on board):</a:t>
             </a:r>
             <a:endParaRPr lang="en-US" sz="1200" dirty="0"/>
           </a:p>
@@ -6740,7 +7932,7 @@
                 <a:ea typeface="Georgia" pitchFamily="34" charset="-122"/>
                 <a:cs typeface="Georgia" pitchFamily="34" charset="-120"/>
               </a:rPr>
-              <a:t>Seated breath observation (5 min)</a:t>
+              <a:t>Core (15 min) — What is yoga? (cont.)</a:t>
             </a:r>
             <a:endParaRPr lang="en-US" sz="1800" dirty="0"/>
           </a:p>
@@ -6754,111 +7946,50 @@
         </p:nvSpPr>
         <p:spPr>
           <a:xfrm>
-            <a:off x="406301" y="870942"/>
-            <a:ext cx="8498026" cy="213271"/>
-          </a:xfrm>
-          <a:prstGeom prst="rect">
-            <a:avLst/>
-          </a:prstGeom>
-          <a:noFill/>
+            <a:off x="406301" y="883593"/>
+            <a:ext cx="8331398" cy="842963"/>
+          </a:xfrm>
+          <a:prstGeom prst="rect">
+            <a:avLst/>
+          </a:prstGeom>
+          <a:solidFill>
+            <a:srgbClr val="F4F8F9"/>
+          </a:solidFill>
           <a:ln/>
         </p:spPr>
         <p:txBody>
-          <a:bodyPr wrap="square" lIns="0" tIns="0" rIns="0" bIns="0" rtlCol="0" anchor="t"/>
-          <a:lstStyle/>
-          <a:p>
-            <a:pPr algn="l" indent="0" marL="0">
-              <a:lnSpc>
-                <a:spcPts val="1680"/>
-              </a:lnSpc>
-              <a:spcBef>
-                <a:spcPts val="300"/>
-              </a:spcBef>
-              <a:spcAft>
-                <a:spcPts val="300"/>
-              </a:spcAft>
-              <a:buNone/>
-            </a:pPr>
-            <a:r>
-              <a:rPr lang="en-US" sz="1200" dirty="0">
-                <a:solidFill>
-                  <a:srgbClr val="1C2833"/>
-                </a:solidFill>
-                <a:latin typeface="Arial" pitchFamily="34" charset="0"/>
-                <a:ea typeface="Arial" pitchFamily="34" charset="-122"/>
-                <a:cs typeface="Arial" pitchFamily="34" charset="-120"/>
-              </a:rPr>
-              <a:t>– Sit back in sukhāsana. – Eyes closed.</a:t>
-            </a:r>
-            <a:endParaRPr lang="en-US" sz="1200" dirty="0"/>
-          </a:p>
-        </p:txBody>
-      </p:sp>
-      <p:sp>
-        <p:nvSpPr>
-          <p:cNvPr id="5" name="Text 3"/>
+          <a:bodyPr wrap="square" rtlCol="0" anchor="ctr"/>
+          <a:lstStyle/>
+          <a:p>
+            <a:pPr indent="0" marL="0">
+              <a:buNone/>
+            </a:pPr>
+            <a:endParaRPr lang="en-US" dirty="0"/>
+          </a:p>
+        </p:txBody>
+      </p:sp>
+      <p:sp>
+        <p:nvSpPr>
+          <p:cNvPr id="5" name="Shape 3"/>
           <p:cNvSpPr/>
           <p:nvPr/>
         </p:nvSpPr>
         <p:spPr>
           <a:xfrm>
-            <a:off x="634901" y="1173063"/>
-            <a:ext cx="8102798" cy="281880"/>
-          </a:xfrm>
-          <a:prstGeom prst="rect">
+            <a:off x="434876" y="883593"/>
+            <a:ext cx="0" cy="842963"/>
+          </a:xfrm>
+          <a:prstGeom prst="line">
             <a:avLst/>
           </a:prstGeom>
           <a:noFill/>
-          <a:ln/>
-        </p:spPr>
-        <p:txBody>
-          <a:bodyPr wrap="square" lIns="0" tIns="0" rIns="0" bIns="0" rtlCol="0" anchor="t"/>
-          <a:lstStyle/>
-          <a:p>
-            <a:pPr algn="l" marL="342900" indent="-342900">
-              <a:lnSpc>
-                <a:spcPts val="1620"/>
-              </a:lnSpc>
-              <a:spcAft>
-                <a:spcPts val="300"/>
-              </a:spcAft>
-              <a:buSzPct val="100000"/>
-              <a:buChar char="•"/>
-            </a:pPr>
-            <a:r>
-              <a:rPr lang="en-US" sz="1200" b="1" dirty="0">
-                <a:solidFill>
-                  <a:srgbClr val="1C2833"/>
-                </a:solidFill>
-                <a:latin typeface="Arial" pitchFamily="34" charset="0"/>
-                <a:ea typeface="Arial" pitchFamily="34" charset="-122"/>
-                <a:cs typeface="Arial" pitchFamily="34" charset="-120"/>
-              </a:rPr>
-              <a:t>Just observe your breath for 60 seconds.</a:t>
-            </a:r>
-            <a:pPr algn="l" indent="0" marL="0">
-              <a:lnSpc>
-                <a:spcPts val="1620"/>
-              </a:lnSpc>
-              <a:spcAft>
-                <a:spcPts val="300"/>
-              </a:spcAft>
-              <a:buNone/>
-            </a:pPr>
-            <a:r>
-              <a:rPr lang="en-US" sz="1200" dirty="0">
-                <a:solidFill>
-                  <a:srgbClr val="1C2833"/>
-                </a:solidFill>
-                <a:latin typeface="Arial" pitchFamily="34" charset="0"/>
-                <a:ea typeface="Arial" pitchFamily="34" charset="-122"/>
-                <a:cs typeface="Arial" pitchFamily="34" charset="-120"/>
-              </a:rPr>
-              <a:t> Don't try to change it. Just notice.</a:t>
-            </a:r>
-            <a:endParaRPr lang="en-US" sz="1200" dirty="0"/>
-          </a:p>
-        </p:txBody>
+          <a:ln w="57150">
+            <a:solidFill>
+              <a:srgbClr val="FE4447"/>
+            </a:solidFill>
+            <a:prstDash val="solid"/>
+          </a:ln>
+        </p:spPr>
       </p:sp>
       <p:sp>
         <p:nvSpPr>
@@ -6868,8 +7999,8 @@
         </p:nvSpPr>
         <p:spPr>
           <a:xfrm>
-            <a:off x="406301" y="1543794"/>
-            <a:ext cx="8498026" cy="426541"/>
+            <a:off x="692051" y="1074093"/>
+            <a:ext cx="7973389" cy="461963"/>
           </a:xfrm>
           <a:prstGeom prst="rect">
             <a:avLst/>
@@ -6883,7 +8014,7 @@
           <a:p>
             <a:pPr algn="l" indent="0" marL="0">
               <a:lnSpc>
-                <a:spcPts val="1680"/>
+                <a:spcPts val="1820"/>
               </a:lnSpc>
               <a:spcBef>
                 <a:spcPts val="300"/>
@@ -6894,19 +8025,19 @@
               <a:buNone/>
             </a:pPr>
             <a:r>
-              <a:rPr lang="en-US" sz="1200" dirty="0">
-                <a:solidFill>
-                  <a:srgbClr val="1C2833"/>
-                </a:solidFill>
-                <a:latin typeface="Arial" pitchFamily="34" charset="0"/>
-                <a:ea typeface="Arial" pitchFamily="34" charset="-122"/>
-                <a:cs typeface="Arial" pitchFamily="34" charset="-120"/>
-              </a:rPr>
-              <a:t>– After 60 sec: </a:t>
-            </a:r>
-            <a:pPr algn="l" indent="0" marL="0">
-              <a:lnSpc>
-                <a:spcPts val="1680"/>
+              <a:rPr lang="en-US" sz="1300" b="1" i="1" dirty="0">
+                <a:solidFill>
+                  <a:srgbClr val="1C2833"/>
+                </a:solidFill>
+                <a:latin typeface="Georgia" pitchFamily="34" charset="0"/>
+                <a:ea typeface="Georgia" pitchFamily="34" charset="-122"/>
+                <a:cs typeface="Georgia" pitchFamily="34" charset="-120"/>
+              </a:rPr>
+              <a:t>Patañjali (c. 2nd c. BCE – 4th c. CE):</a:t>
+            </a:r>
+            <a:pPr algn="l" indent="0" marL="0">
+              <a:lnSpc>
+                <a:spcPts val="1820"/>
               </a:lnSpc>
               <a:spcBef>
                 <a:spcPts val="300"/>
@@ -6917,19 +8048,19 @@
               <a:buNone/>
             </a:pPr>
             <a:r>
-              <a:rPr lang="en-US" sz="1200" i="1" dirty="0">
-                <a:solidFill>
-                  <a:srgbClr val="1C2833"/>
-                </a:solidFill>
-                <a:latin typeface="Arial" pitchFamily="34" charset="0"/>
-                <a:ea typeface="Arial" pitchFamily="34" charset="-122"/>
-                <a:cs typeface="Arial" pitchFamily="34" charset="-120"/>
-              </a:rPr>
-              <a:t>"How many breaths did you count? Was your mind quiet, busy, somewhere else?"</a:t>
-            </a:r>
-            <a:pPr algn="l" indent="0" marL="0">
-              <a:lnSpc>
-                <a:spcPts val="1680"/>
+              <a:rPr lang="en-US" sz="1300" dirty="0">
+                <a:solidFill>
+                  <a:srgbClr val="1C2833"/>
+                </a:solidFill>
+                <a:latin typeface="Georgia" pitchFamily="34" charset="0"/>
+                <a:ea typeface="Georgia" pitchFamily="34" charset="-122"/>
+                <a:cs typeface="Georgia" pitchFamily="34" charset="-120"/>
+              </a:rPr>
+              <a:t> </a:t>
+            </a:r>
+            <a:pPr algn="l" indent="0" marL="0">
+              <a:lnSpc>
+                <a:spcPts val="1820"/>
               </a:lnSpc>
               <a:spcBef>
                 <a:spcPts val="300"/>
@@ -6940,23 +8071,216 @@
               <a:buNone/>
             </a:pPr>
             <a:r>
-              <a:rPr lang="en-US" sz="1200" dirty="0">
-                <a:solidFill>
-                  <a:srgbClr val="1C2833"/>
-                </a:solidFill>
-                <a:latin typeface="Arial" pitchFamily="34" charset="0"/>
-                <a:ea typeface="Arial" pitchFamily="34" charset="-122"/>
-                <a:cs typeface="Arial" pitchFamily="34" charset="-120"/>
-              </a:rPr>
-              <a:t> — quick share, 2 students.</a:t>
-            </a:r>
-            <a:endParaRPr lang="en-US" sz="1200" dirty="0"/>
+              <a:rPr lang="en-US" sz="1300" i="1" dirty="0">
+                <a:solidFill>
+                  <a:srgbClr val="1C2833"/>
+                </a:solidFill>
+                <a:latin typeface="Georgia" pitchFamily="34" charset="0"/>
+                <a:ea typeface="Georgia" pitchFamily="34" charset="-122"/>
+                <a:cs typeface="Georgia" pitchFamily="34" charset="-120"/>
+              </a:rPr>
+              <a:t>"yogaś citta-vṛtti-nirodhaḥ"</a:t>
+            </a:r>
+            <a:pPr algn="l" indent="0" marL="0">
+              <a:lnSpc>
+                <a:spcPts val="1820"/>
+              </a:lnSpc>
+              <a:spcBef>
+                <a:spcPts val="300"/>
+              </a:spcBef>
+              <a:spcAft>
+                <a:spcPts val="300"/>
+              </a:spcAft>
+              <a:buNone/>
+            </a:pPr>
+            <a:r>
+              <a:rPr lang="en-US" sz="1300" dirty="0">
+                <a:solidFill>
+                  <a:srgbClr val="1C2833"/>
+                </a:solidFill>
+                <a:latin typeface="Georgia" pitchFamily="34" charset="0"/>
+                <a:ea typeface="Georgia" pitchFamily="34" charset="-122"/>
+                <a:cs typeface="Georgia" pitchFamily="34" charset="-120"/>
+              </a:rPr>
+              <a:t> — "Yoga is the settling of the fluctuations of the mind." (Yoga Sūtra 1.2)</a:t>
+            </a:r>
+            <a:endParaRPr lang="en-US" sz="1300" dirty="0"/>
           </a:p>
         </p:txBody>
       </p:sp>
       <p:sp>
         <p:nvSpPr>
           <p:cNvPr id="7" name="Text 5"/>
+          <p:cNvSpPr/>
+          <p:nvPr/>
+        </p:nvSpPr>
+        <p:spPr>
+          <a:xfrm>
+            <a:off x="406301" y="1828056"/>
+            <a:ext cx="8331398" cy="842963"/>
+          </a:xfrm>
+          <a:prstGeom prst="rect">
+            <a:avLst/>
+          </a:prstGeom>
+          <a:solidFill>
+            <a:srgbClr val="F4F8F9"/>
+          </a:solidFill>
+          <a:ln/>
+        </p:spPr>
+        <p:txBody>
+          <a:bodyPr wrap="square" rtlCol="0" anchor="ctr"/>
+          <a:lstStyle/>
+          <a:p>
+            <a:pPr indent="0" marL="0">
+              <a:buNone/>
+            </a:pPr>
+            <a:endParaRPr lang="en-US" dirty="0"/>
+          </a:p>
+        </p:txBody>
+      </p:sp>
+      <p:sp>
+        <p:nvSpPr>
+          <p:cNvPr id="8" name="Shape 6"/>
+          <p:cNvSpPr/>
+          <p:nvPr/>
+        </p:nvSpPr>
+        <p:spPr>
+          <a:xfrm>
+            <a:off x="434876" y="1828056"/>
+            <a:ext cx="0" cy="842963"/>
+          </a:xfrm>
+          <a:prstGeom prst="line">
+            <a:avLst/>
+          </a:prstGeom>
+          <a:noFill/>
+          <a:ln w="57150">
+            <a:solidFill>
+              <a:srgbClr val="FE4447"/>
+            </a:solidFill>
+            <a:prstDash val="solid"/>
+          </a:ln>
+        </p:spPr>
+      </p:sp>
+      <p:sp>
+        <p:nvSpPr>
+          <p:cNvPr id="9" name="Text 7"/>
+          <p:cNvSpPr/>
+          <p:nvPr/>
+        </p:nvSpPr>
+        <p:spPr>
+          <a:xfrm>
+            <a:off x="692051" y="2018556"/>
+            <a:ext cx="7973389" cy="461963"/>
+          </a:xfrm>
+          <a:prstGeom prst="rect">
+            <a:avLst/>
+          </a:prstGeom>
+          <a:noFill/>
+          <a:ln/>
+        </p:spPr>
+        <p:txBody>
+          <a:bodyPr wrap="square" lIns="0" tIns="0" rIns="0" bIns="0" rtlCol="0" anchor="t"/>
+          <a:lstStyle/>
+          <a:p>
+            <a:pPr algn="l" indent="0" marL="0">
+              <a:lnSpc>
+                <a:spcPts val="1820"/>
+              </a:lnSpc>
+              <a:spcBef>
+                <a:spcPts val="300"/>
+              </a:spcBef>
+              <a:spcAft>
+                <a:spcPts val="300"/>
+              </a:spcAft>
+              <a:buNone/>
+            </a:pPr>
+            <a:r>
+              <a:rPr lang="en-US" sz="1300" b="1" i="1" dirty="0">
+                <a:solidFill>
+                  <a:srgbClr val="1C2833"/>
+                </a:solidFill>
+                <a:latin typeface="Georgia" pitchFamily="34" charset="0"/>
+                <a:ea typeface="Georgia" pitchFamily="34" charset="-122"/>
+                <a:cs typeface="Georgia" pitchFamily="34" charset="-120"/>
+              </a:rPr>
+              <a:t>Bhagavad-gītā (Krishna to Arjuna, c. 4th c. BCE – 2nd c. CE):</a:t>
+            </a:r>
+            <a:pPr algn="l" indent="0" marL="0">
+              <a:lnSpc>
+                <a:spcPts val="1820"/>
+              </a:lnSpc>
+              <a:spcBef>
+                <a:spcPts val="300"/>
+              </a:spcBef>
+              <a:spcAft>
+                <a:spcPts val="300"/>
+              </a:spcAft>
+              <a:buNone/>
+            </a:pPr>
+            <a:r>
+              <a:rPr lang="en-US" sz="1300" dirty="0">
+                <a:solidFill>
+                  <a:srgbClr val="1C2833"/>
+                </a:solidFill>
+                <a:latin typeface="Georgia" pitchFamily="34" charset="0"/>
+                <a:ea typeface="Georgia" pitchFamily="34" charset="-122"/>
+                <a:cs typeface="Georgia" pitchFamily="34" charset="-120"/>
+              </a:rPr>
+              <a:t> </a:t>
+            </a:r>
+            <a:pPr algn="l" indent="0" marL="0">
+              <a:lnSpc>
+                <a:spcPts val="1820"/>
+              </a:lnSpc>
+              <a:spcBef>
+                <a:spcPts val="300"/>
+              </a:spcBef>
+              <a:spcAft>
+                <a:spcPts val="300"/>
+              </a:spcAft>
+              <a:buNone/>
+            </a:pPr>
+            <a:r>
+              <a:rPr lang="en-US" sz="1300" i="1" dirty="0">
+                <a:solidFill>
+                  <a:srgbClr val="1C2833"/>
+                </a:solidFill>
+                <a:latin typeface="Georgia" pitchFamily="34" charset="0"/>
+                <a:ea typeface="Georgia" pitchFamily="34" charset="-122"/>
+                <a:cs typeface="Georgia" pitchFamily="34" charset="-120"/>
+              </a:rPr>
+              <a:t>"yogaḥ karmasu kauśalam"</a:t>
+            </a:r>
+            <a:pPr algn="l" indent="0" marL="0">
+              <a:lnSpc>
+                <a:spcPts val="1820"/>
+              </a:lnSpc>
+              <a:spcBef>
+                <a:spcPts val="300"/>
+              </a:spcBef>
+              <a:spcAft>
+                <a:spcPts val="300"/>
+              </a:spcAft>
+              <a:buNone/>
+            </a:pPr>
+            <a:r>
+              <a:rPr lang="en-US" sz="1300" dirty="0">
+                <a:solidFill>
+                  <a:srgbClr val="1C2833"/>
+                </a:solidFill>
+                <a:latin typeface="Georgia" pitchFamily="34" charset="0"/>
+                <a:ea typeface="Georgia" pitchFamily="34" charset="-122"/>
+                <a:cs typeface="Georgia" pitchFamily="34" charset="-120"/>
+              </a:rPr>
+              <a:t> — "Yoga is skill in action." (BG 2.50)</a:t>
+            </a:r>
+            <a:endParaRPr lang="en-US" sz="1300" dirty="0"/>
+          </a:p>
+        </p:txBody>
+      </p:sp>
+      <p:sp>
+        <p:nvSpPr>
+          <p:cNvPr id="10" name="Text 8"/>
           <p:cNvSpPr/>
           <p:nvPr/>
         </p:nvSpPr>
@@ -7106,7 +8430,7 @@
                 <a:ea typeface="Georgia" pitchFamily="34" charset="-122"/>
                 <a:cs typeface="Georgia" pitchFamily="34" charset="-120"/>
               </a:rPr>
-              <a:t>Wrap-up (5 min)</a:t>
+              <a:t>Core (15 min) — What is yoga? (cont.)</a:t>
             </a:r>
             <a:endParaRPr lang="en-US" sz="1800" dirty="0"/>
           </a:p>
@@ -7120,8 +8444,8 @@
         </p:nvSpPr>
         <p:spPr>
           <a:xfrm>
-            <a:off x="406301" y="870942"/>
-            <a:ext cx="8498026" cy="639812"/>
+            <a:off x="634901" y="883593"/>
+            <a:ext cx="8102798" cy="731341"/>
           </a:xfrm>
           <a:prstGeom prst="rect">
             <a:avLst/>
@@ -7133,13 +8457,31 @@
           <a:bodyPr wrap="square" lIns="0" tIns="0" rIns="0" bIns="0" rtlCol="0" anchor="t"/>
           <a:lstStyle/>
           <a:p>
-            <a:pPr algn="l" indent="0" marL="0">
-              <a:lnSpc>
-                <a:spcPts val="1680"/>
-              </a:lnSpc>
-              <a:spcBef>
-                <a:spcPts val="300"/>
-              </a:spcBef>
+            <a:pPr algn="l" marL="342900" indent="-342900">
+              <a:lnSpc>
+                <a:spcPts val="1620"/>
+              </a:lnSpc>
+              <a:spcAft>
+                <a:spcPts val="300"/>
+              </a:spcAft>
+              <a:buSzPct val="100000"/>
+              <a:buChar char="•"/>
+            </a:pPr>
+            <a:r>
+              <a:rPr lang="en-US" sz="1200" i="1" dirty="0">
+                <a:solidFill>
+                  <a:srgbClr val="1C2833"/>
+                </a:solidFill>
+                <a:latin typeface="Arial" pitchFamily="34" charset="0"/>
+                <a:ea typeface="Arial" pitchFamily="34" charset="-122"/>
+                <a:cs typeface="Arial" pitchFamily="34" charset="-120"/>
+              </a:rPr>
+              <a:t>"Neither of these is primarily about stretching."</a:t>
+            </a:r>
+            <a:pPr algn="l" indent="0" marL="0">
+              <a:lnSpc>
+                <a:spcPts val="1620"/>
+              </a:lnSpc>
               <a:spcAft>
                 <a:spcPts val="300"/>
               </a:spcAft>
@@ -7154,15 +8496,56 @@
                 <a:ea typeface="Arial" pitchFamily="34" charset="-122"/>
                 <a:cs typeface="Arial" pitchFamily="34" charset="-120"/>
               </a:rPr>
-              <a:t>– Three-question recap (chorus): – Who was Patañjali? </a:t>
-            </a:r>
-            <a:pPr algn="l" indent="0" marL="0">
-              <a:lnSpc>
-                <a:spcPts val="1680"/>
-              </a:lnSpc>
-              <a:spcBef>
-                <a:spcPts val="300"/>
-              </a:spcBef>
+              <a:t> Pause for that to land.</a:t>
+            </a:r>
+            <a:endParaRPr lang="en-US" sz="1200" dirty="0"/>
+          </a:p>
+          <a:p>
+            <a:pPr algn="l" marL="342900" indent="-342900">
+              <a:lnSpc>
+                <a:spcPts val="1620"/>
+              </a:lnSpc>
+              <a:spcAft>
+                <a:spcPts val="300"/>
+              </a:spcAft>
+              <a:buSzPct val="100000"/>
+              <a:buChar char="•"/>
+            </a:pPr>
+            <a:r>
+              <a:rPr lang="en-US" sz="1200" b="1" dirty="0">
+                <a:solidFill>
+                  <a:srgbClr val="1C2833"/>
+                </a:solidFill>
+                <a:latin typeface="Arial" pitchFamily="34" charset="0"/>
+                <a:ea typeface="Arial" pitchFamily="34" charset="-122"/>
+                <a:cs typeface="Arial" pitchFamily="34" charset="-120"/>
+              </a:rPr>
+              <a:t>The word itself</a:t>
+            </a:r>
+            <a:pPr algn="l" indent="0" marL="0">
+              <a:lnSpc>
+                <a:spcPts val="1620"/>
+              </a:lnSpc>
+              <a:spcAft>
+                <a:spcPts val="300"/>
+              </a:spcAft>
+              <a:buNone/>
+            </a:pPr>
+            <a:r>
+              <a:rPr lang="en-US" sz="1200" dirty="0">
+                <a:solidFill>
+                  <a:srgbClr val="1C2833"/>
+                </a:solidFill>
+                <a:latin typeface="Arial" pitchFamily="34" charset="0"/>
+                <a:ea typeface="Arial" pitchFamily="34" charset="-122"/>
+                <a:cs typeface="Arial" pitchFamily="34" charset="-120"/>
+              </a:rPr>
+              <a:t> — </a:t>
+            </a:r>
+            <a:pPr algn="l" indent="0" marL="0">
+              <a:lnSpc>
+                <a:spcPts val="1620"/>
+              </a:lnSpc>
               <a:spcAft>
                 <a:spcPts val="300"/>
               </a:spcAft>
@@ -7177,15 +8560,12 @@
                 <a:ea typeface="Arial" pitchFamily="34" charset="-122"/>
                 <a:cs typeface="Arial" pitchFamily="34" charset="-120"/>
               </a:rPr>
-              <a:t>(The systematiser of yoga's eight limbs.)</a:t>
-            </a:r>
-            <a:pPr algn="l" indent="0" marL="0">
-              <a:lnSpc>
-                <a:spcPts val="1680"/>
-              </a:lnSpc>
-              <a:spcBef>
-                <a:spcPts val="300"/>
-              </a:spcBef>
+              <a:t>yoga</a:t>
+            </a:r>
+            <a:pPr algn="l" indent="0" marL="0">
+              <a:lnSpc>
+                <a:spcPts val="1620"/>
+              </a:lnSpc>
               <a:spcAft>
                 <a:spcPts val="300"/>
               </a:spcAft>
@@ -7200,15 +8580,12 @@
                 <a:ea typeface="Arial" pitchFamily="34" charset="-122"/>
                 <a:cs typeface="Arial" pitchFamily="34" charset="-120"/>
               </a:rPr>
-              <a:t> – What is yoga? </a:t>
-            </a:r>
-            <a:pPr algn="l" indent="0" marL="0">
-              <a:lnSpc>
-                <a:spcPts val="1680"/>
-              </a:lnSpc>
-              <a:spcBef>
-                <a:spcPts val="300"/>
-              </a:spcBef>
+              <a:t> comes from the Sanskrit root </a:t>
+            </a:r>
+            <a:pPr algn="l" indent="0" marL="0">
+              <a:lnSpc>
+                <a:spcPts val="1620"/>
+              </a:lnSpc>
               <a:spcAft>
                 <a:spcPts val="300"/>
               </a:spcAft>
@@ -7223,15 +8600,12 @@
                 <a:ea typeface="Arial" pitchFamily="34" charset="-122"/>
                 <a:cs typeface="Arial" pitchFamily="34" charset="-120"/>
               </a:rPr>
-              <a:t>("Settling the fluctuations of the mind." OR "Skill in action.")</a:t>
-            </a:r>
-            <a:pPr algn="l" indent="0" marL="0">
-              <a:lnSpc>
-                <a:spcPts val="1680"/>
-              </a:lnSpc>
-              <a:spcBef>
-                <a:spcPts val="300"/>
-              </a:spcBef>
+              <a:t>yuj</a:t>
+            </a:r>
+            <a:pPr algn="l" indent="0" marL="0">
+              <a:lnSpc>
+                <a:spcPts val="1620"/>
+              </a:lnSpc>
               <a:spcAft>
                 <a:spcPts val="300"/>
               </a:spcAft>
@@ -7246,122 +8620,7 @@
                 <a:ea typeface="Arial" pitchFamily="34" charset="-122"/>
                 <a:cs typeface="Arial" pitchFamily="34" charset="-120"/>
               </a:rPr>
-              <a:t> – What is </a:t>
-            </a:r>
-            <a:pPr algn="l" indent="0" marL="0">
-              <a:lnSpc>
-                <a:spcPts val="1680"/>
-              </a:lnSpc>
-              <a:spcBef>
-                <a:spcPts val="300"/>
-              </a:spcBef>
-              <a:spcAft>
-                <a:spcPts val="300"/>
-              </a:spcAft>
-              <a:buNone/>
-            </a:pPr>
-            <a:r>
-              <a:rPr lang="en-US" sz="1200" i="1" dirty="0">
-                <a:solidFill>
-                  <a:srgbClr val="1C2833"/>
-                </a:solidFill>
-                <a:latin typeface="Arial" pitchFamily="34" charset="0"/>
-                <a:ea typeface="Arial" pitchFamily="34" charset="-122"/>
-                <a:cs typeface="Arial" pitchFamily="34" charset="-120"/>
-              </a:rPr>
-              <a:t>tāḍāsana</a:t>
-            </a:r>
-            <a:pPr algn="l" indent="0" marL="0">
-              <a:lnSpc>
-                <a:spcPts val="1680"/>
-              </a:lnSpc>
-              <a:spcBef>
-                <a:spcPts val="300"/>
-              </a:spcBef>
-              <a:spcAft>
-                <a:spcPts val="300"/>
-              </a:spcAft>
-              <a:buNone/>
-            </a:pPr>
-            <a:r>
-              <a:rPr lang="en-US" sz="1200" dirty="0">
-                <a:solidFill>
-                  <a:srgbClr val="1C2833"/>
-                </a:solidFill>
-                <a:latin typeface="Arial" pitchFamily="34" charset="0"/>
-                <a:ea typeface="Arial" pitchFamily="34" charset="-122"/>
-                <a:cs typeface="Arial" pitchFamily="34" charset="-120"/>
-              </a:rPr>
-              <a:t>? </a:t>
-            </a:r>
-            <a:pPr algn="l" indent="0" marL="0">
-              <a:lnSpc>
-                <a:spcPts val="1680"/>
-              </a:lnSpc>
-              <a:spcBef>
-                <a:spcPts val="300"/>
-              </a:spcBef>
-              <a:spcAft>
-                <a:spcPts val="300"/>
-              </a:spcAft>
-              <a:buNone/>
-            </a:pPr>
-            <a:r>
-              <a:rPr lang="en-US" sz="1200" i="1" dirty="0">
-                <a:solidFill>
-                  <a:srgbClr val="1C2833"/>
-                </a:solidFill>
-                <a:latin typeface="Arial" pitchFamily="34" charset="0"/>
-                <a:ea typeface="Arial" pitchFamily="34" charset="-122"/>
-                <a:cs typeface="Arial" pitchFamily="34" charset="-120"/>
-              </a:rPr>
-              <a:t>(Mountain posture.)</a:t>
-            </a:r>
-            <a:pPr algn="l" indent="0" marL="0">
-              <a:lnSpc>
-                <a:spcPts val="1680"/>
-              </a:lnSpc>
-              <a:spcBef>
-                <a:spcPts val="300"/>
-              </a:spcBef>
-              <a:spcAft>
-                <a:spcPts val="300"/>
-              </a:spcAft>
-              <a:buNone/>
-            </a:pPr>
-            <a:r>
-              <a:rPr lang="en-US" sz="1200" dirty="0">
-                <a:solidFill>
-                  <a:srgbClr val="1C2833"/>
-                </a:solidFill>
-                <a:latin typeface="Arial" pitchFamily="34" charset="0"/>
-                <a:ea typeface="Arial" pitchFamily="34" charset="-122"/>
-                <a:cs typeface="Arial" pitchFamily="34" charset="-120"/>
-              </a:rPr>
-              <a:t> – Preview Day 2: </a:t>
-            </a:r>
-            <a:pPr algn="l" indent="0" marL="0">
-              <a:lnSpc>
-                <a:spcPts val="1680"/>
-              </a:lnSpc>
-              <a:spcBef>
-                <a:spcPts val="300"/>
-              </a:spcBef>
-              <a:spcAft>
-                <a:spcPts val="300"/>
-              </a:spcAft>
-              <a:buNone/>
-            </a:pPr>
-            <a:r>
-              <a:rPr lang="en-US" sz="1200" i="1" dirty="0">
-                <a:solidFill>
-                  <a:srgbClr val="1C2833"/>
-                </a:solidFill>
-                <a:latin typeface="Arial" pitchFamily="34" charset="0"/>
-                <a:ea typeface="Arial" pitchFamily="34" charset="-122"/>
-                <a:cs typeface="Arial" pitchFamily="34" charset="-120"/>
-              </a:rPr>
-              <a:t>"Tomorrow — the eight limbs. We'll see why posture and breath are only TWO of them."</a:t>
+              <a:t> meaning "to yoke" — to join, to bind together. The yoga tradition uses it to mean the joining of body, breath, and attention — and ultimately the settling of the mind.</a:t>
             </a:r>
             <a:endParaRPr lang="en-US" sz="1200" dirty="0"/>
           </a:p>
